--- a/Documents/DLX-NN_Final_Presentation.pptx
+++ b/Documents/DLX-NN_Final_Presentation.pptx
@@ -5,36 +5,36 @@
     <p:sldMasterId id="2147483648" r:id="rId1"/>
   </p:sldMasterIdLst>
   <p:notesMasterIdLst>
-    <p:notesMasterId r:id="rId3"/>
+    <p:notesMasterId r:id="rId29"/>
   </p:notesMasterIdLst>
   <p:sldIdLst>
     <p:sldId id="256" r:id="rId2"/>
-    <p:sldId id="257" r:id="rId8"/>
-    <p:sldId id="258" r:id="rId9"/>
-    <p:sldId id="259" r:id="rId10"/>
-    <p:sldId id="260" r:id="rId11"/>
-    <p:sldId id="261" r:id="rId12"/>
-    <p:sldId id="262" r:id="rId13"/>
-    <p:sldId id="263" r:id="rId14"/>
-    <p:sldId id="264" r:id="rId15"/>
-    <p:sldId id="265" r:id="rId16"/>
-    <p:sldId id="266" r:id="rId17"/>
-    <p:sldId id="267" r:id="rId18"/>
-    <p:sldId id="268" r:id="rId19"/>
-    <p:sldId id="269" r:id="rId20"/>
-    <p:sldId id="270" r:id="rId21"/>
-    <p:sldId id="271" r:id="rId22"/>
-    <p:sldId id="272" r:id="rId23"/>
-    <p:sldId id="273" r:id="rId24"/>
-    <p:sldId id="274" r:id="rId25"/>
-    <p:sldId id="275" r:id="rId26"/>
-    <p:sldId id="276" r:id="rId27"/>
-    <p:sldId id="277" r:id="rId28"/>
-    <p:sldId id="278" r:id="rId29"/>
-    <p:sldId id="279" r:id="rId30"/>
-    <p:sldId id="280" r:id="rId31"/>
-    <p:sldId id="281" r:id="rId32"/>
-    <p:sldId id="282" r:id="rId33"/>
+    <p:sldId id="257" r:id="rId3"/>
+    <p:sldId id="258" r:id="rId4"/>
+    <p:sldId id="259" r:id="rId5"/>
+    <p:sldId id="260" r:id="rId6"/>
+    <p:sldId id="261" r:id="rId7"/>
+    <p:sldId id="262" r:id="rId8"/>
+    <p:sldId id="263" r:id="rId9"/>
+    <p:sldId id="264" r:id="rId10"/>
+    <p:sldId id="265" r:id="rId11"/>
+    <p:sldId id="266" r:id="rId12"/>
+    <p:sldId id="267" r:id="rId13"/>
+    <p:sldId id="268" r:id="rId14"/>
+    <p:sldId id="269" r:id="rId15"/>
+    <p:sldId id="270" r:id="rId16"/>
+    <p:sldId id="271" r:id="rId17"/>
+    <p:sldId id="272" r:id="rId18"/>
+    <p:sldId id="273" r:id="rId19"/>
+    <p:sldId id="274" r:id="rId20"/>
+    <p:sldId id="275" r:id="rId21"/>
+    <p:sldId id="276" r:id="rId22"/>
+    <p:sldId id="277" r:id="rId23"/>
+    <p:sldId id="278" r:id="rId24"/>
+    <p:sldId id="279" r:id="rId25"/>
+    <p:sldId id="280" r:id="rId26"/>
+    <p:sldId id="281" r:id="rId27"/>
+    <p:sldId id="282" r:id="rId28"/>
   </p:sldIdLst>
   <p:sldSz cx="12192000" cy="6858000"/>
   <p:notesSz cx="6858000" cy="9144000"/>
@@ -133,6 +133,11 @@
       </a:defRPr>
     </a:lvl9pPr>
   </p:defaultTextStyle>
+  <p:extLst>
+    <p:ext uri="{EFAFB233-063F-42B5-8137-9DF3F51BA10A}">
+      <p15:sldGuideLst xmlns:p15="http://schemas.microsoft.com/office/powerpoint/2012/main"/>
+    </p:ext>
+  </p:extLst>
 </p:presentation>
 </file>
 
@@ -218,7 +223,7 @@
           <a:p>
             <a:fld id="{EA97663B-01EE-4D27-B6B8-967932AFFB1A}" type="datetimeFigureOut">
               <a:rPr lang="en-US" smtClean="0"/>
-              <a:t>12/15/2021</a:t>
+              <a:t>8/24/2026</a:t>
             </a:fld>
             <a:endParaRPr lang="en-US"/>
           </a:p>
@@ -282,38 +287,37 @@
           <a:p>
             <a:pPr lvl="0"/>
             <a:r>
-              <a:rPr lang="en-US" smtClean="0"/>
+              <a:rPr lang="en-US"/>
               <a:t>Edit Master text styles</a:t>
             </a:r>
           </a:p>
           <a:p>
             <a:pPr lvl="1"/>
             <a:r>
-              <a:rPr lang="en-US" smtClean="0"/>
+              <a:rPr lang="en-US"/>
               <a:t>Second level</a:t>
             </a:r>
           </a:p>
           <a:p>
             <a:pPr lvl="2"/>
             <a:r>
-              <a:rPr lang="en-US" smtClean="0"/>
+              <a:rPr lang="en-US"/>
               <a:t>Third level</a:t>
             </a:r>
           </a:p>
           <a:p>
             <a:pPr lvl="3"/>
             <a:r>
-              <a:rPr lang="en-US" smtClean="0"/>
+              <a:rPr lang="en-US"/>
               <a:t>Fourth level</a:t>
             </a:r>
           </a:p>
           <a:p>
             <a:pPr lvl="4"/>
             <a:r>
-              <a:rPr lang="en-US" smtClean="0"/>
+              <a:rPr lang="en-US"/>
               <a:t>Fifth level</a:t>
             </a:r>
-            <a:endParaRPr lang="en-US"/>
           </a:p>
         </p:txBody>
       </p:sp>
@@ -487,7 +491,7 @@
 </file>
 
 <file path=ppt/notesSlides/notesSlide1.xml><?xml version="1.0" encoding="utf-8"?>
-<p:notes xmlns:a="http://schemas.openxmlformats.org/drawingml/2006/main" xmlns:p="http://schemas.openxmlformats.org/presentationml/2006/main" xmlns:r="http://schemas.openxmlformats.org/officeDocument/2006/relationships">
+<p:notes xmlns:a="http://schemas.openxmlformats.org/drawingml/2006/main" xmlns:r="http://schemas.openxmlformats.org/officeDocument/2006/relationships" xmlns:p="http://schemas.openxmlformats.org/presentationml/2006/main">
   <p:cSld>
     <p:spTree>
       <p:nvGrpSpPr>
@@ -507,7 +511,7 @@
         <p:nvSpPr>
           <p:cNvPr id="2" name="Slide Image Placeholder 1"/>
           <p:cNvSpPr>
-            <a:spLocks noGrp="1"/>
+            <a:spLocks noGrp="1" noRot="1" noChangeAspect="1"/>
           </p:cNvSpPr>
           <p:nvPr>
             <p:ph type="sldImg" idx="2"/>
@@ -522,7 +526,7 @@
             <a:spLocks noGrp="1"/>
           </p:cNvSpPr>
           <p:nvPr>
-            <p:ph type="body" idx="3" sz="quarter"/>
+            <p:ph type="body" sz="quarter" idx="3"/>
           </p:nvPr>
         </p:nvSpPr>
         <p:spPr/>
@@ -539,7 +543,9 @@
               <a:t>project, supervised by Oren Ganon.</a:t>
             </a:r>
           </a:p>
-          <a:p/>
+          <a:p>
+            <a:endParaRPr/>
+          </a:p>
           <a:p>
             <a:r>
               <a:t>In one sentence: we took a classic teaching processor, the DLX, and we taught</a:t>
@@ -560,7 +566,9 @@
               <a:t>subroutines.</a:t>
             </a:r>
           </a:p>
-          <a:p/>
+          <a:p>
+            <a:endParaRPr/>
+          </a:p>
           <a:p>
             <a:r>
               <a:t>In the next 25 minutes: what the baseline processor could do, what we added, how</a:t>
@@ -576,7 +584,9 @@
               <a:t>real handwritten-digit classifier on it.</a:t>
             </a:r>
           </a:p>
-          <a:p/>
+          <a:p>
+            <a:endParaRPr/>
+          </a:p>
           <a:p>
             <a:r>
               <a:t>SOURCE: project_book/sections/titlepage.tex (supervisor); LaTeX/project_book.tex (student names)</a:t>
@@ -591,7 +601,7 @@
             <a:spLocks noGrp="1"/>
           </p:cNvSpPr>
           <p:nvPr>
-            <p:ph type="sldNum" idx="5" sz="quarter"/>
+            <p:ph type="sldNum" sz="quarter" idx="5"/>
           </p:nvPr>
         </p:nvSpPr>
         <p:spPr/>
@@ -605,7 +615,7 @@
 </file>
 
 <file path=ppt/notesSlides/notesSlide10.xml><?xml version="1.0" encoding="utf-8"?>
-<p:notes xmlns:a="http://schemas.openxmlformats.org/drawingml/2006/main" xmlns:p="http://schemas.openxmlformats.org/presentationml/2006/main" xmlns:r="http://schemas.openxmlformats.org/officeDocument/2006/relationships">
+<p:notes xmlns:a="http://schemas.openxmlformats.org/drawingml/2006/main" xmlns:r="http://schemas.openxmlformats.org/officeDocument/2006/relationships" xmlns:p="http://schemas.openxmlformats.org/presentationml/2006/main">
   <p:cSld>
     <p:spTree>
       <p:nvGrpSpPr>
@@ -625,7 +635,7 @@
         <p:nvSpPr>
           <p:cNvPr id="2" name="Slide Image Placeholder 1"/>
           <p:cNvSpPr>
-            <a:spLocks noGrp="1"/>
+            <a:spLocks noGrp="1" noRot="1" noChangeAspect="1"/>
           </p:cNvSpPr>
           <p:nvPr>
             <p:ph type="sldImg" idx="2"/>
@@ -640,7 +650,7 @@
             <a:spLocks noGrp="1"/>
           </p:cNvSpPr>
           <p:nvPr>
-            <p:ph type="body" idx="3" sz="quarter"/>
+            <p:ph type="body" sz="quarter" idx="3"/>
           </p:nvPr>
         </p:nvSpPr>
         <p:spPr/>
@@ -662,7 +672,9 @@
               <a:t>input, so the hardware has to see the entire vector.</a:t>
             </a:r>
           </a:p>
-          <a:p/>
+          <a:p>
+            <a:endParaRPr/>
+          </a:p>
           <a:p>
             <a:r>
               <a:t>Textbook softmax is the exponential of each score divided by the sum of the</a:t>
@@ -683,7 +695,9 @@
               <a:t>replace both.</a:t>
             </a:r>
           </a:p>
-          <a:p/>
+          <a:p>
+            <a:endParaRPr/>
+          </a:p>
           <a:p>
             <a:r>
               <a:t>Pass one walks the vector once, keeping the largest score so far and a running</a:t>
@@ -704,7 +718,9 @@
               <a:t>the vector again and writes each output.</a:t>
             </a:r>
           </a:p>
-          <a:p/>
+          <a:p>
+            <a:endParaRPr/>
+          </a:p>
           <a:p>
             <a:r>
               <a:t>The exponential becomes shift-exp: multiply by one and a half, split into whole</a:t>
@@ -725,7 +741,9 @@
               <a:t>reciprocal: eight straight segments over powers of two.</a:t>
             </a:r>
           </a:p>
-          <a:p/>
+          <a:p>
+            <a:endParaRPr/>
+          </a:p>
           <a:p>
             <a:r>
               <a:t>Over 1,050 test vectors, up to five hundred elements long, mean squared error is</a:t>
@@ -736,7 +754,9 @@
               <a:t>one times ten to the minus four.</a:t>
             </a:r>
           </a:p>
-          <a:p/>
+          <a:p>
+            <a:endParaRPr/>
+          </a:p>
           <a:p>
             <a:r>
               <a:t>SOURCE: results/DLX-NN_Project_Targets.xlsx, sheet '1. Accuracy'; README.md 'Softmax Instruction'; papers/ (ICECS 2025, Hirayae et al.)</a:t>
@@ -751,7 +771,7 @@
             <a:spLocks noGrp="1"/>
           </p:cNvSpPr>
           <p:nvPr>
-            <p:ph type="sldNum" idx="5" sz="quarter"/>
+            <p:ph type="sldNum" sz="quarter" idx="5"/>
           </p:nvPr>
         </p:nvSpPr>
         <p:spPr/>
@@ -765,7 +785,7 @@
 </file>
 
 <file path=ppt/notesSlides/notesSlide11.xml><?xml version="1.0" encoding="utf-8"?>
-<p:notes xmlns:a="http://schemas.openxmlformats.org/drawingml/2006/main" xmlns:p="http://schemas.openxmlformats.org/presentationml/2006/main" xmlns:r="http://schemas.openxmlformats.org/officeDocument/2006/relationships">
+<p:notes xmlns:a="http://schemas.openxmlformats.org/drawingml/2006/main" xmlns:r="http://schemas.openxmlformats.org/officeDocument/2006/relationships" xmlns:p="http://schemas.openxmlformats.org/presentationml/2006/main">
   <p:cSld>
     <p:spTree>
       <p:nvGrpSpPr>
@@ -785,7 +805,7 @@
         <p:nvSpPr>
           <p:cNvPr id="2" name="Slide Image Placeholder 1"/>
           <p:cNvSpPr>
-            <a:spLocks noGrp="1"/>
+            <a:spLocks noGrp="1" noRot="1" noChangeAspect="1"/>
           </p:cNvSpPr>
           <p:nvPr>
             <p:ph type="sldImg" idx="2"/>
@@ -800,7 +820,7 @@
             <a:spLocks noGrp="1"/>
           </p:cNvSpPr>
           <p:nvPr>
-            <p:ph type="body" idx="3" sz="quarter"/>
+            <p:ph type="body" sz="quarter" idx="3"/>
           </p:nvPr>
         </p:nvSpPr>
         <p:spPr/>
@@ -812,7 +832,9 @@
               <a:t>This is the first of the three requirements, closed out.</a:t>
             </a:r>
           </a:p>
-          <a:p/>
+          <a:p>
+            <a:endParaRPr/>
+          </a:p>
           <a:p>
             <a:r>
               <a:t>The scale is logarithmic, so each gridline is a factor of ten. The black line on</a:t>
@@ -823,7 +845,9 @@
               <a:t>the right is the requirement: mean squared error no worse than 0.025.</a:t>
             </a:r>
           </a:p>
-          <a:p/>
+          <a:p>
+            <a:endParaRPr/>
+          </a:p>
           <a:p>
             <a:r>
               <a:t>Every bar is far to the left of it. GELU is our worst function at five ten-thousandths,</a:t>
@@ -844,7 +868,9 @@
               <a:t>the scale so you can see the label.</a:t>
             </a:r>
           </a:p>
-          <a:p/>
+          <a:p>
+            <a:endParaRPr/>
+          </a:p>
           <a:p>
             <a:r>
               <a:t>Softmax was measured differently from the others: not by sweeping one input, but</a:t>
@@ -855,7 +881,9 @@
               <a:t>by running 1,050 complete vectors of up to five hundred elements each.</a:t>
             </a:r>
           </a:p>
-          <a:p/>
+          <a:p>
+            <a:endParaRPr/>
+          </a:p>
           <a:p>
             <a:r>
               <a:t>Requirement one: met, with a very large margin. Now the harder question — how</a:t>
@@ -866,7 +894,9 @@
               <a:t>much faster is it, and what did it cost.</a:t>
             </a:r>
           </a:p>
-          <a:p/>
+          <a:p>
+            <a:endParaRPr/>
+          </a:p>
           <a:p>
             <a:r>
               <a:t>SOURCE: results/DLX-NN_Project_Targets.xlsx, sheet '1. Accuracy'</a:t>
@@ -881,7 +911,7 @@
             <a:spLocks noGrp="1"/>
           </p:cNvSpPr>
           <p:nvPr>
-            <p:ph type="sldNum" idx="5" sz="quarter"/>
+            <p:ph type="sldNum" sz="quarter" idx="5"/>
           </p:nvPr>
         </p:nvSpPr>
         <p:spPr/>
@@ -895,7 +925,7 @@
 </file>
 
 <file path=ppt/notesSlides/notesSlide12.xml><?xml version="1.0" encoding="utf-8"?>
-<p:notes xmlns:a="http://schemas.openxmlformats.org/drawingml/2006/main" xmlns:p="http://schemas.openxmlformats.org/presentationml/2006/main" xmlns:r="http://schemas.openxmlformats.org/officeDocument/2006/relationships">
+<p:notes xmlns:a="http://schemas.openxmlformats.org/drawingml/2006/main" xmlns:r="http://schemas.openxmlformats.org/officeDocument/2006/relationships" xmlns:p="http://schemas.openxmlformats.org/presentationml/2006/main">
   <p:cSld>
     <p:spTree>
       <p:nvGrpSpPr>
@@ -915,7 +945,7 @@
         <p:nvSpPr>
           <p:cNvPr id="2" name="Slide Image Placeholder 1"/>
           <p:cNvSpPr>
-            <a:spLocks noGrp="1"/>
+            <a:spLocks noGrp="1" noRot="1" noChangeAspect="1"/>
           </p:cNvSpPr>
           <p:nvPr>
             <p:ph type="sldImg" idx="2"/>
@@ -930,7 +960,7 @@
             <a:spLocks noGrp="1"/>
           </p:cNvSpPr>
           <p:nvPr>
-            <p:ph type="body" idx="3" sz="quarter"/>
+            <p:ph type="body" sz="quarter" idx="3"/>
           </p:nvPr>
         </p:nvSpPr>
         <p:spPr/>
@@ -952,7 +982,9 @@
               <a:t>list is.</a:t>
             </a:r>
           </a:p>
-          <a:p/>
+          <a:p>
+            <a:endParaRPr/>
+          </a:p>
           <a:p>
             <a:r>
               <a:t>One: the Activation Engine, inside the data path. That is the block that</a:t>
@@ -963,7 +995,9 @@
               <a:t>computes all five functions.</a:t>
             </a:r>
           </a:p>
-          <a:p/>
+          <a:p>
+            <a:endParaRPr/>
+          </a:p>
           <a:p>
             <a:r>
               <a:t>Two: a new multiplexer that lets an instruction's result come from the</a:t>
@@ -974,7 +1008,9 @@
               <a:t>activation engine instead of the ALU.</a:t>
             </a:r>
           </a:p>
-          <a:p/>
+          <a:p>
+            <a:endParaRPr/>
+          </a:p>
           <a:p>
             <a:r>
               <a:t>Three: a memory arbiter between the processor and the SRAM, because the softmax</a:t>
@@ -985,13 +1021,17 @@
               <a:t>engine needs the memory bus for itself.</a:t>
             </a:r>
           </a:p>
-          <a:p/>
+          <a:p>
+            <a:endParaRPr/>
+          </a:p>
           <a:p>
             <a:r>
               <a:t>Plus four new states in the instruction FSM.</a:t>
             </a:r>
           </a:p>
-          <a:p/>
+          <a:p>
+            <a:endParaRPr/>
+          </a:p>
           <a:p>
             <a:r>
               <a:t>Everything else — the register file, the ALU, the shifter, the memory FSM, the</a:t>
@@ -1002,13 +1042,17 @@
               <a:t>SRAM — is untouched. We did not redesign the processor. We attached to it.</a:t>
             </a:r>
           </a:p>
-          <a:p/>
+          <a:p>
+            <a:endParaRPr/>
+          </a:p>
           <a:p>
             <a:r>
               <a:t>The next six slides walk through each of those pieces.</a:t>
             </a:r>
           </a:p>
-          <a:p/>
+          <a:p>
+            <a:endParaRPr/>
+          </a:p>
           <a:p>
             <a:r>
               <a:t>SOURCE: docs/architecture_block_diagrams.md (BEFORE / AFTER); README.md 'Architecture Overview'</a:t>
@@ -1023,7 +1067,7 @@
             <a:spLocks noGrp="1"/>
           </p:cNvSpPr>
           <p:nvPr>
-            <p:ph type="sldNum" idx="5" sz="quarter"/>
+            <p:ph type="sldNum" sz="quarter" idx="5"/>
           </p:nvPr>
         </p:nvSpPr>
         <p:spPr/>
@@ -1037,7 +1081,7 @@
 </file>
 
 <file path=ppt/notesSlides/notesSlide13.xml><?xml version="1.0" encoding="utf-8"?>
-<p:notes xmlns:a="http://schemas.openxmlformats.org/drawingml/2006/main" xmlns:p="http://schemas.openxmlformats.org/presentationml/2006/main" xmlns:r="http://schemas.openxmlformats.org/officeDocument/2006/relationships">
+<p:notes xmlns:a="http://schemas.openxmlformats.org/drawingml/2006/main" xmlns:r="http://schemas.openxmlformats.org/officeDocument/2006/relationships" xmlns:p="http://schemas.openxmlformats.org/presentationml/2006/main">
   <p:cSld>
     <p:spTree>
       <p:nvGrpSpPr>
@@ -1057,7 +1101,7 @@
         <p:nvSpPr>
           <p:cNvPr id="2" name="Slide Image Placeholder 1"/>
           <p:cNvSpPr>
-            <a:spLocks noGrp="1"/>
+            <a:spLocks noGrp="1" noRot="1" noChangeAspect="1"/>
           </p:cNvSpPr>
           <p:nvPr>
             <p:ph type="sldImg" idx="2"/>
@@ -1072,7 +1116,7 @@
             <a:spLocks noGrp="1"/>
           </p:cNvSpPr>
           <p:nvPr>
-            <p:ph type="body" idx="3" sz="quarter"/>
+            <p:ph type="body" sz="quarter" idx="3"/>
           </p:nvPr>
         </p:nvSpPr>
         <p:spPr/>
@@ -1084,7 +1128,9 @@
               <a:t>Inside the engine — this is where the area saving lives.</a:t>
             </a:r>
           </a:p>
-          <a:p/>
+          <a:p>
+            <a:endParaRPr/>
+          </a:p>
           <a:p>
             <a:r>
               <a:t>Look at the top row. Sigmoid, tanh and GELU are three instructions taking one</a:t>
@@ -1105,7 +1151,9 @@
               <a:t>minus one, or x times y coming out.</a:t>
             </a:r>
           </a:p>
-          <a:p/>
+          <a:p>
+            <a:endParaRPr/>
+          </a:p>
           <a:p>
             <a:r>
               <a:t>So the expensive part — the sigmoid core with its comparators, adders and</a:t>
@@ -1121,7 +1169,9 @@
               <a:t>have cost roughly three times the area for no extra capability.</a:t>
             </a:r>
           </a:p>
-          <a:p/>
+          <a:p>
+            <a:endParaRPr/>
+          </a:p>
           <a:p>
             <a:r>
               <a:t>ReLU sits outside that path — it shares nothing with sigmoid, it is one sign-bit</a:t>
@@ -1142,13 +1192,17 @@
               <a:t>itself. More on that shortly.</a:t>
             </a:r>
           </a:p>
-          <a:p/>
+          <a:p>
+            <a:endParaRPr/>
+          </a:p>
           <a:p>
             <a:r>
               <a:t>At the right, a multiplexer picks whichever result was asked for.</a:t>
             </a:r>
           </a:p>
-          <a:p/>
+          <a:p>
+            <a:endParaRPr/>
+          </a:p>
           <a:p>
             <a:r>
               <a:t>SOURCE: README.md 'sigmoid_subenv - Shared Sigmoid Core'; design/sigmoid_subenv/sigmoid_subenv.v</a:t>
@@ -1163,7 +1217,7 @@
             <a:spLocks noGrp="1"/>
           </p:cNvSpPr>
           <p:nvPr>
-            <p:ph type="sldNum" idx="5" sz="quarter"/>
+            <p:ph type="sldNum" sz="quarter" idx="5"/>
           </p:nvPr>
         </p:nvSpPr>
         <p:spPr/>
@@ -1177,7 +1231,7 @@
 </file>
 
 <file path=ppt/notesSlides/notesSlide14.xml><?xml version="1.0" encoding="utf-8"?>
-<p:notes xmlns:a="http://schemas.openxmlformats.org/drawingml/2006/main" xmlns:p="http://schemas.openxmlformats.org/presentationml/2006/main" xmlns:r="http://schemas.openxmlformats.org/officeDocument/2006/relationships">
+<p:notes xmlns:a="http://schemas.openxmlformats.org/drawingml/2006/main" xmlns:r="http://schemas.openxmlformats.org/officeDocument/2006/relationships" xmlns:p="http://schemas.openxmlformats.org/presentationml/2006/main">
   <p:cSld>
     <p:spTree>
       <p:nvGrpSpPr>
@@ -1197,7 +1251,7 @@
         <p:nvSpPr>
           <p:cNvPr id="2" name="Slide Image Placeholder 1"/>
           <p:cNvSpPr>
-            <a:spLocks noGrp="1"/>
+            <a:spLocks noGrp="1" noRot="1" noChangeAspect="1"/>
           </p:cNvSpPr>
           <p:nvPr>
             <p:ph type="sldImg" idx="2"/>
@@ -1212,7 +1266,7 @@
             <a:spLocks noGrp="1"/>
           </p:cNvSpPr>
           <p:nvPr>
-            <p:ph type="body" idx="3" sz="quarter"/>
+            <p:ph type="body" sz="quarter" idx="3"/>
           </p:nvPr>
         </p:nvSpPr>
         <p:spPr/>
@@ -1229,7 +1283,9 @@
               <a:t>the data path. It did not.</a:t>
             </a:r>
           </a:p>
-          <a:p/>
+          <a:p>
+            <a:endParaRPr/>
+          </a:p>
           <a:p>
             <a:r>
               <a:t>Before, the result that gets written into a destination register always came</a:t>
@@ -1240,7 +1296,9 @@
               <a:t>from the ALU. One wire.</a:t>
             </a:r>
           </a:p>
-          <a:p/>
+          <a:p>
+            <a:endParaRPr/>
+          </a:p>
           <a:p>
             <a:r>
               <a:t>After, there is a two-to-one multiplexer in front of that same wire. If the</a:t>
@@ -1256,7 +1314,9 @@
               <a:t>from the activation engine. Otherwise it comes from the ALU, exactly as before.</a:t>
             </a:r>
           </a:p>
-          <a:p/>
+          <a:p>
+            <a:endParaRPr/>
+          </a:p>
           <a:p>
             <a:r>
               <a:t>We chose the opcodes deliberately so that this test is three bits, not a full</a:t>
@@ -1272,7 +1332,9 @@
               <a:t>in the one-one-one block: sigmoid, tanh, GELU, ReLU, softmax.</a:t>
             </a:r>
           </a:p>
-          <a:p/>
+          <a:p>
+            <a:endParaRPr/>
+          </a:p>
           <a:p>
             <a:r>
               <a:t>No new register-file port. No second write-back path. No change to the timing of</a:t>
@@ -1283,7 +1345,9 @@
               <a:t>any existing instruction. That is the whole modification.</a:t>
             </a:r>
           </a:p>
-          <a:p/>
+          <a:p>
+            <a:endParaRPr/>
+          </a:p>
           <a:p>
             <a:r>
               <a:t>SOURCE: docs/architecture_block_diagrams.md, 'Changed: DINT_0_IN mux'; opcode map from RESA_ENV/OPCODES.md</a:t>
@@ -1298,7 +1362,7 @@
             <a:spLocks noGrp="1"/>
           </p:cNvSpPr>
           <p:nvPr>
-            <p:ph type="sldNum" idx="5" sz="quarter"/>
+            <p:ph type="sldNum" sz="quarter" idx="5"/>
           </p:nvPr>
         </p:nvSpPr>
         <p:spPr/>
@@ -1312,7 +1376,7 @@
 </file>
 
 <file path=ppt/notesSlides/notesSlide15.xml><?xml version="1.0" encoding="utf-8"?>
-<p:notes xmlns:a="http://schemas.openxmlformats.org/drawingml/2006/main" xmlns:p="http://schemas.openxmlformats.org/presentationml/2006/main" xmlns:r="http://schemas.openxmlformats.org/officeDocument/2006/relationships">
+<p:notes xmlns:a="http://schemas.openxmlformats.org/drawingml/2006/main" xmlns:r="http://schemas.openxmlformats.org/officeDocument/2006/relationships" xmlns:p="http://schemas.openxmlformats.org/presentationml/2006/main">
   <p:cSld>
     <p:spTree>
       <p:nvGrpSpPr>
@@ -1332,7 +1396,7 @@
         <p:nvSpPr>
           <p:cNvPr id="2" name="Slide Image Placeholder 1"/>
           <p:cNvSpPr>
-            <a:spLocks noGrp="1"/>
+            <a:spLocks noGrp="1" noRot="1" noChangeAspect="1"/>
           </p:cNvSpPr>
           <p:nvPr>
             <p:ph type="sldImg" idx="2"/>
@@ -1347,7 +1411,7 @@
             <a:spLocks noGrp="1"/>
           </p:cNvSpPr>
           <p:nvPr>
-            <p:ph type="body" idx="3" sz="quarter"/>
+            <p:ph type="body" sz="quarter" idx="3"/>
           </p:nvPr>
         </p:nvSpPr>
         <p:spPr/>
@@ -1369,13 +1433,17 @@
               <a:t>multiplexer, and so on.</a:t>
             </a:r>
           </a:p>
-          <a:p/>
+          <a:p>
+            <a:endParaRPr/>
+          </a:p>
           <a:p>
             <a:r>
               <a:t>We added three going out.</a:t>
             </a:r>
           </a:p>
-          <a:p/>
+          <a:p>
+            <a:endParaRPr/>
+          </a:p>
           <a:p>
             <a:r>
               <a:t>sigmoid, two bits, says which of the three sigmoid-family functions is wanted:</a:t>
@@ -1391,13 +1459,17 @@
               <a:t>saw two slides ago.</a:t>
             </a:r>
           </a:p>
-          <a:p/>
+          <a:p>
+            <a:endParaRPr/>
+          </a:p>
           <a:p>
             <a:r>
               <a:t>ACTIVATION_sel picks between the sigmoid path and the ReLU path.</a:t>
             </a:r>
           </a:p>
-          <a:p/>
+          <a:p>
+            <a:endParaRPr/>
+          </a:p>
           <a:p>
             <a:r>
               <a:t>softmax_start is a single-cycle pulse. It tells the softmax engine to begin, and</a:t>
@@ -1408,7 +1480,9 @@
               <a:t>then the control unit lets go.</a:t>
             </a:r>
           </a:p>
-          <a:p/>
+          <a:p>
+            <a:endParaRPr/>
+          </a:p>
           <a:p>
             <a:r>
               <a:t>And one signal comes back: softmax_done. Because softmax takes many cycles and</a:t>
@@ -1424,7 +1498,9 @@
               <a:t>count. It waits for the engine to say it has finished.</a:t>
             </a:r>
           </a:p>
-          <a:p/>
+          <a:p>
+            <a:endParaRPr/>
+          </a:p>
           <a:p>
             <a:r>
               <a:t>None of the twenty original signals changed meaning. That matters — it means</a:t>
@@ -1435,7 +1511,9 @@
               <a:t>every existing instruction still executes exactly as it did before.</a:t>
             </a:r>
           </a:p>
-          <a:p/>
+          <a:p>
+            <a:endParaRPr/>
+          </a:p>
           <a:p>
             <a:r>
               <a:t>SOURCE: docs/architecture_block_diagrams.md, 'NEW outputs' / 'NEW input'</a:t>
@@ -1450,7 +1528,7 @@
             <a:spLocks noGrp="1"/>
           </p:cNvSpPr>
           <p:nvPr>
-            <p:ph type="sldNum" idx="5" sz="quarter"/>
+            <p:ph type="sldNum" sz="quarter" idx="5"/>
           </p:nvPr>
         </p:nvSpPr>
         <p:spPr/>
@@ -1464,7 +1542,7 @@
 </file>
 
 <file path=ppt/notesSlides/notesSlide16.xml><?xml version="1.0" encoding="utf-8"?>
-<p:notes xmlns:a="http://schemas.openxmlformats.org/drawingml/2006/main" xmlns:p="http://schemas.openxmlformats.org/presentationml/2006/main" xmlns:r="http://schemas.openxmlformats.org/officeDocument/2006/relationships">
+<p:notes xmlns:a="http://schemas.openxmlformats.org/drawingml/2006/main" xmlns:r="http://schemas.openxmlformats.org/officeDocument/2006/relationships" xmlns:p="http://schemas.openxmlformats.org/presentationml/2006/main">
   <p:cSld>
     <p:spTree>
       <p:nvGrpSpPr>
@@ -1484,7 +1562,7 @@
         <p:nvSpPr>
           <p:cNvPr id="2" name="Slide Image Placeholder 1"/>
           <p:cNvSpPr>
-            <a:spLocks noGrp="1"/>
+            <a:spLocks noGrp="1" noRot="1" noChangeAspect="1"/>
           </p:cNvSpPr>
           <p:nvPr>
             <p:ph type="sldImg" idx="2"/>
@@ -1499,7 +1577,7 @@
             <a:spLocks noGrp="1"/>
           </p:cNvSpPr>
           <p:nvPr>
-            <p:ph type="body" idx="3" sz="quarter"/>
+            <p:ph type="body" sz="quarter" idx="3"/>
           </p:nvPr>
         </p:nvSpPr>
         <p:spPr/>
@@ -1516,13 +1594,17 @@
               <a:t>fetch, decode, then whichever states that instruction needs, then write back.</a:t>
             </a:r>
           </a:p>
-          <a:p/>
+          <a:p>
+            <a:endParaRPr/>
+          </a:p>
           <a:p>
             <a:r>
               <a:t>Decode now has four more destinations.</a:t>
             </a:r>
           </a:p>
-          <a:p/>
+          <a:p>
+            <a:endParaRPr/>
+          </a:p>
           <a:p>
             <a:r>
               <a:t>S_SIGMOID, state twenty-one, handles sigmoid, tanh and GELU. Sigmoid and tanh</a:t>
@@ -1543,13 +1625,17 @@
               <a:t>length.</a:t>
             </a:r>
           </a:p>
-          <a:p/>
+          <a:p>
+            <a:endParaRPr/>
+          </a:p>
           <a:p>
             <a:r>
               <a:t>S_RELU, state twenty-three, does the same for ReLU, in one cycle.</a:t>
             </a:r>
           </a:p>
-          <a:p/>
+          <a:p>
+            <a:endParaRPr/>
+          </a:p>
           <a:p>
             <a:r>
               <a:t>The two softmax states are different. S_SOFTMAX_START, state twenty-two, pulses</a:t>
@@ -1575,7 +1661,9 @@
               <a:t>how long everything takes.</a:t>
             </a:r>
           </a:p>
-          <a:p/>
+          <a:p>
+            <a:endParaRPr/>
+          </a:p>
           <a:p>
             <a:r>
               <a:t>Notice that softmax does not go to write back. Its results are already in</a:t>
@@ -1586,7 +1674,9 @@
               <a:t>memory, so it returns straight to fetch.</a:t>
             </a:r>
           </a:p>
-          <a:p/>
+          <a:p>
+            <a:endParaRPr/>
+          </a:p>
           <a:p>
             <a:r>
               <a:t>SOURCE: docs/architecture_block_diagrams.md; state numbers from CLAUDE.md (S_SIGMOID 21, S_SOFTMAX_START 22, S_RELU 23, S_SOFTMAX_RUN 24)</a:t>
@@ -1601,7 +1691,7 @@
             <a:spLocks noGrp="1"/>
           </p:cNvSpPr>
           <p:nvPr>
-            <p:ph type="sldNum" idx="5" sz="quarter"/>
+            <p:ph type="sldNum" sz="quarter" idx="5"/>
           </p:nvPr>
         </p:nvSpPr>
         <p:spPr/>
@@ -1615,7 +1705,7 @@
 </file>
 
 <file path=ppt/notesSlides/notesSlide17.xml><?xml version="1.0" encoding="utf-8"?>
-<p:notes xmlns:a="http://schemas.openxmlformats.org/drawingml/2006/main" xmlns:p="http://schemas.openxmlformats.org/presentationml/2006/main" xmlns:r="http://schemas.openxmlformats.org/officeDocument/2006/relationships">
+<p:notes xmlns:a="http://schemas.openxmlformats.org/drawingml/2006/main" xmlns:r="http://schemas.openxmlformats.org/officeDocument/2006/relationships" xmlns:p="http://schemas.openxmlformats.org/presentationml/2006/main">
   <p:cSld>
     <p:spTree>
       <p:nvGrpSpPr>
@@ -1635,7 +1725,7 @@
         <p:nvSpPr>
           <p:cNvPr id="2" name="Slide Image Placeholder 1"/>
           <p:cNvSpPr>
-            <a:spLocks noGrp="1"/>
+            <a:spLocks noGrp="1" noRot="1" noChangeAspect="1"/>
           </p:cNvSpPr>
           <p:nvPr>
             <p:ph type="sldImg" idx="2"/>
@@ -1650,7 +1740,7 @@
             <a:spLocks noGrp="1"/>
           </p:cNvSpPr>
           <p:nvPr>
-            <p:ph type="body" idx="3" sz="quarter"/>
+            <p:ph type="body" sz="quarter" idx="3"/>
           </p:nvPr>
         </p:nvSpPr>
         <p:spPr/>
@@ -1662,7 +1752,9 @@
               <a:t>Here is the problem the arbiter solves.</a:t>
             </a:r>
           </a:p>
-          <a:p/>
+          <a:p>
+            <a:endParaRPr/>
+          </a:p>
           <a:p>
             <a:r>
               <a:t>The DLX was built on the assumption that it is the only thing touching memory.</a:t>
@@ -1678,7 +1770,9 @@
               <a:t>signals directly.</a:t>
             </a:r>
           </a:p>
-          <a:p/>
+          <a:p>
+            <a:endParaRPr/>
+          </a:p>
           <a:p>
             <a:r>
               <a:t>The softmax engine also needs memory — it streams a whole vector in and a whole</a:t>
@@ -1694,7 +1788,9 @@
               <a:t>drivers fighting on the same wires.</a:t>
             </a:r>
           </a:p>
-          <a:p/>
+          <a:p>
+            <a:endParaRPr/>
+          </a:p>
           <a:p>
             <a:r>
               <a:t>So we put a two-to-one switch in between, controlled by one signal: is the</a:t>
@@ -1710,7 +1806,9 @@
               <a:t>requests are held off. If no, the processor owns it, exactly as before.</a:t>
             </a:r>
           </a:p>
-          <a:p/>
+          <a:p>
+            <a:endParaRPr/>
+          </a:p>
           <a:p>
             <a:r>
               <a:t>Because the DLX is stopped in the waiting state while softmax runs, it is not</a:t>
@@ -1726,7 +1824,9 @@
               <a:t>delayed — but the arbiter guarantees it, rather than relying on that being true.</a:t>
             </a:r>
           </a:p>
-          <a:p/>
+          <a:p>
+            <a:endParaRPr/>
+          </a:p>
           <a:p>
             <a:r>
               <a:t>SOURCE: docs/architecture_block_diagrams.md, 'mem_arbiter'; final_simple_DLX/.../mem_arbiter.v</a:t>
@@ -1741,7 +1841,7 @@
             <a:spLocks noGrp="1"/>
           </p:cNvSpPr>
           <p:nvPr>
-            <p:ph type="sldNum" idx="5" sz="quarter"/>
+            <p:ph type="sldNum" sz="quarter" idx="5"/>
           </p:nvPr>
         </p:nvSpPr>
         <p:spPr/>
@@ -1755,7 +1855,7 @@
 </file>
 
 <file path=ppt/notesSlides/notesSlide18.xml><?xml version="1.0" encoding="utf-8"?>
-<p:notes xmlns:a="http://schemas.openxmlformats.org/drawingml/2006/main" xmlns:p="http://schemas.openxmlformats.org/presentationml/2006/main" xmlns:r="http://schemas.openxmlformats.org/officeDocument/2006/relationships">
+<p:notes xmlns:a="http://schemas.openxmlformats.org/drawingml/2006/main" xmlns:r="http://schemas.openxmlformats.org/officeDocument/2006/relationships" xmlns:p="http://schemas.openxmlformats.org/presentationml/2006/main">
   <p:cSld>
     <p:spTree>
       <p:nvGrpSpPr>
@@ -1775,7 +1875,7 @@
         <p:nvSpPr>
           <p:cNvPr id="2" name="Slide Image Placeholder 1"/>
           <p:cNvSpPr>
-            <a:spLocks noGrp="1"/>
+            <a:spLocks noGrp="1" noRot="1" noChangeAspect="1"/>
           </p:cNvSpPr>
           <p:nvPr>
             <p:ph type="sldImg" idx="2"/>
@@ -1790,7 +1890,7 @@
             <a:spLocks noGrp="1"/>
           </p:cNvSpPr>
           <p:nvPr>
-            <p:ph type="body" idx="3" sz="quarter"/>
+            <p:ph type="body" sz="quarter" idx="3"/>
           </p:nvPr>
         </p:nvSpPr>
         <p:spPr/>
@@ -1802,7 +1902,9 @@
               <a:t>This is the design decision I most want you to take away.</a:t>
             </a:r>
           </a:p>
-          <a:p/>
+          <a:p>
+            <a:endParaRPr/>
+          </a:p>
           <a:p>
             <a:r>
               <a:t>The other four functions take one number and give one back — that fits the</a:t>
@@ -1823,7 +1925,9 @@
               <a:t>sum over all elements.</a:t>
             </a:r>
           </a:p>
-          <a:p/>
+          <a:p>
+            <a:endParaRPr/>
+          </a:p>
           <a:p>
             <a:r>
               <a:t>On the left is the obvious approach: pull the vector through the register file.</a:t>
@@ -1844,7 +1948,9 @@
               <a:t>tens of thousands of cycles just moving data.</a:t>
             </a:r>
           </a:p>
-          <a:p/>
+          <a:p>
+            <a:endParaRPr/>
+          </a:p>
           <a:p>
             <a:r>
               <a:t>On the right is what we built. The softmax instruction hands the engine two</a:t>
@@ -1860,7 +1966,9 @@
               <a:t>writes memory directly. The vector never enters a register.</a:t>
             </a:r>
           </a:p>
-          <a:p/>
+          <a:p>
+            <a:endParaRPr/>
+          </a:p>
           <a:p>
             <a:r>
               <a:t>That is why the memory arbiter had to exist, and it is why softmax shows the</a:t>
@@ -1871,7 +1979,9 @@
               <a:t>biggest speed-up of all five functions, which you will see in a moment.</a:t>
             </a:r>
           </a:p>
-          <a:p/>
+          <a:p>
+            <a:endParaRPr/>
+          </a:p>
           <a:p>
             <a:r>
               <a:t>SOURCE: README.md 'Softmax Instruction'; design/Softmax/softmax_dma.v; load/store latency 14 clk from results/timing results/*.txt</a:t>
@@ -1886,7 +1996,7 @@
             <a:spLocks noGrp="1"/>
           </p:cNvSpPr>
           <p:nvPr>
-            <p:ph type="sldNum" idx="5" sz="quarter"/>
+            <p:ph type="sldNum" sz="quarter" idx="5"/>
           </p:nvPr>
         </p:nvSpPr>
         <p:spPr/>
@@ -1900,7 +2010,7 @@
 </file>
 
 <file path=ppt/notesSlides/notesSlide19.xml><?xml version="1.0" encoding="utf-8"?>
-<p:notes xmlns:a="http://schemas.openxmlformats.org/drawingml/2006/main" xmlns:p="http://schemas.openxmlformats.org/presentationml/2006/main" xmlns:r="http://schemas.openxmlformats.org/officeDocument/2006/relationships">
+<p:notes xmlns:a="http://schemas.openxmlformats.org/drawingml/2006/main" xmlns:r="http://schemas.openxmlformats.org/officeDocument/2006/relationships" xmlns:p="http://schemas.openxmlformats.org/presentationml/2006/main">
   <p:cSld>
     <p:spTree>
       <p:nvGrpSpPr>
@@ -1920,7 +2030,7 @@
         <p:nvSpPr>
           <p:cNvPr id="2" name="Slide Image Placeholder 1"/>
           <p:cNvSpPr>
-            <a:spLocks noGrp="1"/>
+            <a:spLocks noGrp="1" noRot="1" noChangeAspect="1"/>
           </p:cNvSpPr>
           <p:nvPr>
             <p:ph type="sldImg" idx="2"/>
@@ -1935,7 +2045,7 @@
             <a:spLocks noGrp="1"/>
           </p:cNvSpPr>
           <p:nvPr>
-            <p:ph type="body" idx="3" sz="quarter"/>
+            <p:ph type="body" sz="quarter" idx="3"/>
           </p:nvPr>
         </p:nvSpPr>
         <p:spPr/>
@@ -1952,7 +2062,9 @@
               <a:t>actually correct?</a:t>
             </a:r>
           </a:p>
-          <a:p/>
+          <a:p>
+            <a:endParaRPr/>
+          </a:p>
           <a:p>
             <a:r>
               <a:t>The answer is that nothing in this project was checked by looking at a waveform</a:t>
@@ -1988,7 +2100,9 @@
               <a:t>against thirty-two bits. Not approximately equal — identical.</a:t>
             </a:r>
           </a:p>
-          <a:p/>
+          <a:p>
+            <a:endParaRPr/>
+          </a:p>
           <a:p>
             <a:r>
               <a:t>The scale is the point. Sigmoid was swept with 655,362 inputs, GELU with</a:t>
@@ -2024,7 +2138,9 @@
               <a:t>vector was actually exercised.</a:t>
             </a:r>
           </a:p>
-          <a:p/>
+          <a:p>
+            <a:endParaRPr/>
+          </a:p>
           <a:p>
             <a:r>
               <a:t>And it did find real bugs. Early softmax runs failed on extreme-spread vectors —</a:t>
@@ -2040,7 +2156,9 @@
               <a:t>and re-ran the whole suite after every change.</a:t>
             </a:r>
           </a:p>
-          <a:p/>
+          <a:p>
+            <a:endParaRPr/>
+          </a:p>
           <a:p>
             <a:r>
               <a:t>The last piece is on the right, and it is the one a processor designer should</a:t>
@@ -2066,7 +2184,9 @@
               <a:t>quietly break the machine we started from.</a:t>
             </a:r>
           </a:p>
-          <a:p/>
+          <a:p>
+            <a:endParaRPr/>
+          </a:p>
           <a:p>
             <a:r>
               <a:t>SOURCE: project_book/sections/simulation.tex 'RTL Testbench Results'; vector counts from design/sigmoid_subenv/*_vectors.sv and design/Softmax/softmax_vectors.sv (SOFTMAX_NUM_TESTS = 1050)</a:t>
@@ -2081,7 +2201,7 @@
             <a:spLocks noGrp="1"/>
           </p:cNvSpPr>
           <p:nvPr>
-            <p:ph type="sldNum" idx="5" sz="quarter"/>
+            <p:ph type="sldNum" sz="quarter" idx="5"/>
           </p:nvPr>
         </p:nvSpPr>
         <p:spPr/>
@@ -2095,7 +2215,7 @@
 </file>
 
 <file path=ppt/notesSlides/notesSlide2.xml><?xml version="1.0" encoding="utf-8"?>
-<p:notes xmlns:a="http://schemas.openxmlformats.org/drawingml/2006/main" xmlns:p="http://schemas.openxmlformats.org/presentationml/2006/main" xmlns:r="http://schemas.openxmlformats.org/officeDocument/2006/relationships">
+<p:notes xmlns:a="http://schemas.openxmlformats.org/drawingml/2006/main" xmlns:r="http://schemas.openxmlformats.org/officeDocument/2006/relationships" xmlns:p="http://schemas.openxmlformats.org/presentationml/2006/main">
   <p:cSld>
     <p:spTree>
       <p:nvGrpSpPr>
@@ -2115,7 +2235,7 @@
         <p:nvSpPr>
           <p:cNvPr id="2" name="Slide Image Placeholder 1"/>
           <p:cNvSpPr>
-            <a:spLocks noGrp="1"/>
+            <a:spLocks noGrp="1" noRot="1" noChangeAspect="1"/>
           </p:cNvSpPr>
           <p:nvPr>
             <p:ph type="sldImg" idx="2"/>
@@ -2130,7 +2250,7 @@
             <a:spLocks noGrp="1"/>
           </p:cNvSpPr>
           <p:nvPr>
-            <p:ph type="body" idx="3" sz="quarter"/>
+            <p:ph type="body" sz="quarter" idx="3"/>
           </p:nvPr>
         </p:nvSpPr>
         <p:spPr/>
@@ -2142,7 +2262,9 @@
               <a:t>Start with why anyone would want this at all.</a:t>
             </a:r>
           </a:p>
-          <a:p/>
+          <a:p>
+            <a:endParaRPr/>
+          </a:p>
           <a:p>
             <a:r>
               <a:t>Neural networks are not only a data-centre thing any more. They run on the small</a:t>
@@ -2168,7 +2290,9 @@
               <a:t>integer processor, exactly like the one this project is built on.</a:t>
             </a:r>
           </a:p>
-          <a:p/>
+          <a:p>
+            <a:endParaRPr/>
+          </a:p>
           <a:p>
             <a:r>
               <a:t>Now, what does a neural network actually ask that processor to do? Look at the</a:t>
@@ -2194,7 +2318,9 @@
               <a:t>it.</a:t>
             </a:r>
           </a:p>
-          <a:p/>
+          <a:p>
+            <a:endParaRPr/>
+          </a:p>
           <a:p>
             <a:r>
               <a:t>The expensive part is the circles. Every neuron, after it has done its sum,</a:t>
@@ -2220,7 +2346,9 @@
               <a:t>deep learning, this non-linear step is what makes depth mean anything.</a:t>
             </a:r>
           </a:p>
-          <a:p/>
+          <a:p>
+            <a:endParaRPr/>
+          </a:p>
           <a:p>
             <a:r>
               <a:t>So how hard can one function be? Look at the two formulas. Sigmoid is one over</a:t>
@@ -2236,7 +2364,9 @@
               <a:t>Between them they need an exponential and a division.</a:t>
             </a:r>
           </a:p>
-          <a:p/>
+          <a:p>
+            <a:endParaRPr/>
+          </a:p>
           <a:p>
             <a:r>
               <a:t>Our processor has neither. No exponential instruction, no divider. So on this</a:t>
@@ -2257,7 +2387,9 @@
               <a:t>is where the time goes.</a:t>
             </a:r>
           </a:p>
-          <a:p/>
+          <a:p>
+            <a:endParaRPr/>
+          </a:p>
           <a:p>
             <a:r>
               <a:t>That is the opening the project attacks: take the one expensive step, and make</a:t>
@@ -2268,7 +2400,9 @@
               <a:t>it a single instruction the hardware executes directly.</a:t>
             </a:r>
           </a:p>
-          <a:p/>
+          <a:p>
+            <a:endParaRPr/>
+          </a:p>
           <a:p>
             <a:r>
               <a:t>SOURCE: README.md 'Motivation'; the activation formulas are the standard definitions, evaluated in Q16.16 throughout this work</a:t>
@@ -2283,7 +2417,7 @@
             <a:spLocks noGrp="1"/>
           </p:cNvSpPr>
           <p:nvPr>
-            <p:ph type="sldNum" idx="5" sz="quarter"/>
+            <p:ph type="sldNum" sz="quarter" idx="5"/>
           </p:nvPr>
         </p:nvSpPr>
         <p:spPr/>
@@ -2297,7 +2431,7 @@
 </file>
 
 <file path=ppt/notesSlides/notesSlide20.xml><?xml version="1.0" encoding="utf-8"?>
-<p:notes xmlns:a="http://schemas.openxmlformats.org/drawingml/2006/main" xmlns:p="http://schemas.openxmlformats.org/presentationml/2006/main" xmlns:r="http://schemas.openxmlformats.org/officeDocument/2006/relationships">
+<p:notes xmlns:a="http://schemas.openxmlformats.org/drawingml/2006/main" xmlns:r="http://schemas.openxmlformats.org/officeDocument/2006/relationships" xmlns:p="http://schemas.openxmlformats.org/presentationml/2006/main">
   <p:cSld>
     <p:spTree>
       <p:nvGrpSpPr>
@@ -2317,7 +2451,7 @@
         <p:nvSpPr>
           <p:cNvPr id="2" name="Slide Image Placeholder 1"/>
           <p:cNvSpPr>
-            <a:spLocks noGrp="1"/>
+            <a:spLocks noGrp="1" noRot="1" noChangeAspect="1"/>
           </p:cNvSpPr>
           <p:nvPr>
             <p:ph type="sldImg" idx="2"/>
@@ -2332,7 +2466,7 @@
             <a:spLocks noGrp="1"/>
           </p:cNvSpPr>
           <p:nvPr>
-            <p:ph type="body" idx="3" sz="quarter"/>
+            <p:ph type="body" sz="quarter" idx="3"/>
           </p:nvPr>
         </p:nvSpPr>
         <p:spPr/>
@@ -2349,7 +2483,9 @@
               <a:t>only worth what the comparison behind it is worth.</a:t>
             </a:r>
           </a:p>
-          <a:p/>
+          <a:p>
+            <a:endParaRPr/>
+          </a:p>
           <a:p>
             <a:r>
               <a:t>Every one of the five functions was written twice, as two complete DLX programs</a:t>
@@ -2365,7 +2501,9 @@
               <a:t>asm folder of the repository.</a:t>
             </a:r>
           </a:p>
-          <a:p/>
+          <a:p>
+            <a:endParaRPr/>
+          </a:p>
           <a:p>
             <a:r>
               <a:t>On the left is the software version. No new instructions — only what the</a:t>
@@ -2406,7 +2544,9 @@
               <a:t>hundred and forty-nine clock cycles.</a:t>
             </a:r>
           </a:p>
-          <a:p/>
+          <a:p>
+            <a:endParaRPr/>
+          </a:p>
           <a:p>
             <a:r>
               <a:t>On the right is the accelerated version. Load the input, one sigmoid</a:t>
@@ -2422,7 +2562,9 @@
               <a:t>program and into the Activation Engine. Six instructions, fifty-seven cycles.</a:t>
             </a:r>
           </a:p>
-          <a:p/>
+          <a:p>
+            <a:endParaRPr/>
+          </a:p>
           <a:p>
             <a:r>
               <a:t>Three things make this a fair fight. Same processor, same clock, same memory</a:t>
@@ -2458,7 +2600,9 @@
               <a:t>the measurement valid.</a:t>
             </a:r>
           </a:p>
-          <a:p/>
+          <a:p>
+            <a:endParaRPr/>
+          </a:p>
           <a:p>
             <a:r>
               <a:t>ReLU is the honest exception. Its software version is only eight instructions</a:t>
@@ -2474,7 +2618,9 @@
               <a:t>shows up in the next slide as the smallest gap of the five.</a:t>
             </a:r>
           </a:p>
-          <a:p/>
+          <a:p>
+            <a:endParaRPr/>
+          </a:p>
           <a:p>
             <a:r>
               <a:t>The counts on the next slide come from the simulator, not from an estimate:</a:t>
@@ -2485,7 +2631,9 @@
               <a:t>every program was run to completion and the cycles counted.</a:t>
             </a:r>
           </a:p>
-          <a:p/>
+          <a:p>
+            <a:endParaRPr/>
+          </a:p>
           <a:p>
             <a:r>
               <a:t>SOURCE: asm/*.s and asm/*_accel.s (five pairs); results/DLX-NN_Project_Targets.xlsx, sheet '2. Cycle Count'  (raw simulator logs: results/timing results/*.txt)</a:t>
@@ -2500,7 +2648,7 @@
             <a:spLocks noGrp="1"/>
           </p:cNvSpPr>
           <p:nvPr>
-            <p:ph type="sldNum" idx="5" sz="quarter"/>
+            <p:ph type="sldNum" sz="quarter" idx="5"/>
           </p:nvPr>
         </p:nvSpPr>
         <p:spPr/>
@@ -2514,7 +2662,7 @@
 </file>
 
 <file path=ppt/notesSlides/notesSlide21.xml><?xml version="1.0" encoding="utf-8"?>
-<p:notes xmlns:a="http://schemas.openxmlformats.org/drawingml/2006/main" xmlns:p="http://schemas.openxmlformats.org/presentationml/2006/main" xmlns:r="http://schemas.openxmlformats.org/officeDocument/2006/relationships">
+<p:notes xmlns:a="http://schemas.openxmlformats.org/drawingml/2006/main" xmlns:r="http://schemas.openxmlformats.org/officeDocument/2006/relationships" xmlns:p="http://schemas.openxmlformats.org/presentationml/2006/main">
   <p:cSld>
     <p:spTree>
       <p:nvGrpSpPr>
@@ -2534,7 +2682,7 @@
         <p:nvSpPr>
           <p:cNvPr id="2" name="Slide Image Placeholder 1"/>
           <p:cNvSpPr>
-            <a:spLocks noGrp="1"/>
+            <a:spLocks noGrp="1" noRot="1" noChangeAspect="1"/>
           </p:cNvSpPr>
           <p:nvPr>
             <p:ph type="sldImg" idx="2"/>
@@ -2549,7 +2697,7 @@
             <a:spLocks noGrp="1"/>
           </p:cNvSpPr>
           <p:nvPr>
-            <p:ph type="body" idx="3" sz="quarter"/>
+            <p:ph type="body" sz="quarter" idx="3"/>
           </p:nvPr>
         </p:nvSpPr>
         <p:spPr/>
@@ -2566,7 +2714,9 @@
               <a:t>the range is enormous.</a:t>
             </a:r>
           </a:p>
-          <a:p/>
+          <a:p>
+            <a:endParaRPr/>
+          </a:p>
           <a:p>
             <a:r>
               <a:t>Sigmoid: 249 cycles down to 57. Tanh: 347 down to 57. GELU: 387 down to 58. The</a:t>
@@ -2582,19 +2732,25 @@
               <a:t>finishing in one clock — what is left is the fetch, the load and the store.</a:t>
             </a:r>
           </a:p>
-          <a:p/>
+          <a:p>
+            <a:endParaRPr/>
+          </a:p>
           <a:p>
             <a:r>
               <a:t>ReLU: 72 down to 57. A much smaller gap, and I will come back to that.</a:t>
             </a:r>
           </a:p>
-          <a:p/>
+          <a:p>
+            <a:endParaRPr/>
+          </a:p>
           <a:p>
             <a:r>
               <a:t>Softmax: 4,675 cycles down to 163. That is the DMA design paying off.</a:t>
             </a:r>
           </a:p>
-          <a:p/>
+          <a:p>
+            <a:endParaRPr/>
+          </a:p>
           <a:p>
             <a:r>
               <a:t>Added together, the five programs went from 5,730 clock cycles to 392. Fourteen</a:t>
@@ -2605,7 +2761,9 @@
               <a:t>and a half times faster overall; twenty-nine times faster on softmax alone.</a:t>
             </a:r>
           </a:p>
-          <a:p/>
+          <a:p>
+            <a:endParaRPr/>
+          </a:p>
           <a:p>
             <a:r>
               <a:t>SOURCE: results/DLX-NN_Project_Targets.xlsx, sheet '2. Cycle Count'  (raw simulator logs: results/timing results/*.txt)</a:t>
@@ -2620,7 +2778,7 @@
             <a:spLocks noGrp="1"/>
           </p:cNvSpPr>
           <p:nvPr>
-            <p:ph type="sldNum" idx="5" sz="quarter"/>
+            <p:ph type="sldNum" sz="quarter" idx="5"/>
           </p:nvPr>
         </p:nvSpPr>
         <p:spPr/>
@@ -2634,7 +2792,7 @@
 </file>
 
 <file path=ppt/notesSlides/notesSlide22.xml><?xml version="1.0" encoding="utf-8"?>
-<p:notes xmlns:a="http://schemas.openxmlformats.org/drawingml/2006/main" xmlns:p="http://schemas.openxmlformats.org/presentationml/2006/main" xmlns:r="http://schemas.openxmlformats.org/officeDocument/2006/relationships">
+<p:notes xmlns:a="http://schemas.openxmlformats.org/drawingml/2006/main" xmlns:r="http://schemas.openxmlformats.org/officeDocument/2006/relationships" xmlns:p="http://schemas.openxmlformats.org/presentationml/2006/main">
   <p:cSld>
     <p:spTree>
       <p:nvGrpSpPr>
@@ -2654,7 +2812,7 @@
         <p:nvSpPr>
           <p:cNvPr id="2" name="Slide Image Placeholder 1"/>
           <p:cNvSpPr>
-            <a:spLocks noGrp="1"/>
+            <a:spLocks noGrp="1" noRot="1" noChangeAspect="1"/>
           </p:cNvSpPr>
           <p:nvPr>
             <p:ph type="sldImg" idx="2"/>
@@ -2669,7 +2827,7 @@
             <a:spLocks noGrp="1"/>
           </p:cNvSpPr>
           <p:nvPr>
-            <p:ph type="body" idx="3" sz="quarter"/>
+            <p:ph type="body" sz="quarter" idx="3"/>
           </p:nvPr>
         </p:nvSpPr>
         <p:spPr/>
@@ -2681,7 +2839,9 @@
               <a:t>Here is the same data as a percentage, against the requirement.</a:t>
             </a:r>
           </a:p>
-          <a:p/>
+          <a:p>
+            <a:endParaRPr/>
+          </a:p>
           <a:p>
             <a:r>
               <a:t>Sigmoid removes 77 percent of the cycles. Tanh, 84. GELU, 85. Softmax, 96.5 —</a:t>
@@ -2692,7 +2852,9 @@
               <a:t>all far above the line.</a:t>
             </a:r>
           </a:p>
-          <a:p/>
+          <a:p>
+            <a:endParaRPr/>
+          </a:p>
           <a:p>
             <a:r>
               <a:t>ReLU is at 20.8 percent and does not reach 30. I want to be straight about that</a:t>
@@ -2703,7 +2865,9 @@
               <a:t>rather than hide it in an average.</a:t>
             </a:r>
           </a:p>
-          <a:p/>
+          <a:p>
+            <a:endParaRPr/>
+          </a:p>
           <a:p>
             <a:r>
               <a:t>The reason is the one from the ReLU slide. In software ReLU is a compare and a</a:t>
@@ -2729,7 +2893,9 @@
               <a:t>does.</a:t>
             </a:r>
           </a:p>
-          <a:p/>
+          <a:p>
+            <a:endParaRPr/>
+          </a:p>
           <a:p>
             <a:r>
               <a:t>Across all five programs together — which is how the requirement is stated, as</a:t>
@@ -2750,7 +2916,9 @@
               <a:t>something.</a:t>
             </a:r>
           </a:p>
-          <a:p/>
+          <a:p>
+            <a:endParaRPr/>
+          </a:p>
           <a:p>
             <a:r>
               <a:t>If ReLU alone had to clear 30 percent, the fix would not be a faster ReLU; it</a:t>
@@ -2761,7 +2929,9 @@
               <a:t>would be a faster memory interface.</a:t>
             </a:r>
           </a:p>
-          <a:p/>
+          <a:p>
+            <a:endParaRPr/>
+          </a:p>
           <a:p>
             <a:r>
               <a:t>SOURCE: results/DLX-NN_Project_Targets.xlsx, sheet '2. Cycle Count'  (raw simulator logs: results/timing results/*.txt); requirement R1 from CLAUDE.md and the 'Meets &gt;= 30%?' column of the same sheet</a:t>
@@ -2776,7 +2946,7 @@
             <a:spLocks noGrp="1"/>
           </p:cNvSpPr>
           <p:nvPr>
-            <p:ph type="sldNum" idx="5" sz="quarter"/>
+            <p:ph type="sldNum" sz="quarter" idx="5"/>
           </p:nvPr>
         </p:nvSpPr>
         <p:spPr/>
@@ -2790,7 +2960,7 @@
 </file>
 
 <file path=ppt/notesSlides/notesSlide23.xml><?xml version="1.0" encoding="utf-8"?>
-<p:notes xmlns:a="http://schemas.openxmlformats.org/drawingml/2006/main" xmlns:p="http://schemas.openxmlformats.org/presentationml/2006/main" xmlns:r="http://schemas.openxmlformats.org/officeDocument/2006/relationships">
+<p:notes xmlns:a="http://schemas.openxmlformats.org/drawingml/2006/main" xmlns:r="http://schemas.openxmlformats.org/officeDocument/2006/relationships" xmlns:p="http://schemas.openxmlformats.org/presentationml/2006/main">
   <p:cSld>
     <p:spTree>
       <p:nvGrpSpPr>
@@ -2810,7 +2980,7 @@
         <p:nvSpPr>
           <p:cNvPr id="2" name="Slide Image Placeholder 1"/>
           <p:cNvSpPr>
-            <a:spLocks noGrp="1"/>
+            <a:spLocks noGrp="1" noRot="1" noChangeAspect="1"/>
           </p:cNvSpPr>
           <p:nvPr>
             <p:ph type="sldImg" idx="2"/>
@@ -2825,7 +2995,7 @@
             <a:spLocks noGrp="1"/>
           </p:cNvSpPr>
           <p:nvPr>
-            <p:ph type="body" idx="3" sz="quarter"/>
+            <p:ph type="body" sz="quarter" idx="3"/>
           </p:nvPr>
         </p:nvSpPr>
         <p:spPr/>
@@ -2842,7 +3012,9 @@
               <a:t>put that on the slide than bury it.</a:t>
             </a:r>
           </a:p>
-          <a:p/>
+          <a:p>
+            <a:endParaRPr/>
+          </a:p>
           <a:p>
             <a:r>
               <a:t>The plain DLX uses 1,073 logic cells and 676 flip-flops; with the engine, 2,282</a:t>
@@ -2858,13 +3030,17 @@
               <a:t>a 20 percent budget. We are well over it.</a:t>
             </a:r>
           </a:p>
-          <a:p/>
+          <a:p>
+            <a:endParaRPr/>
+          </a:p>
           <a:p>
             <a:r>
               <a:t>Two things to say, and neither is an excuse.</a:t>
             </a:r>
           </a:p>
-          <a:p/>
+          <a:p>
+            <a:endParaRPr/>
+          </a:p>
           <a:p>
             <a:r>
               <a:t>First: a 20 percent budget was realistic for a small arithmetic unit, not for</a:t>
@@ -2890,7 +3066,9 @@
               <a:t>been set per function, not for the whole extension.</a:t>
             </a:r>
           </a:p>
-          <a:p/>
+          <a:p>
+            <a:endParaRPr/>
+          </a:p>
           <a:p>
             <a:r>
               <a:t>Second, the number that decides whether it was worth doing: area multiplied by</a:t>
@@ -2906,7 +3084,9 @@
               <a:t>13.5. The only bad trade is ReLU, the same story as the previous slide.</a:t>
             </a:r>
           </a:p>
-          <a:p/>
+          <a:p>
+            <a:endParaRPr/>
+          </a:p>
           <a:p>
             <a:r>
               <a:t>And in absolute terms it is not large: the whole extended processor uses fifteen</a:t>
@@ -2917,7 +3097,9 @@
               <a:t>percent of this Spartan-6.</a:t>
             </a:r>
           </a:p>
-          <a:p/>
+          <a:p>
+            <a:endParaRPr/>
+          </a:p>
           <a:p>
             <a:r>
               <a:t>SOURCE: results/DLX-NN_Project_Targets.xlsx, sheet '3. Area'  (raw: results/Utilization_Summary/*.pdf); results/DLX-NN_Project_Targets.xlsx, sheet '4. Worth It (Area x Delay)'</a:t>
@@ -2932,7 +3114,7 @@
             <a:spLocks noGrp="1"/>
           </p:cNvSpPr>
           <p:nvPr>
-            <p:ph type="sldNum" idx="5" sz="quarter"/>
+            <p:ph type="sldNum" sz="quarter" idx="5"/>
           </p:nvPr>
         </p:nvSpPr>
         <p:spPr/>
@@ -2946,7 +3128,7 @@
 </file>
 
 <file path=ppt/notesSlides/notesSlide24.xml><?xml version="1.0" encoding="utf-8"?>
-<p:notes xmlns:a="http://schemas.openxmlformats.org/drawingml/2006/main" xmlns:p="http://schemas.openxmlformats.org/presentationml/2006/main" xmlns:r="http://schemas.openxmlformats.org/officeDocument/2006/relationships">
+<p:notes xmlns:a="http://schemas.openxmlformats.org/drawingml/2006/main" xmlns:r="http://schemas.openxmlformats.org/officeDocument/2006/relationships" xmlns:p="http://schemas.openxmlformats.org/presentationml/2006/main">
   <p:cSld>
     <p:spTree>
       <p:nvGrpSpPr>
@@ -2966,7 +3148,7 @@
         <p:nvSpPr>
           <p:cNvPr id="2" name="Slide Image Placeholder 1"/>
           <p:cNvSpPr>
-            <a:spLocks noGrp="1"/>
+            <a:spLocks noGrp="1" noRot="1" noChangeAspect="1"/>
           </p:cNvSpPr>
           <p:nvPr>
             <p:ph type="sldImg" idx="2"/>
@@ -2981,7 +3163,7 @@
             <a:spLocks noGrp="1"/>
           </p:cNvSpPr>
           <p:nvPr>
-            <p:ph type="body" idx="3" sz="quarter"/>
+            <p:ph type="body" sz="quarter" idx="3"/>
           </p:nvPr>
         </p:nvSpPr>
         <p:spPr/>
@@ -2998,7 +3180,9 @@
               <a:t>makes the rest usable.</a:t>
             </a:r>
           </a:p>
-          <a:p/>
+          <a:p>
+            <a:endParaRPr/>
+          </a:p>
           <a:p>
             <a:r>
               <a:t>We put five instructions in the silicon, but the lab's assembler knew nothing</a:t>
@@ -3019,7 +3203,9 @@
               <a:t>raw constant — the line on the left.</a:t>
             </a:r>
           </a:p>
-          <a:p/>
+          <a:p>
+            <a:endParaRPr/>
+          </a:p>
           <a:p>
             <a:r>
               <a:t>RESA does not have its instruction set compiled in; it reads it at start-up from</a:t>
@@ -3045,7 +3231,9 @@
               <a:t>operands get checked for us.</a:t>
             </a:r>
           </a:p>
-          <a:p/>
+          <a:p>
+            <a:endParaRPr/>
+          </a:p>
           <a:p>
             <a:r>
               <a:t>One trap. All six are declared I-type, even softmax and mult, whose hardware</a:t>
@@ -3071,7 +3259,9 @@
               <a:t>word.</a:t>
             </a:r>
           </a:p>
-          <a:p/>
+          <a:p>
+            <a:endParaRPr/>
+          </a:p>
           <a:p>
             <a:r>
               <a:t>And one instruction had to go: pushi used opcode 111001, which now belongs to</a:t>
@@ -3082,7 +3272,9 @@
               <a:t>tanh.</a:t>
             </a:r>
           </a:p>
-          <a:p/>
+          <a:p>
+            <a:endParaRPr/>
+          </a:p>
           <a:p>
             <a:r>
               <a:t>SOURCE: RESA_ENV/commands.xml (the table the RESA compiler reads); RESA_ENV/OPCODES.md; hand-encoding 0xE0220000 from README.md</a:t>
@@ -3097,7 +3289,7 @@
             <a:spLocks noGrp="1"/>
           </p:cNvSpPr>
           <p:nvPr>
-            <p:ph type="sldNum" idx="5" sz="quarter"/>
+            <p:ph type="sldNum" sz="quarter" idx="5"/>
           </p:nvPr>
         </p:nvSpPr>
         <p:spPr/>
@@ -3111,7 +3303,7 @@
 </file>
 
 <file path=ppt/notesSlides/notesSlide25.xml><?xml version="1.0" encoding="utf-8"?>
-<p:notes xmlns:a="http://schemas.openxmlformats.org/drawingml/2006/main" xmlns:p="http://schemas.openxmlformats.org/presentationml/2006/main" xmlns:r="http://schemas.openxmlformats.org/officeDocument/2006/relationships">
+<p:notes xmlns:a="http://schemas.openxmlformats.org/drawingml/2006/main" xmlns:r="http://schemas.openxmlformats.org/officeDocument/2006/relationships" xmlns:p="http://schemas.openxmlformats.org/presentationml/2006/main">
   <p:cSld>
     <p:spTree>
       <p:nvGrpSpPr>
@@ -3131,7 +3323,7 @@
         <p:nvSpPr>
           <p:cNvPr id="2" name="Slide Image Placeholder 1"/>
           <p:cNvSpPr>
-            <a:spLocks noGrp="1"/>
+            <a:spLocks noGrp="1" noRot="1" noChangeAspect="1"/>
           </p:cNvSpPr>
           <p:nvPr>
             <p:ph type="sldImg" idx="2"/>
@@ -3146,7 +3338,7 @@
             <a:spLocks noGrp="1"/>
           </p:cNvSpPr>
           <p:nvPr>
-            <p:ph type="body" idx="3" sz="quarter"/>
+            <p:ph type="body" sz="quarter" idx="3"/>
           </p:nvPr>
         </p:nvSpPr>
         <p:spPr/>
@@ -3158,7 +3350,9 @@
               <a:t>Finally, the whole thing doing a real job.</a:t>
             </a:r>
           </a:p>
-          <a:p/>
+          <a:p>
+            <a:endParaRPr/>
+          </a:p>
           <a:p>
             <a:r>
               <a:t>A small network that reads handwritten digits. The image is sixteen by sixteen —</a:t>
@@ -3179,7 +3373,9 @@
               <a:t>largest wins. Here it reads a zero; the green node is the answer.</a:t>
             </a:r>
           </a:p>
-          <a:p/>
+          <a:p>
+            <a:endParaRPr/>
+          </a:p>
           <a:p>
             <a:r>
               <a:t>Every activation in that picture is one of ours: ReLU in the hidden layer,</a:t>
@@ -3190,7 +3386,9 @@
               <a:t>softmax at the output.</a:t>
             </a:r>
           </a:p>
-          <a:p/>
+          <a:p>
+            <a:endParaRPr/>
+          </a:p>
           <a:p>
             <a:r>
               <a:t>We wrote the network twice in DLX assembly — once with the original instruction</a:t>
@@ -3206,7 +3404,9 @@
               <a:t>before trusting anything.</a:t>
             </a:r>
           </a:p>
-          <a:p/>
+          <a:p>
+            <a:endParaRPr/>
+          </a:p>
           <a:p>
             <a:r>
               <a:t>The software version takes about 635,000 steps. The hardware version takes about</a:t>
@@ -3217,7 +3417,9 @@
               <a:t>34,400. Eighteen times fewer.</a:t>
             </a:r>
           </a:p>
-          <a:p/>
+          <a:p>
+            <a:endParaRPr/>
+          </a:p>
           <a:p>
             <a:r>
               <a:t>On the standard test set the network is 95.6 percent accurate with ReLU, 95.3</a:t>
@@ -3238,7 +3440,9 @@
               <a:t>by sixteen rather than a bug.</a:t>
             </a:r>
           </a:p>
-          <a:p/>
+          <a:p>
+            <a:endParaRPr/>
+          </a:p>
           <a:p>
             <a:r>
               <a:t>SOURCE: nn/asm-nn/generated/README.md  and  nn/asm-nn/diagram/NN_EXPLAINED.md</a:t>
@@ -3253,7 +3457,7 @@
             <a:spLocks noGrp="1"/>
           </p:cNvSpPr>
           <p:nvPr>
-            <p:ph type="sldNum" idx="5" sz="quarter"/>
+            <p:ph type="sldNum" sz="quarter" idx="5"/>
           </p:nvPr>
         </p:nvSpPr>
         <p:spPr/>
@@ -3267,7 +3471,7 @@
 </file>
 
 <file path=ppt/notesSlides/notesSlide26.xml><?xml version="1.0" encoding="utf-8"?>
-<p:notes xmlns:a="http://schemas.openxmlformats.org/drawingml/2006/main" xmlns:p="http://schemas.openxmlformats.org/presentationml/2006/main" xmlns:r="http://schemas.openxmlformats.org/officeDocument/2006/relationships">
+<p:notes xmlns:a="http://schemas.openxmlformats.org/drawingml/2006/main" xmlns:r="http://schemas.openxmlformats.org/officeDocument/2006/relationships" xmlns:p="http://schemas.openxmlformats.org/presentationml/2006/main">
   <p:cSld>
     <p:spTree>
       <p:nvGrpSpPr>
@@ -3287,7 +3491,7 @@
         <p:nvSpPr>
           <p:cNvPr id="2" name="Slide Image Placeholder 1"/>
           <p:cNvSpPr>
-            <a:spLocks noGrp="1"/>
+            <a:spLocks noGrp="1" noRot="1" noChangeAspect="1"/>
           </p:cNvSpPr>
           <p:nvPr>
             <p:ph type="sldImg" idx="2"/>
@@ -3302,7 +3506,7 @@
             <a:spLocks noGrp="1"/>
           </p:cNvSpPr>
           <p:nvPr>
-            <p:ph type="body" idx="3" sz="quarter"/>
+            <p:ph type="body" sz="quarter" idx="3"/>
           </p:nvPr>
         </p:nvSpPr>
         <p:spPr/>
@@ -3314,7 +3518,9 @@
               <a:t>To summarise against the three requirements we set at the start.</a:t>
             </a:r>
           </a:p>
-          <a:p/>
+          <a:p>
+            <a:endParaRPr/>
+          </a:p>
           <a:p>
             <a:r>
               <a:t>Accuracy: required no worse than 0.025 mean squared error. Our worst function is</a:t>
@@ -3330,7 +3536,9 @@
               <a:t>exact. Met.</a:t>
             </a:r>
           </a:p>
-          <a:p/>
+          <a:p>
+            <a:endParaRPr/>
+          </a:p>
           <a:p>
             <a:r>
               <a:t>Speed, requirement R1: required a 30 percent cut. Over the five programs</a:t>
@@ -3346,7 +3554,9 @@
               <a:t>ReLU is at 20.8 percent because its software version was already almost free.</a:t>
             </a:r>
           </a:p>
-          <a:p/>
+          <a:p>
+            <a:endParaRPr/>
+          </a:p>
           <a:p>
             <a:r>
               <a:t>Area: required no more than 20 percent extra logic. We used 113 percent more.</a:t>
@@ -3367,7 +3577,9 @@
               <a:t>FPGA, so nothing about it is impractical.</a:t>
             </a:r>
           </a:p>
-          <a:p/>
+          <a:p>
+            <a:endParaRPr/>
+          </a:p>
           <a:p>
             <a:r>
               <a:t>What exists at the end: a DLX processor with five new instructions, one shared</a:t>
@@ -3383,7 +3595,9 @@
               <a:t>memory, and a handwritten-digit classifier that runs on the result.</a:t>
             </a:r>
           </a:p>
-          <a:p/>
+          <a:p>
+            <a:endParaRPr/>
+          </a:p>
           <a:p>
             <a:r>
               <a:t>SOURCE: results/DLX-NN_Project_Targets.xlsx, sheet '1. Accuracy'; results/DLX-NN_Project_Targets.xlsx, sheet '2. Cycle Count'  (raw simulator logs: results/timing results/*.txt); results/DLX-NN_Project_Targets.xlsx, sheet '3. Area'  (raw: results/Utilization_Summary/*.pdf); results/DLX-NN_Project_Targets.xlsx, sheet '4. Worth It (Area x Delay)'</a:t>
@@ -3398,7 +3612,7 @@
             <a:spLocks noGrp="1"/>
           </p:cNvSpPr>
           <p:nvPr>
-            <p:ph type="sldNum" idx="5" sz="quarter"/>
+            <p:ph type="sldNum" sz="quarter" idx="5"/>
           </p:nvPr>
         </p:nvSpPr>
         <p:spPr/>
@@ -3412,7 +3626,7 @@
 </file>
 
 <file path=ppt/notesSlides/notesSlide27.xml><?xml version="1.0" encoding="utf-8"?>
-<p:notes xmlns:a="http://schemas.openxmlformats.org/drawingml/2006/main" xmlns:p="http://schemas.openxmlformats.org/presentationml/2006/main" xmlns:r="http://schemas.openxmlformats.org/officeDocument/2006/relationships">
+<p:notes xmlns:a="http://schemas.openxmlformats.org/drawingml/2006/main" xmlns:r="http://schemas.openxmlformats.org/officeDocument/2006/relationships" xmlns:p="http://schemas.openxmlformats.org/presentationml/2006/main">
   <p:cSld>
     <p:spTree>
       <p:nvGrpSpPr>
@@ -3432,7 +3646,7 @@
         <p:nvSpPr>
           <p:cNvPr id="2" name="Slide Image Placeholder 1"/>
           <p:cNvSpPr>
-            <a:spLocks noGrp="1"/>
+            <a:spLocks noGrp="1" noRot="1" noChangeAspect="1"/>
           </p:cNvSpPr>
           <p:nvPr>
             <p:ph type="sldImg" idx="2"/>
@@ -3447,7 +3661,7 @@
             <a:spLocks noGrp="1"/>
           </p:cNvSpPr>
           <p:nvPr>
-            <p:ph type="body" idx="3" sz="quarter"/>
+            <p:ph type="body" sz="quarter" idx="3"/>
           </p:nvPr>
         </p:nvSpPr>
         <p:spPr/>
@@ -3459,7 +3673,9 @@
               <a:t>Thank you. We are happy to take questions.</a:t>
             </a:r>
           </a:p>
-          <a:p/>
+          <a:p>
+            <a:endParaRPr/>
+          </a:p>
           <a:p>
             <a:r>
               <a:t>Things we are ready for: why piecewise-linear instead of a lookup table; why</a:t>
@@ -3489,7 +3705,7 @@
             <a:spLocks noGrp="1"/>
           </p:cNvSpPr>
           <p:nvPr>
-            <p:ph type="sldNum" idx="5" sz="quarter"/>
+            <p:ph type="sldNum" sz="quarter" idx="5"/>
           </p:nvPr>
         </p:nvSpPr>
         <p:spPr/>
@@ -3503,7 +3719,7 @@
 </file>
 
 <file path=ppt/notesSlides/notesSlide3.xml><?xml version="1.0" encoding="utf-8"?>
-<p:notes xmlns:a="http://schemas.openxmlformats.org/drawingml/2006/main" xmlns:p="http://schemas.openxmlformats.org/presentationml/2006/main" xmlns:r="http://schemas.openxmlformats.org/officeDocument/2006/relationships">
+<p:notes xmlns:a="http://schemas.openxmlformats.org/drawingml/2006/main" xmlns:r="http://schemas.openxmlformats.org/officeDocument/2006/relationships" xmlns:p="http://schemas.openxmlformats.org/presentationml/2006/main">
   <p:cSld>
     <p:spTree>
       <p:nvGrpSpPr>
@@ -3523,7 +3739,7 @@
         <p:nvSpPr>
           <p:cNvPr id="2" name="Slide Image Placeholder 1"/>
           <p:cNvSpPr>
-            <a:spLocks noGrp="1"/>
+            <a:spLocks noGrp="1" noRot="1" noChangeAspect="1"/>
           </p:cNvSpPr>
           <p:nvPr>
             <p:ph type="sldImg" idx="2"/>
@@ -3538,7 +3754,7 @@
             <a:spLocks noGrp="1"/>
           </p:cNvSpPr>
           <p:nvPr>
-            <p:ph type="body" idx="3" sz="quarter"/>
+            <p:ph type="body" sz="quarter" idx="3"/>
           </p:nvPr>
         </p:nvSpPr>
         <p:spPr/>
@@ -3560,7 +3776,9 @@
               <a:t>one starts, and each instruction takes several clock cycles.</a:t>
             </a:r>
           </a:p>
-          <a:p/>
+          <a:p>
+            <a:endParaRPr/>
+          </a:p>
           <a:p>
             <a:r>
               <a:t>On the left, control — two state machines: one walks every instruction through</a:t>
@@ -3576,7 +3794,9 @@
               <a:t>because the SRAM is asynchronous.</a:t>
             </a:r>
           </a:p>
-          <a:p/>
+          <a:p>
+            <a:endParaRPr/>
+          </a:p>
           <a:p>
             <a:r>
               <a:t>In the middle, the data path. Thirty-two registers of 32 bits, an ALU that adds,</a:t>
@@ -3592,7 +3812,9 @@
               <a:t>bit per instruction — there is no barrel shifter.</a:t>
             </a:r>
           </a:p>
-          <a:p/>
+          <a:p>
+            <a:endParaRPr/>
+          </a:p>
           <a:p>
             <a:r>
               <a:t>Now the important line at the bottom. This machine has no multiplier, no</a:t>
@@ -3613,7 +3835,9 @@
               <a:t>slow, and that is the problem this project attacks.</a:t>
             </a:r>
           </a:p>
-          <a:p/>
+          <a:p>
+            <a:endParaRPr/>
+          </a:p>
           <a:p>
             <a:r>
               <a:t>SOURCE: README.md 'Architecture Overview'; docs/architecture_block_diagrams.md (BEFORE)</a:t>
@@ -3628,7 +3852,7 @@
             <a:spLocks noGrp="1"/>
           </p:cNvSpPr>
           <p:nvPr>
-            <p:ph type="sldNum" idx="5" sz="quarter"/>
+            <p:ph type="sldNum" sz="quarter" idx="5"/>
           </p:nvPr>
         </p:nvSpPr>
         <p:spPr/>
@@ -3642,7 +3866,7 @@
 </file>
 
 <file path=ppt/notesSlides/notesSlide4.xml><?xml version="1.0" encoding="utf-8"?>
-<p:notes xmlns:a="http://schemas.openxmlformats.org/drawingml/2006/main" xmlns:p="http://schemas.openxmlformats.org/presentationml/2006/main" xmlns:r="http://schemas.openxmlformats.org/officeDocument/2006/relationships">
+<p:notes xmlns:a="http://schemas.openxmlformats.org/drawingml/2006/main" xmlns:r="http://schemas.openxmlformats.org/officeDocument/2006/relationships" xmlns:p="http://schemas.openxmlformats.org/presentationml/2006/main">
   <p:cSld>
     <p:spTree>
       <p:nvGrpSpPr>
@@ -3662,7 +3886,7 @@
         <p:nvSpPr>
           <p:cNvPr id="2" name="Slide Image Placeholder 1"/>
           <p:cNvSpPr>
-            <a:spLocks noGrp="1"/>
+            <a:spLocks noGrp="1" noRot="1" noChangeAspect="1"/>
           </p:cNvSpPr>
           <p:nvPr>
             <p:ph type="sldImg" idx="2"/>
@@ -3677,7 +3901,7 @@
             <a:spLocks noGrp="1"/>
           </p:cNvSpPr>
           <p:nvPr>
-            <p:ph type="body" idx="3" sz="quarter"/>
+            <p:ph type="body" sz="quarter" idx="3"/>
           </p:nvPr>
         </p:nvSpPr>
         <p:spPr/>
@@ -3699,7 +3923,9 @@
               <a:t>Without it the whole network collapses into one linear function.</a:t>
             </a:r>
           </a:p>
-          <a:p/>
+          <a:p>
+            <a:endParaRPr/>
+          </a:p>
           <a:p>
             <a:r>
               <a:t>Five of them, left to right. Sigmoid squashes any number into zero-to-one, tanh</a:t>
@@ -3715,7 +3941,9 @@
               <a:t>models. ReLU keeps positives and zeroes negatives.</a:t>
             </a:r>
           </a:p>
-          <a:p/>
+          <a:p>
+            <a:endParaRPr/>
+          </a:p>
           <a:p>
             <a:r>
               <a:t>The fifth one is different in kind. Softmax is not a curve — it takes a whole</a:t>
@@ -3736,7 +3964,9 @@
               <a:t>entire hardware design later.</a:t>
             </a:r>
           </a:p>
-          <a:p/>
+          <a:p>
+            <a:endParaRPr/>
+          </a:p>
           <a:p>
             <a:r>
               <a:t>Three requirements defined the project. Accuracy: mean squared error no worse</a:t>
@@ -3757,13 +3987,17 @@
               <a:t>headline one. Area: no more than twenty percent extra chip area.</a:t>
             </a:r>
           </a:p>
-          <a:p/>
+          <a:p>
+            <a:endParaRPr/>
+          </a:p>
           <a:p>
             <a:r>
               <a:t>Everything from here answers those three numbers.</a:t>
             </a:r>
           </a:p>
-          <a:p/>
+          <a:p>
+            <a:endParaRPr/>
+          </a:p>
           <a:p>
             <a:r>
               <a:t>SOURCE: results/DLX-NN_Project_Targets.xlsx, sheet '1. Accuracy'; results/DLX-NN_Project_Targets.xlsx, sheet '2. Cycle Count'  (raw simulator logs: results/timing results/*.txt); results/DLX-NN_Project_Targets.xlsx, sheet '3. Area'  (raw: results/Utilization_Summary/*.pdf)</a:t>
@@ -3778,7 +4012,7 @@
             <a:spLocks noGrp="1"/>
           </p:cNvSpPr>
           <p:nvPr>
-            <p:ph type="sldNum" idx="5" sz="quarter"/>
+            <p:ph type="sldNum" sz="quarter" idx="5"/>
           </p:nvPr>
         </p:nvSpPr>
         <p:spPr/>
@@ -3792,7 +4026,7 @@
 </file>
 
 <file path=ppt/notesSlides/notesSlide5.xml><?xml version="1.0" encoding="utf-8"?>
-<p:notes xmlns:a="http://schemas.openxmlformats.org/drawingml/2006/main" xmlns:p="http://schemas.openxmlformats.org/presentationml/2006/main" xmlns:r="http://schemas.openxmlformats.org/officeDocument/2006/relationships">
+<p:notes xmlns:a="http://schemas.openxmlformats.org/drawingml/2006/main" xmlns:r="http://schemas.openxmlformats.org/officeDocument/2006/relationships" xmlns:p="http://schemas.openxmlformats.org/presentationml/2006/main">
   <p:cSld>
     <p:spTree>
       <p:nvGrpSpPr>
@@ -3812,7 +4046,7 @@
         <p:nvSpPr>
           <p:cNvPr id="2" name="Slide Image Placeholder 1"/>
           <p:cNvSpPr>
-            <a:spLocks noGrp="1"/>
+            <a:spLocks noGrp="1" noRot="1" noChangeAspect="1"/>
           </p:cNvSpPr>
           <p:nvPr>
             <p:ph type="sldImg" idx="2"/>
@@ -3827,7 +4061,7 @@
             <a:spLocks noGrp="1"/>
           </p:cNvSpPr>
           <p:nvPr>
-            <p:ph type="body" idx="3" sz="quarter"/>
+            <p:ph type="body" sz="quarter" idx="3"/>
           </p:nvPr>
         </p:nvSpPr>
         <p:spPr/>
@@ -3844,7 +4078,9 @@
               <a:t>every value you see for the rest of the talk is in this format.</a:t>
             </a:r>
           </a:p>
-          <a:p/>
+          <a:p>
+            <a:endParaRPr/>
+          </a:p>
           <a:p>
             <a:r>
               <a:t>The DLX has no floating-point unit. It has no floating-point anything. So we use</a:t>
@@ -3860,7 +4096,9 @@
               <a:t>integer and simply agreeing where the decimal point sits.</a:t>
             </a:r>
           </a:p>
-          <a:p/>
+          <a:p>
+            <a:endParaRPr/>
+          </a:p>
           <a:p>
             <a:r>
               <a:t>Q16.16 means: thirty-two bits, split down the middle. Bit thirty-one is the</a:t>
@@ -3886,7 +4124,9 @@
               <a:t>why this is called fixed point.</a:t>
             </a:r>
           </a:p>
-          <a:p/>
+          <a:p>
+            <a:endParaRPr/>
+          </a:p>
           <a:p>
             <a:r>
               <a:t>Concretely: the hex word 0x0002_8000 is the integer 163,840. Divide by 65,536 —</a:t>
@@ -3912,7 +4152,9 @@
               <a:t>The third row is minus one and a half, stored as plain two's complement.</a:t>
             </a:r>
           </a:p>
-          <a:p/>
+          <a:p>
+            <a:endParaRPr/>
+          </a:p>
           <a:p>
             <a:r>
               <a:t>Why this matters for the hardware. Adding two Q16.16 numbers is just adding two</a:t>
@@ -3933,7 +4175,9 @@
               <a:t>which is what our whole approximation strategy relies on, is a single shift.</a:t>
             </a:r>
           </a:p>
-          <a:p/>
+          <a:p>
+            <a:endParaRPr/>
+          </a:p>
           <a:p>
             <a:r>
               <a:t>The cost is resolution: the smallest step is two to the minus sixteen, about</a:t>
@@ -3974,7 +4218,9 @@
               <a:t>minutes confirm it.</a:t>
             </a:r>
           </a:p>
-          <a:p/>
+          <a:p>
+            <a:endParaRPr/>
+          </a:p>
           <a:p>
             <a:r>
               <a:t>SOURCE: README.md 'Fixed-Point Representation (Q16.16)'; worked values from results/timing results/sigmoid_accel.txt and relu_accel.txt</a:t>
@@ -3989,7 +4235,7 @@
             <a:spLocks noGrp="1"/>
           </p:cNvSpPr>
           <p:nvPr>
-            <p:ph type="sldNum" idx="5" sz="quarter"/>
+            <p:ph type="sldNum" sz="quarter" idx="5"/>
           </p:nvPr>
         </p:nvSpPr>
         <p:spPr/>
@@ -4003,7 +4249,7 @@
 </file>
 
 <file path=ppt/notesSlides/notesSlide6.xml><?xml version="1.0" encoding="utf-8"?>
-<p:notes xmlns:a="http://schemas.openxmlformats.org/drawingml/2006/main" xmlns:p="http://schemas.openxmlformats.org/presentationml/2006/main" xmlns:r="http://schemas.openxmlformats.org/officeDocument/2006/relationships">
+<p:notes xmlns:a="http://schemas.openxmlformats.org/drawingml/2006/main" xmlns:r="http://schemas.openxmlformats.org/officeDocument/2006/relationships" xmlns:p="http://schemas.openxmlformats.org/presentationml/2006/main">
   <p:cSld>
     <p:spTree>
       <p:nvGrpSpPr>
@@ -4023,7 +4269,7 @@
         <p:nvSpPr>
           <p:cNvPr id="2" name="Slide Image Placeholder 1"/>
           <p:cNvSpPr>
-            <a:spLocks noGrp="1"/>
+            <a:spLocks noGrp="1" noRot="1" noChangeAspect="1"/>
           </p:cNvSpPr>
           <p:nvPr>
             <p:ph type="sldImg" idx="2"/>
@@ -4038,7 +4284,7 @@
             <a:spLocks noGrp="1"/>
           </p:cNvSpPr>
           <p:nvPr>
-            <p:ph type="body" idx="3" sz="quarter"/>
+            <p:ph type="body" sz="quarter" idx="3"/>
           </p:nvPr>
         </p:nvSpPr>
         <p:spPr/>
@@ -4060,7 +4306,9 @@
               <a:t>silicon produces, and at this scale you cannot separate them.</a:t>
             </a:r>
           </a:p>
-          <a:p/>
+          <a:p>
+            <a:endParaRPr/>
+          </a:p>
           <a:p>
             <a:r>
               <a:t>The trick is on the right. Instead of an exponential, we replace the curve with</a:t>
@@ -4086,7 +4334,9 @@
               <a:t>right, which is free. So sigmoid costs a comparison, a shift and an add.</a:t>
             </a:r>
           </a:p>
-          <a:p/>
+          <a:p>
+            <a:endParaRPr/>
+          </a:p>
           <a:p>
             <a:r>
               <a:t>Negative inputs need no segments at all: sigmoid of minus x is one minus sigmoid</a:t>
@@ -4097,7 +4347,9 @@
               <a:t>of x, so we mirror.</a:t>
             </a:r>
           </a:p>
-          <a:p/>
+          <a:p>
+            <a:endParaRPr/>
+          </a:p>
           <a:p>
             <a:r>
               <a:t>The bottom strip is the error. The needles near plus and minus one are the joins</a:t>
@@ -4118,7 +4370,9 @@
               <a:t>ten to the minus five — five hundred times better than the requirement.</a:t>
             </a:r>
           </a:p>
-          <a:p/>
+          <a:p>
+            <a:endParaRPr/>
+          </a:p>
           <a:p>
             <a:r>
               <a:t>SOURCE: results/DLX-NN_Project_Targets.xlsx, sheet '1. Accuracy'; curve plotted from the RTL in design/</a:t>
@@ -4133,7 +4387,7 @@
             <a:spLocks noGrp="1"/>
           </p:cNvSpPr>
           <p:nvPr>
-            <p:ph type="sldNum" idx="5" sz="quarter"/>
+            <p:ph type="sldNum" sz="quarter" idx="5"/>
           </p:nvPr>
         </p:nvSpPr>
         <p:spPr/>
@@ -4147,7 +4401,7 @@
 </file>
 
 <file path=ppt/notesSlides/notesSlide7.xml><?xml version="1.0" encoding="utf-8"?>
-<p:notes xmlns:a="http://schemas.openxmlformats.org/drawingml/2006/main" xmlns:p="http://schemas.openxmlformats.org/presentationml/2006/main" xmlns:r="http://schemas.openxmlformats.org/officeDocument/2006/relationships">
+<p:notes xmlns:a="http://schemas.openxmlformats.org/drawingml/2006/main" xmlns:r="http://schemas.openxmlformats.org/officeDocument/2006/relationships" xmlns:p="http://schemas.openxmlformats.org/presentationml/2006/main">
   <p:cSld>
     <p:spTree>
       <p:nvGrpSpPr>
@@ -4167,7 +4421,7 @@
         <p:nvSpPr>
           <p:cNvPr id="2" name="Slide Image Placeholder 1"/>
           <p:cNvSpPr>
-            <a:spLocks noGrp="1"/>
+            <a:spLocks noGrp="1" noRot="1" noChangeAspect="1"/>
           </p:cNvSpPr>
           <p:nvPr>
             <p:ph type="sldImg" idx="2"/>
@@ -4182,7 +4436,7 @@
             <a:spLocks noGrp="1"/>
           </p:cNvSpPr>
           <p:nvPr>
-            <p:ph type="body" idx="3" sz="quarter"/>
+            <p:ph type="body" sz="quarter" idx="3"/>
           </p:nvPr>
         </p:nvSpPr>
         <p:spPr/>
@@ -4199,7 +4453,9 @@
               <a:t>sigmoid of two x, minus one.</a:t>
             </a:r>
           </a:p>
-          <a:p/>
+          <a:p>
+            <a:endParaRPr/>
+          </a:p>
           <a:p>
             <a:r>
               <a:t>That identity is worth real money in hardware. It means we do not build a tanh</a:t>
@@ -4220,7 +4476,9 @@
               <a:t>Two shifts and an add.</a:t>
             </a:r>
           </a:p>
-          <a:p/>
+          <a:p>
+            <a:endParaRPr/>
+          </a:p>
           <a:p>
             <a:r>
               <a:t>Because the input is doubled, the curve saturates twice as early: by the time x</a:t>
@@ -4236,7 +4494,9 @@
               <a:t>like the real tanh.</a:t>
             </a:r>
           </a:p>
-          <a:p/>
+          <a:p>
+            <a:endParaRPr/>
+          </a:p>
           <a:p>
             <a:r>
               <a:t>The error also doubles, since we doubled the sigmoid output. It is still</a:t>
@@ -4247,7 +4507,9 @@
               <a:t>2.3 times ten to the minus four — a hundred times inside the requirement.</a:t>
             </a:r>
           </a:p>
-          <a:p/>
+          <a:p>
+            <a:endParaRPr/>
+          </a:p>
           <a:p>
             <a:r>
               <a:t>SOURCE: results/DLX-NN_Project_Targets.xlsx, sheet '1. Accuracy'; curve plotted from the RTL in design/</a:t>
@@ -4262,7 +4524,7 @@
             <a:spLocks noGrp="1"/>
           </p:cNvSpPr>
           <p:nvPr>
-            <p:ph type="sldNum" idx="5" sz="quarter"/>
+            <p:ph type="sldNum" sz="quarter" idx="5"/>
           </p:nvPr>
         </p:nvSpPr>
         <p:spPr/>
@@ -4276,7 +4538,7 @@
 </file>
 
 <file path=ppt/notesSlides/notesSlide8.xml><?xml version="1.0" encoding="utf-8"?>
-<p:notes xmlns:a="http://schemas.openxmlformats.org/drawingml/2006/main" xmlns:p="http://schemas.openxmlformats.org/presentationml/2006/main" xmlns:r="http://schemas.openxmlformats.org/officeDocument/2006/relationships">
+<p:notes xmlns:a="http://schemas.openxmlformats.org/drawingml/2006/main" xmlns:r="http://schemas.openxmlformats.org/officeDocument/2006/relationships" xmlns:p="http://schemas.openxmlformats.org/presentationml/2006/main">
   <p:cSld>
     <p:spTree>
       <p:nvGrpSpPr>
@@ -4296,7 +4558,7 @@
         <p:nvSpPr>
           <p:cNvPr id="2" name="Slide Image Placeholder 1"/>
           <p:cNvSpPr>
-            <a:spLocks noGrp="1"/>
+            <a:spLocks noGrp="1" noRot="1" noChangeAspect="1"/>
           </p:cNvSpPr>
           <p:nvPr>
             <p:ph type="sldImg" idx="2"/>
@@ -4311,7 +4573,7 @@
             <a:spLocks noGrp="1"/>
           </p:cNvSpPr>
           <p:nvPr>
-            <p:ph type="body" idx="3" sz="quarter"/>
+            <p:ph type="body" sz="quarter" idx="3"/>
           </p:nvPr>
         </p:nvSpPr>
         <p:spPr/>
@@ -4333,7 +4595,9 @@
               <a:t>where GELU actually returns a slightly negative value.</a:t>
             </a:r>
           </a:p>
-          <a:p/>
+          <a:p>
+            <a:endParaRPr/>
+          </a:p>
           <a:p>
             <a:r>
               <a:t>The standard cheap approximation is x times sigmoid of 1.702 x. So for the third</a:t>
@@ -4349,7 +4613,9 @@
               <a:t>run it through sigmoid, then multiply by the original x.</a:t>
             </a:r>
           </a:p>
-          <a:p/>
+          <a:p>
+            <a:endParaRPr/>
+          </a:p>
           <a:p>
             <a:r>
               <a:t>This is the one activation that genuinely needs a multiplier, for the input</a:t>
@@ -4360,7 +4626,9 @@
               <a:t>scaling and the final product. Everything else in the engine is shift-only.</a:t>
             </a:r>
           </a:p>
-          <a:p/>
+          <a:p>
+            <a:endParaRPr/>
+          </a:p>
           <a:p>
             <a:r>
               <a:t>That is the resource-sharing story of this project in one sentence: sigmoid,</a:t>
@@ -4376,7 +4644,9 @@
               <a:t>chip. Three separate units would have cost roughly three times the area.</a:t>
             </a:r>
           </a:p>
-          <a:p/>
+          <a:p>
+            <a:endParaRPr/>
+          </a:p>
           <a:p>
             <a:r>
               <a:t>Mean squared error, 4.9 times ten to the minus four. Fifty times inside the</a:t>
@@ -4387,7 +4657,9 @@
               <a:t>requirement.</a:t>
             </a:r>
           </a:p>
-          <a:p/>
+          <a:p>
+            <a:endParaRPr/>
+          </a:p>
           <a:p>
             <a:r>
               <a:t>SOURCE: results/DLX-NN_Project_Targets.xlsx, sheet '1. Accuracy'; curve plotted from the RTL in design/</a:t>
@@ -4402,7 +4674,7 @@
             <a:spLocks noGrp="1"/>
           </p:cNvSpPr>
           <p:nvPr>
-            <p:ph type="sldNum" idx="5" sz="quarter"/>
+            <p:ph type="sldNum" sz="quarter" idx="5"/>
           </p:nvPr>
         </p:nvSpPr>
         <p:spPr/>
@@ -4416,7 +4688,7 @@
 </file>
 
 <file path=ppt/notesSlides/notesSlide9.xml><?xml version="1.0" encoding="utf-8"?>
-<p:notes xmlns:a="http://schemas.openxmlformats.org/drawingml/2006/main" xmlns:p="http://schemas.openxmlformats.org/presentationml/2006/main" xmlns:r="http://schemas.openxmlformats.org/officeDocument/2006/relationships">
+<p:notes xmlns:a="http://schemas.openxmlformats.org/drawingml/2006/main" xmlns:r="http://schemas.openxmlformats.org/officeDocument/2006/relationships" xmlns:p="http://schemas.openxmlformats.org/presentationml/2006/main">
   <p:cSld>
     <p:spTree>
       <p:nvGrpSpPr>
@@ -4436,7 +4708,7 @@
         <p:nvSpPr>
           <p:cNvPr id="2" name="Slide Image Placeholder 1"/>
           <p:cNvSpPr>
-            <a:spLocks noGrp="1"/>
+            <a:spLocks noGrp="1" noRot="1" noChangeAspect="1"/>
           </p:cNvSpPr>
           <p:nvPr>
             <p:ph type="sldImg" idx="2"/>
@@ -4451,7 +4723,7 @@
             <a:spLocks noGrp="1"/>
           </p:cNvSpPr>
           <p:nvPr>
-            <p:ph type="body" idx="3" sz="quarter"/>
+            <p:ph type="body" sz="quarter" idx="3"/>
           </p:nvPr>
         </p:nvSpPr>
         <p:spPr/>
@@ -4463,7 +4735,9 @@
               <a:t>ReLU is the easy one, and I want to be honest about that.</a:t>
             </a:r>
           </a:p>
-          <a:p/>
+          <a:p>
+            <a:endParaRPr/>
+          </a:p>
           <a:p>
             <a:r>
               <a:t>ReLU keeps positive numbers and replaces negatives with zero. In two's complement</a:t>
@@ -4484,7 +4758,9 @@
               <a:t>That is one multiplexer. No arithmetic at all.</a:t>
             </a:r>
           </a:p>
-          <a:p/>
+          <a:p>
+            <a:endParaRPr/>
+          </a:p>
           <a:p>
             <a:r>
               <a:t>Because there is no approximation, the error is not small — it is exactly zero</a:t>
@@ -4500,7 +4776,9 @@
               <a:t>results sheet.</a:t>
             </a:r>
           </a:p>
-          <a:p/>
+          <a:p>
+            <a:endParaRPr/>
+          </a:p>
           <a:p>
             <a:r>
               <a:t>Remember this slide when we get to the speed results, because ReLU is also the</a:t>
@@ -4516,7 +4794,9 @@
               <a:t>only three instructions, there is not much left to remove.</a:t>
             </a:r>
           </a:p>
-          <a:p/>
+          <a:p>
+            <a:endParaRPr/>
+          </a:p>
           <a:p>
             <a:r>
               <a:t>SOURCE: results/DLX-NN_Project_Targets.xlsx, sheet '1. Accuracy'; curve plotted from the RTL in design/</a:t>
@@ -4531,7 +4811,7 @@
             <a:spLocks noGrp="1"/>
           </p:cNvSpPr>
           <p:nvPr>
-            <p:ph type="sldNum" idx="5" sz="quarter"/>
+            <p:ph type="sldNum" sz="quarter" idx="5"/>
           </p:nvPr>
         </p:nvSpPr>
         <p:spPr/>
@@ -4586,10 +4866,9 @@
           </a:lstStyle>
           <a:p>
             <a:r>
-              <a:rPr lang="en-US" smtClean="0"/>
+              <a:rPr lang="en-US"/>
               <a:t>Click to edit Master title style</a:t>
             </a:r>
-            <a:endParaRPr lang="en-US"/>
           </a:p>
         </p:txBody>
       </p:sp>
@@ -4651,10 +4930,9 @@
           </a:lstStyle>
           <a:p>
             <a:r>
-              <a:rPr lang="en-US" smtClean="0"/>
+              <a:rPr lang="en-US"/>
               <a:t>Click to edit Master subtitle style</a:t>
             </a:r>
-            <a:endParaRPr lang="en-US"/>
           </a:p>
         </p:txBody>
       </p:sp>
@@ -4675,7 +4953,7 @@
           <a:p>
             <a:fld id="{98C418D1-F151-4A1A-AFA6-1FCB5125A92E}" type="datetime1">
               <a:rPr lang="en-US" smtClean="0"/>
-              <a:t>12/15/2021</a:t>
+              <a:t>8/24/2026</a:t>
             </a:fld>
             <a:endParaRPr lang="en-US"/>
           </a:p>
@@ -4769,10 +5047,9 @@
           <a:lstStyle/>
           <a:p>
             <a:r>
-              <a:rPr lang="en-US" smtClean="0"/>
+              <a:rPr lang="en-US"/>
               <a:t>Click to edit Master title style</a:t>
             </a:r>
-            <a:endParaRPr lang="en-US"/>
           </a:p>
         </p:txBody>
       </p:sp>
@@ -4793,38 +5070,37 @@
           <a:p>
             <a:pPr lvl="0"/>
             <a:r>
-              <a:rPr lang="en-US" smtClean="0"/>
+              <a:rPr lang="en-US"/>
               <a:t>Edit Master text styles</a:t>
             </a:r>
           </a:p>
           <a:p>
             <a:pPr lvl="1"/>
             <a:r>
-              <a:rPr lang="en-US" smtClean="0"/>
+              <a:rPr lang="en-US"/>
               <a:t>Second level</a:t>
             </a:r>
           </a:p>
           <a:p>
             <a:pPr lvl="2"/>
             <a:r>
-              <a:rPr lang="en-US" smtClean="0"/>
+              <a:rPr lang="en-US"/>
               <a:t>Third level</a:t>
             </a:r>
           </a:p>
           <a:p>
             <a:pPr lvl="3"/>
             <a:r>
-              <a:rPr lang="en-US" smtClean="0"/>
+              <a:rPr lang="en-US"/>
               <a:t>Fourth level</a:t>
             </a:r>
           </a:p>
           <a:p>
             <a:pPr lvl="4"/>
             <a:r>
-              <a:rPr lang="en-US" smtClean="0"/>
+              <a:rPr lang="en-US"/>
               <a:t>Fifth level</a:t>
             </a:r>
-            <a:endParaRPr lang="en-US"/>
           </a:p>
         </p:txBody>
       </p:sp>
@@ -4845,7 +5121,7 @@
           <a:p>
             <a:fld id="{6202360F-72F0-40E4-9497-E500D92B1CFF}" type="datetime1">
               <a:rPr lang="en-US" smtClean="0"/>
-              <a:t>12/15/2021</a:t>
+              <a:t>8/24/2026</a:t>
             </a:fld>
             <a:endParaRPr lang="en-US"/>
           </a:p>
@@ -4944,10 +5220,9 @@
           <a:lstStyle/>
           <a:p>
             <a:r>
-              <a:rPr lang="en-US" smtClean="0"/>
+              <a:rPr lang="en-US"/>
               <a:t>Click to edit Master title style</a:t>
             </a:r>
-            <a:endParaRPr lang="en-US"/>
           </a:p>
         </p:txBody>
       </p:sp>
@@ -4973,38 +5248,37 @@
           <a:p>
             <a:pPr lvl="0"/>
             <a:r>
-              <a:rPr lang="en-US" smtClean="0"/>
+              <a:rPr lang="en-US"/>
               <a:t>Edit Master text styles</a:t>
             </a:r>
           </a:p>
           <a:p>
             <a:pPr lvl="1"/>
             <a:r>
-              <a:rPr lang="en-US" smtClean="0"/>
+              <a:rPr lang="en-US"/>
               <a:t>Second level</a:t>
             </a:r>
           </a:p>
           <a:p>
             <a:pPr lvl="2"/>
             <a:r>
-              <a:rPr lang="en-US" smtClean="0"/>
+              <a:rPr lang="en-US"/>
               <a:t>Third level</a:t>
             </a:r>
           </a:p>
           <a:p>
             <a:pPr lvl="3"/>
             <a:r>
-              <a:rPr lang="en-US" smtClean="0"/>
+              <a:rPr lang="en-US"/>
               <a:t>Fourth level</a:t>
             </a:r>
           </a:p>
           <a:p>
             <a:pPr lvl="4"/>
             <a:r>
-              <a:rPr lang="en-US" smtClean="0"/>
+              <a:rPr lang="en-US"/>
               <a:t>Fifth level</a:t>
             </a:r>
-            <a:endParaRPr lang="en-US"/>
           </a:p>
         </p:txBody>
       </p:sp>
@@ -5025,7 +5299,7 @@
           <a:p>
             <a:fld id="{37D16CB8-DFD9-47B7-B7FB-CD991A84E186}" type="datetime1">
               <a:rPr lang="en-US" smtClean="0"/>
-              <a:t>12/15/2021</a:t>
+              <a:t>8/24/2026</a:t>
             </a:fld>
             <a:endParaRPr lang="en-US"/>
           </a:p>
@@ -5119,10 +5393,9 @@
           <a:lstStyle/>
           <a:p>
             <a:r>
-              <a:rPr lang="en-US" smtClean="0"/>
+              <a:rPr lang="en-US"/>
               <a:t>Click to edit Master title style</a:t>
             </a:r>
-            <a:endParaRPr lang="en-US"/>
           </a:p>
         </p:txBody>
       </p:sp>
@@ -5143,38 +5416,37 @@
           <a:p>
             <a:pPr lvl="0"/>
             <a:r>
-              <a:rPr lang="en-US" smtClean="0"/>
+              <a:rPr lang="en-US"/>
               <a:t>Edit Master text styles</a:t>
             </a:r>
           </a:p>
           <a:p>
             <a:pPr lvl="1"/>
             <a:r>
-              <a:rPr lang="en-US" smtClean="0"/>
+              <a:rPr lang="en-US"/>
               <a:t>Second level</a:t>
             </a:r>
           </a:p>
           <a:p>
             <a:pPr lvl="2"/>
             <a:r>
-              <a:rPr lang="en-US" smtClean="0"/>
+              <a:rPr lang="en-US"/>
               <a:t>Third level</a:t>
             </a:r>
           </a:p>
           <a:p>
             <a:pPr lvl="3"/>
             <a:r>
-              <a:rPr lang="en-US" smtClean="0"/>
+              <a:rPr lang="en-US"/>
               <a:t>Fourth level</a:t>
             </a:r>
           </a:p>
           <a:p>
             <a:pPr lvl="4"/>
             <a:r>
-              <a:rPr lang="en-US" smtClean="0"/>
+              <a:rPr lang="en-US"/>
               <a:t>Fifth level</a:t>
             </a:r>
-            <a:endParaRPr lang="en-US"/>
           </a:p>
         </p:txBody>
       </p:sp>
@@ -5195,7 +5467,7 @@
           <a:p>
             <a:fld id="{CBC7F67C-1AAC-41A5-BA08-7B0723E42167}" type="datetime1">
               <a:rPr lang="en-US" smtClean="0"/>
-              <a:t>12/15/2021</a:t>
+              <a:t>8/24/2026</a:t>
             </a:fld>
             <a:endParaRPr lang="en-US"/>
           </a:p>
@@ -5298,10 +5570,9 @@
           </a:lstStyle>
           <a:p>
             <a:r>
-              <a:rPr lang="en-US" smtClean="0"/>
+              <a:rPr lang="en-US"/>
               <a:t>Click to edit Master title style</a:t>
             </a:r>
-            <a:endParaRPr lang="en-US"/>
           </a:p>
         </p:txBody>
       </p:sp>
@@ -5418,7 +5689,7 @@
           <a:p>
             <a:pPr lvl="0"/>
             <a:r>
-              <a:rPr lang="en-US" smtClean="0"/>
+              <a:rPr lang="en-US"/>
               <a:t>Edit Master text styles</a:t>
             </a:r>
           </a:p>
@@ -5441,7 +5712,7 @@
           <a:p>
             <a:fld id="{8075C26D-52F0-48CD-A26B-03EAFD2B9DF3}" type="datetime1">
               <a:rPr lang="en-US" smtClean="0"/>
-              <a:t>12/15/2021</a:t>
+              <a:t>8/24/2026</a:t>
             </a:fld>
             <a:endParaRPr lang="en-US"/>
           </a:p>
@@ -5535,10 +5806,9 @@
           <a:lstStyle/>
           <a:p>
             <a:r>
-              <a:rPr lang="en-US" smtClean="0"/>
+              <a:rPr lang="en-US"/>
               <a:t>Click to edit Master title style</a:t>
             </a:r>
-            <a:endParaRPr lang="en-US"/>
           </a:p>
         </p:txBody>
       </p:sp>
@@ -5564,38 +5834,37 @@
           <a:p>
             <a:pPr lvl="0"/>
             <a:r>
-              <a:rPr lang="en-US" smtClean="0"/>
+              <a:rPr lang="en-US"/>
               <a:t>Edit Master text styles</a:t>
             </a:r>
           </a:p>
           <a:p>
             <a:pPr lvl="1"/>
             <a:r>
-              <a:rPr lang="en-US" smtClean="0"/>
+              <a:rPr lang="en-US"/>
               <a:t>Second level</a:t>
             </a:r>
           </a:p>
           <a:p>
             <a:pPr lvl="2"/>
             <a:r>
-              <a:rPr lang="en-US" smtClean="0"/>
+              <a:rPr lang="en-US"/>
               <a:t>Third level</a:t>
             </a:r>
           </a:p>
           <a:p>
             <a:pPr lvl="3"/>
             <a:r>
-              <a:rPr lang="en-US" smtClean="0"/>
+              <a:rPr lang="en-US"/>
               <a:t>Fourth level</a:t>
             </a:r>
           </a:p>
           <a:p>
             <a:pPr lvl="4"/>
             <a:r>
-              <a:rPr lang="en-US" smtClean="0"/>
+              <a:rPr lang="en-US"/>
               <a:t>Fifth level</a:t>
             </a:r>
-            <a:endParaRPr lang="en-US"/>
           </a:p>
         </p:txBody>
       </p:sp>
@@ -5621,38 +5890,37 @@
           <a:p>
             <a:pPr lvl="0"/>
             <a:r>
-              <a:rPr lang="en-US" smtClean="0"/>
+              <a:rPr lang="en-US"/>
               <a:t>Edit Master text styles</a:t>
             </a:r>
           </a:p>
           <a:p>
             <a:pPr lvl="1"/>
             <a:r>
-              <a:rPr lang="en-US" smtClean="0"/>
+              <a:rPr lang="en-US"/>
               <a:t>Second level</a:t>
             </a:r>
           </a:p>
           <a:p>
             <a:pPr lvl="2"/>
             <a:r>
-              <a:rPr lang="en-US" smtClean="0"/>
+              <a:rPr lang="en-US"/>
               <a:t>Third level</a:t>
             </a:r>
           </a:p>
           <a:p>
             <a:pPr lvl="3"/>
             <a:r>
-              <a:rPr lang="en-US" smtClean="0"/>
+              <a:rPr lang="en-US"/>
               <a:t>Fourth level</a:t>
             </a:r>
           </a:p>
           <a:p>
             <a:pPr lvl="4"/>
             <a:r>
-              <a:rPr lang="en-US" smtClean="0"/>
+              <a:rPr lang="en-US"/>
               <a:t>Fifth level</a:t>
             </a:r>
-            <a:endParaRPr lang="en-US"/>
           </a:p>
         </p:txBody>
       </p:sp>
@@ -5673,7 +5941,7 @@
           <a:p>
             <a:fld id="{82CBBECA-3C0A-4CD9-9812-4FBF50F0829F}" type="datetime1">
               <a:rPr lang="en-US" smtClean="0"/>
-              <a:t>12/15/2021</a:t>
+              <a:t>8/24/2026</a:t>
             </a:fld>
             <a:endParaRPr lang="en-US"/>
           </a:p>
@@ -5772,10 +6040,9 @@
           <a:lstStyle/>
           <a:p>
             <a:r>
-              <a:rPr lang="en-US" smtClean="0"/>
+              <a:rPr lang="en-US"/>
               <a:t>Click to edit Master title style</a:t>
             </a:r>
-            <a:endParaRPr lang="en-US"/>
           </a:p>
         </p:txBody>
       </p:sp>
@@ -5838,7 +6105,7 @@
           <a:p>
             <a:pPr lvl="0"/>
             <a:r>
-              <a:rPr lang="en-US" smtClean="0"/>
+              <a:rPr lang="en-US"/>
               <a:t>Edit Master text styles</a:t>
             </a:r>
           </a:p>
@@ -5866,38 +6133,37 @@
           <a:p>
             <a:pPr lvl="0"/>
             <a:r>
-              <a:rPr lang="en-US" smtClean="0"/>
+              <a:rPr lang="en-US"/>
               <a:t>Edit Master text styles</a:t>
             </a:r>
           </a:p>
           <a:p>
             <a:pPr lvl="1"/>
             <a:r>
-              <a:rPr lang="en-US" smtClean="0"/>
+              <a:rPr lang="en-US"/>
               <a:t>Second level</a:t>
             </a:r>
           </a:p>
           <a:p>
             <a:pPr lvl="2"/>
             <a:r>
-              <a:rPr lang="en-US" smtClean="0"/>
+              <a:rPr lang="en-US"/>
               <a:t>Third level</a:t>
             </a:r>
           </a:p>
           <a:p>
             <a:pPr lvl="3"/>
             <a:r>
-              <a:rPr lang="en-US" smtClean="0"/>
+              <a:rPr lang="en-US"/>
               <a:t>Fourth level</a:t>
             </a:r>
           </a:p>
           <a:p>
             <a:pPr lvl="4"/>
             <a:r>
-              <a:rPr lang="en-US" smtClean="0"/>
+              <a:rPr lang="en-US"/>
               <a:t>Fifth level</a:t>
             </a:r>
-            <a:endParaRPr lang="en-US"/>
           </a:p>
         </p:txBody>
       </p:sp>
@@ -5960,7 +6226,7 @@
           <a:p>
             <a:pPr lvl="0"/>
             <a:r>
-              <a:rPr lang="en-US" smtClean="0"/>
+              <a:rPr lang="en-US"/>
               <a:t>Edit Master text styles</a:t>
             </a:r>
           </a:p>
@@ -5988,38 +6254,37 @@
           <a:p>
             <a:pPr lvl="0"/>
             <a:r>
-              <a:rPr lang="en-US" smtClean="0"/>
+              <a:rPr lang="en-US"/>
               <a:t>Edit Master text styles</a:t>
             </a:r>
           </a:p>
           <a:p>
             <a:pPr lvl="1"/>
             <a:r>
-              <a:rPr lang="en-US" smtClean="0"/>
+              <a:rPr lang="en-US"/>
               <a:t>Second level</a:t>
             </a:r>
           </a:p>
           <a:p>
             <a:pPr lvl="2"/>
             <a:r>
-              <a:rPr lang="en-US" smtClean="0"/>
+              <a:rPr lang="en-US"/>
               <a:t>Third level</a:t>
             </a:r>
           </a:p>
           <a:p>
             <a:pPr lvl="3"/>
             <a:r>
-              <a:rPr lang="en-US" smtClean="0"/>
+              <a:rPr lang="en-US"/>
               <a:t>Fourth level</a:t>
             </a:r>
           </a:p>
           <a:p>
             <a:pPr lvl="4"/>
             <a:r>
-              <a:rPr lang="en-US" smtClean="0"/>
+              <a:rPr lang="en-US"/>
               <a:t>Fifth level</a:t>
             </a:r>
-            <a:endParaRPr lang="en-US"/>
           </a:p>
         </p:txBody>
       </p:sp>
@@ -6040,7 +6305,7 @@
           <a:p>
             <a:fld id="{5B10F0E8-360B-4BB4-8873-CE1C24987C49}" type="datetime1">
               <a:rPr lang="en-US" smtClean="0"/>
-              <a:t>12/15/2021</a:t>
+              <a:t>8/24/2026</a:t>
             </a:fld>
             <a:endParaRPr lang="en-US"/>
           </a:p>
@@ -6134,10 +6399,9 @@
           <a:lstStyle/>
           <a:p>
             <a:r>
-              <a:rPr lang="en-US" smtClean="0"/>
+              <a:rPr lang="en-US"/>
               <a:t>Click to edit Master title style</a:t>
             </a:r>
-            <a:endParaRPr lang="en-US"/>
           </a:p>
         </p:txBody>
       </p:sp>
@@ -6158,7 +6422,7 @@
           <a:p>
             <a:fld id="{AFB9C237-DA93-4873-9F13-2D421E4D5784}" type="datetime1">
               <a:rPr lang="en-US" smtClean="0"/>
-              <a:t>12/15/2021</a:t>
+              <a:t>8/24/2026</a:t>
             </a:fld>
             <a:endParaRPr lang="en-US"/>
           </a:p>
@@ -6253,7 +6517,7 @@
           <a:p>
             <a:fld id="{6BC7881F-D2DD-4759-A335-6ECF54EA6174}" type="datetime1">
               <a:rPr lang="en-US" smtClean="0"/>
-              <a:t>12/15/2021</a:t>
+              <a:t>8/24/2026</a:t>
             </a:fld>
             <a:endParaRPr lang="en-US"/>
           </a:p>
@@ -6356,10 +6620,9 @@
           </a:lstStyle>
           <a:p>
             <a:r>
-              <a:rPr lang="en-US" smtClean="0"/>
+              <a:rPr lang="en-US"/>
               <a:t>Click to edit Master title style</a:t>
             </a:r>
-            <a:endParaRPr lang="en-US"/>
           </a:p>
         </p:txBody>
       </p:sp>
@@ -6413,38 +6676,37 @@
           <a:p>
             <a:pPr lvl="0"/>
             <a:r>
-              <a:rPr lang="en-US" smtClean="0"/>
+              <a:rPr lang="en-US"/>
               <a:t>Edit Master text styles</a:t>
             </a:r>
           </a:p>
           <a:p>
             <a:pPr lvl="1"/>
             <a:r>
-              <a:rPr lang="en-US" smtClean="0"/>
+              <a:rPr lang="en-US"/>
               <a:t>Second level</a:t>
             </a:r>
           </a:p>
           <a:p>
             <a:pPr lvl="2"/>
             <a:r>
-              <a:rPr lang="en-US" smtClean="0"/>
+              <a:rPr lang="en-US"/>
               <a:t>Third level</a:t>
             </a:r>
           </a:p>
           <a:p>
             <a:pPr lvl="3"/>
             <a:r>
-              <a:rPr lang="en-US" smtClean="0"/>
+              <a:rPr lang="en-US"/>
               <a:t>Fourth level</a:t>
             </a:r>
           </a:p>
           <a:p>
             <a:pPr lvl="4"/>
             <a:r>
-              <a:rPr lang="en-US" smtClean="0"/>
+              <a:rPr lang="en-US"/>
               <a:t>Fifth level</a:t>
             </a:r>
-            <a:endParaRPr lang="en-US"/>
           </a:p>
         </p:txBody>
       </p:sp>
@@ -6507,7 +6769,7 @@
           <a:p>
             <a:pPr lvl="0"/>
             <a:r>
-              <a:rPr lang="en-US" smtClean="0"/>
+              <a:rPr lang="en-US"/>
               <a:t>Edit Master text styles</a:t>
             </a:r>
           </a:p>
@@ -6530,7 +6792,7 @@
           <a:p>
             <a:fld id="{98EFE89D-0E68-4F88-8280-A11E17E07B1E}" type="datetime1">
               <a:rPr lang="en-US" smtClean="0"/>
-              <a:t>12/15/2021</a:t>
+              <a:t>8/24/2026</a:t>
             </a:fld>
             <a:endParaRPr lang="en-US"/>
           </a:p>
@@ -6633,10 +6895,9 @@
           </a:lstStyle>
           <a:p>
             <a:r>
-              <a:rPr lang="en-US" smtClean="0"/>
+              <a:rPr lang="en-US"/>
               <a:t>Click to edit Master title style</a:t>
             </a:r>
-            <a:endParaRPr lang="en-US"/>
           </a:p>
         </p:txBody>
       </p:sp>
@@ -6760,7 +7021,7 @@
           <a:p>
             <a:pPr lvl="0"/>
             <a:r>
-              <a:rPr lang="en-US" smtClean="0"/>
+              <a:rPr lang="en-US"/>
               <a:t>Edit Master text styles</a:t>
             </a:r>
           </a:p>
@@ -6783,7 +7044,7 @@
           <a:p>
             <a:fld id="{02540482-3831-4044-A267-EC94C1533077}" type="datetime1">
               <a:rPr lang="en-US" smtClean="0"/>
-              <a:t>12/15/2021</a:t>
+              <a:t>8/24/2026</a:t>
             </a:fld>
             <a:endParaRPr lang="en-US"/>
           </a:p>
@@ -6892,10 +7153,9 @@
           <a:lstStyle/>
           <a:p>
             <a:r>
-              <a:rPr lang="en-US" smtClean="0"/>
+              <a:rPr lang="en-US"/>
               <a:t>Click to edit Master title style</a:t>
             </a:r>
-            <a:endParaRPr lang="en-US"/>
           </a:p>
         </p:txBody>
       </p:sp>
@@ -6926,38 +7186,37 @@
           <a:p>
             <a:pPr lvl="0"/>
             <a:r>
-              <a:rPr lang="en-US" smtClean="0"/>
+              <a:rPr lang="en-US"/>
               <a:t>Edit Master text styles</a:t>
             </a:r>
           </a:p>
           <a:p>
             <a:pPr lvl="1"/>
             <a:r>
-              <a:rPr lang="en-US" smtClean="0"/>
+              <a:rPr lang="en-US"/>
               <a:t>Second level</a:t>
             </a:r>
           </a:p>
           <a:p>
             <a:pPr lvl="2"/>
             <a:r>
-              <a:rPr lang="en-US" smtClean="0"/>
+              <a:rPr lang="en-US"/>
               <a:t>Third level</a:t>
             </a:r>
           </a:p>
           <a:p>
             <a:pPr lvl="3"/>
             <a:r>
-              <a:rPr lang="en-US" smtClean="0"/>
+              <a:rPr lang="en-US"/>
               <a:t>Fourth level</a:t>
             </a:r>
           </a:p>
           <a:p>
             <a:pPr lvl="4"/>
             <a:r>
-              <a:rPr lang="en-US" smtClean="0"/>
+              <a:rPr lang="en-US"/>
               <a:t>Fifth level</a:t>
             </a:r>
-            <a:endParaRPr lang="en-US"/>
           </a:p>
         </p:txBody>
       </p:sp>
@@ -6996,7 +7255,7 @@
           <a:p>
             <a:fld id="{E348A5E2-79BB-466B-93AD-FE62946A96F1}" type="datetime1">
               <a:rPr lang="en-US" smtClean="0"/>
-              <a:t>12/15/2021</a:t>
+              <a:t>8/24/2026</a:t>
             </a:fld>
             <a:endParaRPr lang="en-US"/>
           </a:p>
@@ -7386,7 +7645,7 @@
 </file>
 
 <file path=ppt/slides/slide1.xml><?xml version="1.0" encoding="utf-8"?>
-<p:sld xmlns:a="http://schemas.openxmlformats.org/drawingml/2006/main" xmlns:p="http://schemas.openxmlformats.org/presentationml/2006/main" xmlns:r="http://schemas.openxmlformats.org/officeDocument/2006/relationships">
+<p:sld xmlns:a="http://schemas.openxmlformats.org/drawingml/2006/main" xmlns:r="http://schemas.openxmlformats.org/officeDocument/2006/relationships" xmlns:p="http://schemas.openxmlformats.org/presentationml/2006/main">
   <p:cSld>
     <p:spTree>
       <p:nvGrpSpPr>
@@ -7394,7 +7653,14 @@
         <p:cNvGrpSpPr/>
         <p:nvPr/>
       </p:nvGrpSpPr>
-      <p:grpSpPr/>
+      <p:grpSpPr>
+        <a:xfrm>
+          <a:off x="0" y="0"/>
+          <a:ext cx="0" cy="0"/>
+          <a:chOff x="0" y="0"/>
+          <a:chExt cx="0" cy="0"/>
+        </a:xfrm>
+      </p:grpSpPr>
       <p:pic>
         <p:nvPicPr>
           <p:cNvPr id="2" name="Picture 1" descr="tau_logo.png"/>
@@ -7404,7 +7670,7 @@
           <p:nvPr/>
         </p:nvPicPr>
         <p:blipFill>
-          <a:blip r:embed="rId2"/>
+          <a:blip r:embed="rId3"/>
           <a:stretch>
             <a:fillRect/>
           </a:stretch>
@@ -7436,7 +7702,7 @@
           <a:noFill/>
         </p:spPr>
         <p:txBody>
-          <a:bodyPr wrap="square" lIns="0" rIns="0" tIns="0" bIns="0" anchor="t">
+          <a:bodyPr wrap="square" lIns="0" tIns="0" rIns="0" bIns="0" anchor="t">
             <a:spAutoFit/>
           </a:bodyPr>
           <a:lstStyle/>
@@ -7478,7 +7744,7 @@
           <a:noFill/>
         </p:spPr>
         <p:txBody>
-          <a:bodyPr wrap="square" lIns="0" rIns="0" tIns="0" bIns="0" anchor="t">
+          <a:bodyPr wrap="square" lIns="0" tIns="0" rIns="0" bIns="0" anchor="t">
             <a:spAutoFit/>
           </a:bodyPr>
           <a:lstStyle/>
@@ -7563,6 +7829,7 @@
           <a:lstStyle/>
           <a:p>
             <a:pPr algn="ctr"/>
+            <a:endParaRPr/>
           </a:p>
         </p:txBody>
       </p:sp>
@@ -7583,7 +7850,7 @@
           <a:noFill/>
         </p:spPr>
         <p:txBody>
-          <a:bodyPr wrap="square" lIns="0" rIns="0" tIns="0" bIns="0" anchor="t">
+          <a:bodyPr wrap="square" lIns="0" tIns="0" rIns="0" bIns="0" anchor="t">
             <a:spAutoFit/>
           </a:bodyPr>
           <a:lstStyle/>
@@ -7654,7 +7921,7 @@
 </file>
 
 <file path=ppt/slides/slide10.xml><?xml version="1.0" encoding="utf-8"?>
-<p:sld xmlns:a="http://schemas.openxmlformats.org/drawingml/2006/main" xmlns:p="http://schemas.openxmlformats.org/presentationml/2006/main" xmlns:r="http://schemas.openxmlformats.org/officeDocument/2006/relationships">
+<p:sld xmlns:a="http://schemas.openxmlformats.org/drawingml/2006/main" xmlns:r="http://schemas.openxmlformats.org/officeDocument/2006/relationships" xmlns:p="http://schemas.openxmlformats.org/presentationml/2006/main">
   <p:cSld>
     <p:spTree>
       <p:nvGrpSpPr>
@@ -7662,7 +7929,14 @@
         <p:cNvGrpSpPr/>
         <p:nvPr/>
       </p:nvGrpSpPr>
-      <p:grpSpPr/>
+      <p:grpSpPr>
+        <a:xfrm>
+          <a:off x="0" y="0"/>
+          <a:ext cx="0" cy="0"/>
+          <a:chOff x="0" y="0"/>
+          <a:chExt cx="0" cy="0"/>
+        </a:xfrm>
+      </p:grpSpPr>
       <p:pic>
         <p:nvPicPr>
           <p:cNvPr id="2" name="Picture 1" descr="tau_logo.png"/>
@@ -7672,7 +7946,7 @@
           <p:nvPr/>
         </p:nvPicPr>
         <p:blipFill>
-          <a:blip r:embed="rId2"/>
+          <a:blip r:embed="rId3"/>
           <a:stretch>
             <a:fillRect/>
           </a:stretch>
@@ -7704,7 +7978,7 @@
           <a:noFill/>
         </p:spPr>
         <p:txBody>
-          <a:bodyPr wrap="square" lIns="0" rIns="0" tIns="0" bIns="0" anchor="ctr">
+          <a:bodyPr wrap="square" lIns="0" tIns="0" rIns="0" bIns="0" anchor="ctr">
             <a:spAutoFit/>
           </a:bodyPr>
           <a:lstStyle/>
@@ -7738,7 +8012,7 @@
           <a:noFill/>
         </p:spPr>
         <p:txBody>
-          <a:bodyPr wrap="square" lIns="0" rIns="0" tIns="0" bIns="0">
+          <a:bodyPr wrap="square" lIns="0" tIns="0" rIns="0" bIns="0">
             <a:spAutoFit/>
           </a:bodyPr>
           <a:lstStyle/>
@@ -7772,7 +8046,7 @@
           <a:noFill/>
         </p:spPr>
         <p:txBody>
-          <a:bodyPr wrap="square" lIns="0" rIns="0" tIns="0" bIns="0">
+          <a:bodyPr wrap="square" lIns="0" tIns="0" rIns="0" bIns="0">
             <a:spAutoFit/>
           </a:bodyPr>
           <a:lstStyle/>
@@ -7799,7 +8073,7 @@
           <p:nvPr/>
         </p:nvPicPr>
         <p:blipFill>
-          <a:blip r:embed="rId3"/>
+          <a:blip r:embed="rId4"/>
           <a:stretch>
             <a:fillRect/>
           </a:stretch>
@@ -7855,6 +8129,7 @@
           <a:lstStyle/>
           <a:p>
             <a:pPr algn="ctr"/>
+            <a:endParaRPr/>
           </a:p>
         </p:txBody>
       </p:sp>
@@ -7875,7 +8150,7 @@
           <a:noFill/>
         </p:spPr>
         <p:txBody>
-          <a:bodyPr wrap="square" lIns="0" rIns="0" tIns="0" bIns="0" anchor="t">
+          <a:bodyPr wrap="square" lIns="0" tIns="0" rIns="0" bIns="0" anchor="t">
             <a:spAutoFit/>
           </a:bodyPr>
           <a:lstStyle/>
@@ -7917,7 +8192,7 @@
           <a:noFill/>
         </p:spPr>
         <p:txBody>
-          <a:bodyPr wrap="square" lIns="0" rIns="0" tIns="0" bIns="0" anchor="t">
+          <a:bodyPr wrap="square" lIns="0" tIns="0" rIns="0" bIns="0" anchor="t">
             <a:spAutoFit/>
           </a:bodyPr>
           <a:lstStyle/>
@@ -7959,7 +8234,7 @@
           <a:noFill/>
         </p:spPr>
         <p:txBody>
-          <a:bodyPr wrap="square" lIns="0" rIns="0" tIns="0" bIns="0" anchor="t">
+          <a:bodyPr wrap="square" lIns="0" tIns="0" rIns="0" bIns="0" anchor="t">
             <a:spAutoFit/>
           </a:bodyPr>
           <a:lstStyle/>
@@ -8002,7 +8277,7 @@
           <a:noFill/>
         </p:spPr>
         <p:txBody>
-          <a:bodyPr wrap="square" lIns="0" rIns="0" tIns="0" bIns="0" anchor="t">
+          <a:bodyPr wrap="square" lIns="0" tIns="0" rIns="0" bIns="0" anchor="t">
             <a:spAutoFit/>
           </a:bodyPr>
           <a:lstStyle/>
@@ -8044,7 +8319,7 @@
           <a:noFill/>
         </p:spPr>
         <p:txBody>
-          <a:bodyPr wrap="square" lIns="0" rIns="0" tIns="0" bIns="0" anchor="t">
+          <a:bodyPr wrap="square" lIns="0" tIns="0" rIns="0" bIns="0" anchor="t">
             <a:spAutoFit/>
           </a:bodyPr>
           <a:lstStyle/>
@@ -8086,7 +8361,7 @@
           <a:noFill/>
         </p:spPr>
         <p:txBody>
-          <a:bodyPr wrap="square" lIns="0" rIns="0" tIns="0" bIns="0" anchor="t">
+          <a:bodyPr wrap="square" lIns="0" tIns="0" rIns="0" bIns="0" anchor="t">
             <a:spAutoFit/>
           </a:bodyPr>
           <a:lstStyle/>
@@ -8129,7 +8404,7 @@
           <a:noFill/>
         </p:spPr>
         <p:txBody>
-          <a:bodyPr wrap="square" lIns="0" rIns="0" tIns="0" bIns="0" anchor="t">
+          <a:bodyPr wrap="square" lIns="0" tIns="0" rIns="0" bIns="0" anchor="t">
             <a:spAutoFit/>
           </a:bodyPr>
           <a:lstStyle/>
@@ -8171,7 +8446,7 @@
           <a:noFill/>
         </p:spPr>
         <p:txBody>
-          <a:bodyPr wrap="square" lIns="0" rIns="0" tIns="0" bIns="0" anchor="t">
+          <a:bodyPr wrap="square" lIns="0" tIns="0" rIns="0" bIns="0" anchor="t">
             <a:spAutoFit/>
           </a:bodyPr>
           <a:lstStyle/>
@@ -8213,7 +8488,7 @@
           <a:noFill/>
         </p:spPr>
         <p:txBody>
-          <a:bodyPr wrap="square" lIns="0" rIns="0" tIns="0" bIns="0" anchor="t">
+          <a:bodyPr wrap="square" lIns="0" tIns="0" rIns="0" bIns="0" anchor="t">
             <a:spAutoFit/>
           </a:bodyPr>
           <a:lstStyle/>
@@ -8248,7 +8523,7 @@
 </file>
 
 <file path=ppt/slides/slide11.xml><?xml version="1.0" encoding="utf-8"?>
-<p:sld xmlns:a="http://schemas.openxmlformats.org/drawingml/2006/main" xmlns:p="http://schemas.openxmlformats.org/presentationml/2006/main" xmlns:r="http://schemas.openxmlformats.org/officeDocument/2006/relationships">
+<p:sld xmlns:a="http://schemas.openxmlformats.org/drawingml/2006/main" xmlns:r="http://schemas.openxmlformats.org/officeDocument/2006/relationships" xmlns:p="http://schemas.openxmlformats.org/presentationml/2006/main">
   <p:cSld>
     <p:spTree>
       <p:nvGrpSpPr>
@@ -8256,7 +8531,14 @@
         <p:cNvGrpSpPr/>
         <p:nvPr/>
       </p:nvGrpSpPr>
-      <p:grpSpPr/>
+      <p:grpSpPr>
+        <a:xfrm>
+          <a:off x="0" y="0"/>
+          <a:ext cx="0" cy="0"/>
+          <a:chOff x="0" y="0"/>
+          <a:chExt cx="0" cy="0"/>
+        </a:xfrm>
+      </p:grpSpPr>
       <p:pic>
         <p:nvPicPr>
           <p:cNvPr id="2" name="Picture 1" descr="tau_logo.png"/>
@@ -8266,7 +8548,7 @@
           <p:nvPr/>
         </p:nvPicPr>
         <p:blipFill>
-          <a:blip r:embed="rId2"/>
+          <a:blip r:embed="rId3"/>
           <a:stretch>
             <a:fillRect/>
           </a:stretch>
@@ -8298,7 +8580,7 @@
           <a:noFill/>
         </p:spPr>
         <p:txBody>
-          <a:bodyPr wrap="square" lIns="0" rIns="0" tIns="0" bIns="0" anchor="ctr">
+          <a:bodyPr wrap="square" lIns="0" tIns="0" rIns="0" bIns="0" anchor="ctr">
             <a:spAutoFit/>
           </a:bodyPr>
           <a:lstStyle/>
@@ -8332,7 +8614,7 @@
           <a:noFill/>
         </p:spPr>
         <p:txBody>
-          <a:bodyPr wrap="square" lIns="0" rIns="0" tIns="0" bIns="0">
+          <a:bodyPr wrap="square" lIns="0" tIns="0" rIns="0" bIns="0">
             <a:spAutoFit/>
           </a:bodyPr>
           <a:lstStyle/>
@@ -8366,7 +8648,7 @@
           <a:noFill/>
         </p:spPr>
         <p:txBody>
-          <a:bodyPr wrap="square" lIns="0" rIns="0" tIns="0" bIns="0">
+          <a:bodyPr wrap="square" lIns="0" tIns="0" rIns="0" bIns="0">
             <a:spAutoFit/>
           </a:bodyPr>
           <a:lstStyle/>
@@ -8393,7 +8675,7 @@
           <p:nvPr/>
         </p:nvPicPr>
         <p:blipFill>
-          <a:blip r:embed="rId3"/>
+          <a:blip r:embed="rId4"/>
           <a:stretch>
             <a:fillRect/>
           </a:stretch>
@@ -8449,6 +8731,7 @@
           <a:lstStyle/>
           <a:p>
             <a:pPr algn="ctr"/>
+            <a:endParaRPr/>
           </a:p>
         </p:txBody>
       </p:sp>
@@ -8469,7 +8752,7 @@
           <a:noFill/>
         </p:spPr>
         <p:txBody>
-          <a:bodyPr wrap="square" lIns="0" rIns="0" tIns="0" bIns="0" anchor="t">
+          <a:bodyPr wrap="square" lIns="0" tIns="0" rIns="0" bIns="0" anchor="t">
             <a:spAutoFit/>
           </a:bodyPr>
           <a:lstStyle/>
@@ -8511,7 +8794,7 @@
           <a:noFill/>
         </p:spPr>
         <p:txBody>
-          <a:bodyPr wrap="square" lIns="0" rIns="0" tIns="0" bIns="0" anchor="t">
+          <a:bodyPr wrap="square" lIns="0" tIns="0" rIns="0" bIns="0" anchor="t">
             <a:spAutoFit/>
           </a:bodyPr>
           <a:lstStyle/>
@@ -8553,7 +8836,7 @@
           <a:noFill/>
         </p:spPr>
         <p:txBody>
-          <a:bodyPr wrap="square" lIns="0" rIns="0" tIns="0" bIns="0" anchor="t">
+          <a:bodyPr wrap="square" lIns="0" tIns="0" rIns="0" bIns="0" anchor="t">
             <a:spAutoFit/>
           </a:bodyPr>
           <a:lstStyle/>
@@ -8595,7 +8878,7 @@
           <a:noFill/>
         </p:spPr>
         <p:txBody>
-          <a:bodyPr wrap="square" lIns="0" rIns="0" tIns="0" bIns="0" anchor="t">
+          <a:bodyPr wrap="square" lIns="0" tIns="0" rIns="0" bIns="0" anchor="t">
             <a:spAutoFit/>
           </a:bodyPr>
           <a:lstStyle/>
@@ -8637,7 +8920,7 @@
           <a:noFill/>
         </p:spPr>
         <p:txBody>
-          <a:bodyPr wrap="square" lIns="0" rIns="0" tIns="0" bIns="0" anchor="t">
+          <a:bodyPr wrap="square" lIns="0" tIns="0" rIns="0" bIns="0" anchor="t">
             <a:spAutoFit/>
           </a:bodyPr>
           <a:lstStyle/>
@@ -8679,7 +8962,7 @@
           <a:noFill/>
         </p:spPr>
         <p:txBody>
-          <a:bodyPr wrap="square" lIns="0" rIns="0" tIns="0" bIns="0" anchor="t">
+          <a:bodyPr wrap="square" lIns="0" tIns="0" rIns="0" bIns="0" anchor="t">
             <a:spAutoFit/>
           </a:bodyPr>
           <a:lstStyle/>
@@ -8713,7 +8996,7 @@
 </file>
 
 <file path=ppt/slides/slide12.xml><?xml version="1.0" encoding="utf-8"?>
-<p:sld xmlns:a="http://schemas.openxmlformats.org/drawingml/2006/main" xmlns:p="http://schemas.openxmlformats.org/presentationml/2006/main" xmlns:r="http://schemas.openxmlformats.org/officeDocument/2006/relationships">
+<p:sld xmlns:a="http://schemas.openxmlformats.org/drawingml/2006/main" xmlns:r="http://schemas.openxmlformats.org/officeDocument/2006/relationships" xmlns:p="http://schemas.openxmlformats.org/presentationml/2006/main">
   <p:cSld>
     <p:spTree>
       <p:nvGrpSpPr>
@@ -8721,137 +9004,17 @@
         <p:cNvGrpSpPr/>
         <p:nvPr/>
       </p:nvGrpSpPr>
-      <p:grpSpPr/>
+      <p:grpSpPr>
+        <a:xfrm>
+          <a:off x="0" y="0"/>
+          <a:ext cx="0" cy="0"/>
+          <a:chOff x="0" y="0"/>
+          <a:chExt cx="0" cy="0"/>
+        </a:xfrm>
+      </p:grpSpPr>
       <p:pic>
         <p:nvPicPr>
           <p:cNvPr id="2" name="Picture 1" descr="tau_logo.png"/>
-          <p:cNvPicPr>
-            <a:picLocks noChangeAspect="1"/>
-          </p:cNvPicPr>
-          <p:nvPr/>
-        </p:nvPicPr>
-        <p:blipFill>
-          <a:blip r:embed="rId2"/>
-          <a:stretch>
-            <a:fillRect/>
-          </a:stretch>
-        </p:blipFill>
-        <p:spPr>
-          <a:xfrm>
-            <a:off x="265176" y="274320"/>
-            <a:ext cx="2926080" cy="667512"/>
-          </a:xfrm>
-          <a:prstGeom prst="rect">
-            <a:avLst/>
-          </a:prstGeom>
-        </p:spPr>
-      </p:pic>
-      <p:sp>
-        <p:nvSpPr>
-          <p:cNvPr id="3" name="TextBox 2"/>
-          <p:cNvSpPr txBox="1"/>
-          <p:nvPr/>
-        </p:nvSpPr>
-        <p:spPr>
-          <a:xfrm>
-            <a:off x="3282696" y="356616"/>
-            <a:ext cx="6702552" cy="576072"/>
-          </a:xfrm>
-          <a:prstGeom prst="rect">
-            <a:avLst/>
-          </a:prstGeom>
-          <a:noFill/>
-        </p:spPr>
-        <p:txBody>
-          <a:bodyPr wrap="square" lIns="0" rIns="0" tIns="0" bIns="0" anchor="ctr">
-            <a:spAutoFit/>
-          </a:bodyPr>
-          <a:lstStyle/>
-          <a:p>
-            <a:r>
-              <a:rPr sz="2300" b="1">
-                <a:solidFill>
-                  <a:srgbClr val="111418"/>
-                </a:solidFill>
-                <a:latin typeface="Calibri"/>
-              </a:rPr>
-              <a:t>What we added, at the top level</a:t>
-            </a:r>
-          </a:p>
-        </p:txBody>
-      </p:sp>
-      <p:sp>
-        <p:nvSpPr>
-          <p:cNvPr id="4" name="TextBox 3"/>
-          <p:cNvSpPr txBox="1"/>
-          <p:nvPr/>
-        </p:nvSpPr>
-        <p:spPr>
-          <a:xfrm>
-            <a:off x="841248" y="1042415"/>
-            <a:ext cx="7315200" cy="256032"/>
-          </a:xfrm>
-          <a:prstGeom prst="rect">
-            <a:avLst/>
-          </a:prstGeom>
-          <a:noFill/>
-        </p:spPr>
-        <p:txBody>
-          <a:bodyPr wrap="square" lIns="0" rIns="0" tIns="0" bIns="0">
-            <a:spAutoFit/>
-          </a:bodyPr>
-          <a:lstStyle/>
-          <a:p>
-            <a:r>
-              <a:rPr sz="1050" b="1">
-                <a:solidFill>
-                  <a:srgbClr val="E05D07"/>
-                </a:solidFill>
-                <a:latin typeface="Calibri"/>
-              </a:rPr>
-              <a:t>BUILDING IT IN  ·  STEP 1 OF 7</a:t>
-            </a:r>
-          </a:p>
-        </p:txBody>
-      </p:sp>
-      <p:sp>
-        <p:nvSpPr>
-          <p:cNvPr id="5" name="TextBox 4"/>
-          <p:cNvSpPr txBox="1"/>
-          <p:nvPr/>
-        </p:nvSpPr>
-        <p:spPr>
-          <a:xfrm>
-            <a:off x="8613648" y="6355080"/>
-            <a:ext cx="2743200" cy="365760"/>
-          </a:xfrm>
-          <a:prstGeom prst="rect">
-            <a:avLst/>
-          </a:prstGeom>
-          <a:noFill/>
-        </p:spPr>
-        <p:txBody>
-          <a:bodyPr wrap="square" lIns="0" rIns="0" tIns="0" bIns="0">
-            <a:spAutoFit/>
-          </a:bodyPr>
-          <a:lstStyle/>
-          <a:p>
-            <a:pPr algn="r"/>
-            <a:r>
-              <a:rPr sz="1000">
-                <a:solidFill>
-                  <a:srgbClr val="9CA3AF"/>
-                </a:solidFill>
-                <a:latin typeface="Calibri"/>
-              </a:rPr>
-              <a:t>12</a:t>
-            </a:r>
-          </a:p>
-        </p:txBody>
-      </p:sp>
-      <p:pic>
-        <p:nvPicPr>
-          <p:cNvPr id="6" name="Picture 5" descr="integration_top_all.png"/>
           <p:cNvPicPr>
             <a:picLocks noChangeAspect="1"/>
           </p:cNvPicPr>
@@ -8865,6 +9028,133 @@
         </p:blipFill>
         <p:spPr>
           <a:xfrm>
+            <a:off x="265176" y="274320"/>
+            <a:ext cx="2926080" cy="667512"/>
+          </a:xfrm>
+          <a:prstGeom prst="rect">
+            <a:avLst/>
+          </a:prstGeom>
+        </p:spPr>
+      </p:pic>
+      <p:sp>
+        <p:nvSpPr>
+          <p:cNvPr id="3" name="TextBox 2"/>
+          <p:cNvSpPr txBox="1"/>
+          <p:nvPr/>
+        </p:nvSpPr>
+        <p:spPr>
+          <a:xfrm>
+            <a:off x="3282696" y="356616"/>
+            <a:ext cx="6702552" cy="576072"/>
+          </a:xfrm>
+          <a:prstGeom prst="rect">
+            <a:avLst/>
+          </a:prstGeom>
+          <a:noFill/>
+        </p:spPr>
+        <p:txBody>
+          <a:bodyPr wrap="square" lIns="0" tIns="0" rIns="0" bIns="0" anchor="ctr">
+            <a:spAutoFit/>
+          </a:bodyPr>
+          <a:lstStyle/>
+          <a:p>
+            <a:r>
+              <a:rPr sz="2300" b="1">
+                <a:solidFill>
+                  <a:srgbClr val="111418"/>
+                </a:solidFill>
+                <a:latin typeface="Calibri"/>
+              </a:rPr>
+              <a:t>What we added, at the top level</a:t>
+            </a:r>
+          </a:p>
+        </p:txBody>
+      </p:sp>
+      <p:sp>
+        <p:nvSpPr>
+          <p:cNvPr id="4" name="TextBox 3"/>
+          <p:cNvSpPr txBox="1"/>
+          <p:nvPr/>
+        </p:nvSpPr>
+        <p:spPr>
+          <a:xfrm>
+            <a:off x="841248" y="1042415"/>
+            <a:ext cx="7315200" cy="256032"/>
+          </a:xfrm>
+          <a:prstGeom prst="rect">
+            <a:avLst/>
+          </a:prstGeom>
+          <a:noFill/>
+        </p:spPr>
+        <p:txBody>
+          <a:bodyPr wrap="square" lIns="0" tIns="0" rIns="0" bIns="0">
+            <a:spAutoFit/>
+          </a:bodyPr>
+          <a:lstStyle/>
+          <a:p>
+            <a:r>
+              <a:rPr sz="1050" b="1">
+                <a:solidFill>
+                  <a:srgbClr val="E05D07"/>
+                </a:solidFill>
+                <a:latin typeface="Calibri"/>
+              </a:rPr>
+              <a:t>BUILDING IT IN  ·  STEP 1 OF 7</a:t>
+            </a:r>
+          </a:p>
+        </p:txBody>
+      </p:sp>
+      <p:sp>
+        <p:nvSpPr>
+          <p:cNvPr id="5" name="TextBox 4"/>
+          <p:cNvSpPr txBox="1"/>
+          <p:nvPr/>
+        </p:nvSpPr>
+        <p:spPr>
+          <a:xfrm>
+            <a:off x="8613648" y="6355080"/>
+            <a:ext cx="2743200" cy="365760"/>
+          </a:xfrm>
+          <a:prstGeom prst="rect">
+            <a:avLst/>
+          </a:prstGeom>
+          <a:noFill/>
+        </p:spPr>
+        <p:txBody>
+          <a:bodyPr wrap="square" lIns="0" tIns="0" rIns="0" bIns="0">
+            <a:spAutoFit/>
+          </a:bodyPr>
+          <a:lstStyle/>
+          <a:p>
+            <a:pPr algn="r"/>
+            <a:r>
+              <a:rPr sz="1000">
+                <a:solidFill>
+                  <a:srgbClr val="9CA3AF"/>
+                </a:solidFill>
+                <a:latin typeface="Calibri"/>
+              </a:rPr>
+              <a:t>12</a:t>
+            </a:r>
+          </a:p>
+        </p:txBody>
+      </p:sp>
+      <p:pic>
+        <p:nvPicPr>
+          <p:cNvPr id="6" name="Picture 5" descr="integration_top_all.png"/>
+          <p:cNvPicPr>
+            <a:picLocks noChangeAspect="1"/>
+          </p:cNvPicPr>
+          <p:nvPr/>
+        </p:nvPicPr>
+        <p:blipFill>
+          <a:blip r:embed="rId4"/>
+          <a:stretch>
+            <a:fillRect/>
+          </a:stretch>
+        </p:blipFill>
+        <p:spPr>
+          <a:xfrm>
             <a:off x="1403955" y="1481328"/>
             <a:ext cx="9390184" cy="4069080"/>
           </a:xfrm>
@@ -8890,7 +9180,7 @@
           <a:noFill/>
         </p:spPr>
         <p:txBody>
-          <a:bodyPr wrap="square" lIns="0" rIns="0" tIns="0" bIns="0" anchor="t">
+          <a:bodyPr wrap="square" lIns="0" tIns="0" rIns="0" bIns="0" anchor="t">
             <a:spAutoFit/>
           </a:bodyPr>
           <a:lstStyle/>
@@ -8924,7 +9214,7 @@
 </file>
 
 <file path=ppt/slides/slide13.xml><?xml version="1.0" encoding="utf-8"?>
-<p:sld xmlns:a="http://schemas.openxmlformats.org/drawingml/2006/main" xmlns:p="http://schemas.openxmlformats.org/presentationml/2006/main" xmlns:r="http://schemas.openxmlformats.org/officeDocument/2006/relationships">
+<p:sld xmlns:a="http://schemas.openxmlformats.org/drawingml/2006/main" xmlns:r="http://schemas.openxmlformats.org/officeDocument/2006/relationships" xmlns:p="http://schemas.openxmlformats.org/presentationml/2006/main">
   <p:cSld>
     <p:spTree>
       <p:nvGrpSpPr>
@@ -8932,137 +9222,17 @@
         <p:cNvGrpSpPr/>
         <p:nvPr/>
       </p:nvGrpSpPr>
-      <p:grpSpPr/>
+      <p:grpSpPr>
+        <a:xfrm>
+          <a:off x="0" y="0"/>
+          <a:ext cx="0" cy="0"/>
+          <a:chOff x="0" y="0"/>
+          <a:chExt cx="0" cy="0"/>
+        </a:xfrm>
+      </p:grpSpPr>
       <p:pic>
         <p:nvPicPr>
           <p:cNvPr id="2" name="Picture 1" descr="tau_logo.png"/>
-          <p:cNvPicPr>
-            <a:picLocks noChangeAspect="1"/>
-          </p:cNvPicPr>
-          <p:nvPr/>
-        </p:nvPicPr>
-        <p:blipFill>
-          <a:blip r:embed="rId2"/>
-          <a:stretch>
-            <a:fillRect/>
-          </a:stretch>
-        </p:blipFill>
-        <p:spPr>
-          <a:xfrm>
-            <a:off x="265176" y="274320"/>
-            <a:ext cx="2926080" cy="667512"/>
-          </a:xfrm>
-          <a:prstGeom prst="rect">
-            <a:avLst/>
-          </a:prstGeom>
-        </p:spPr>
-      </p:pic>
-      <p:sp>
-        <p:nvSpPr>
-          <p:cNvPr id="3" name="TextBox 2"/>
-          <p:cNvSpPr txBox="1"/>
-          <p:nvPr/>
-        </p:nvSpPr>
-        <p:spPr>
-          <a:xfrm>
-            <a:off x="3282696" y="356616"/>
-            <a:ext cx="6702552" cy="576072"/>
-          </a:xfrm>
-          <a:prstGeom prst="rect">
-            <a:avLst/>
-          </a:prstGeom>
-          <a:noFill/>
-        </p:spPr>
-        <p:txBody>
-          <a:bodyPr wrap="square" lIns="0" rIns="0" tIns="0" bIns="0" anchor="ctr">
-            <a:spAutoFit/>
-          </a:bodyPr>
-          <a:lstStyle/>
-          <a:p>
-            <a:r>
-              <a:rPr sz="2300" b="1">
-                <a:solidFill>
-                  <a:srgbClr val="111418"/>
-                </a:solidFill>
-                <a:latin typeface="Calibri"/>
-              </a:rPr>
-              <a:t>One core, three instructions</a:t>
-            </a:r>
-          </a:p>
-        </p:txBody>
-      </p:sp>
-      <p:sp>
-        <p:nvSpPr>
-          <p:cNvPr id="4" name="TextBox 3"/>
-          <p:cNvSpPr txBox="1"/>
-          <p:nvPr/>
-        </p:nvSpPr>
-        <p:spPr>
-          <a:xfrm>
-            <a:off x="841248" y="1042415"/>
-            <a:ext cx="7315200" cy="256032"/>
-          </a:xfrm>
-          <a:prstGeom prst="rect">
-            <a:avLst/>
-          </a:prstGeom>
-          <a:noFill/>
-        </p:spPr>
-        <p:txBody>
-          <a:bodyPr wrap="square" lIns="0" rIns="0" tIns="0" bIns="0">
-            <a:spAutoFit/>
-          </a:bodyPr>
-          <a:lstStyle/>
-          <a:p>
-            <a:r>
-              <a:rPr sz="1050" b="1">
-                <a:solidFill>
-                  <a:srgbClr val="E05D07"/>
-                </a:solidFill>
-                <a:latin typeface="Calibri"/>
-              </a:rPr>
-              <a:t>BUILDING IT IN  ·  STEP 2 OF 7</a:t>
-            </a:r>
-          </a:p>
-        </p:txBody>
-      </p:sp>
-      <p:sp>
-        <p:nvSpPr>
-          <p:cNvPr id="5" name="TextBox 4"/>
-          <p:cNvSpPr txBox="1"/>
-          <p:nvPr/>
-        </p:nvSpPr>
-        <p:spPr>
-          <a:xfrm>
-            <a:off x="8613648" y="6355080"/>
-            <a:ext cx="2743200" cy="365760"/>
-          </a:xfrm>
-          <a:prstGeom prst="rect">
-            <a:avLst/>
-          </a:prstGeom>
-          <a:noFill/>
-        </p:spPr>
-        <p:txBody>
-          <a:bodyPr wrap="square" lIns="0" rIns="0" tIns="0" bIns="0">
-            <a:spAutoFit/>
-          </a:bodyPr>
-          <a:lstStyle/>
-          <a:p>
-            <a:pPr algn="r"/>
-            <a:r>
-              <a:rPr sz="1000">
-                <a:solidFill>
-                  <a:srgbClr val="9CA3AF"/>
-                </a:solidFill>
-                <a:latin typeface="Calibri"/>
-              </a:rPr>
-              <a:t>13</a:t>
-            </a:r>
-          </a:p>
-        </p:txBody>
-      </p:sp>
-      <p:pic>
-        <p:nvPicPr>
-          <p:cNvPr id="6" name="Picture 5" descr="activation_engine_all.png"/>
           <p:cNvPicPr>
             <a:picLocks noChangeAspect="1"/>
           </p:cNvPicPr>
@@ -9076,6 +9246,133 @@
         </p:blipFill>
         <p:spPr>
           <a:xfrm>
+            <a:off x="265176" y="274320"/>
+            <a:ext cx="2926080" cy="667512"/>
+          </a:xfrm>
+          <a:prstGeom prst="rect">
+            <a:avLst/>
+          </a:prstGeom>
+        </p:spPr>
+      </p:pic>
+      <p:sp>
+        <p:nvSpPr>
+          <p:cNvPr id="3" name="TextBox 2"/>
+          <p:cNvSpPr txBox="1"/>
+          <p:nvPr/>
+        </p:nvSpPr>
+        <p:spPr>
+          <a:xfrm>
+            <a:off x="3282696" y="356616"/>
+            <a:ext cx="6702552" cy="576072"/>
+          </a:xfrm>
+          <a:prstGeom prst="rect">
+            <a:avLst/>
+          </a:prstGeom>
+          <a:noFill/>
+        </p:spPr>
+        <p:txBody>
+          <a:bodyPr wrap="square" lIns="0" tIns="0" rIns="0" bIns="0" anchor="ctr">
+            <a:spAutoFit/>
+          </a:bodyPr>
+          <a:lstStyle/>
+          <a:p>
+            <a:r>
+              <a:rPr sz="2300" b="1">
+                <a:solidFill>
+                  <a:srgbClr val="111418"/>
+                </a:solidFill>
+                <a:latin typeface="Calibri"/>
+              </a:rPr>
+              <a:t>One core, three instructions</a:t>
+            </a:r>
+          </a:p>
+        </p:txBody>
+      </p:sp>
+      <p:sp>
+        <p:nvSpPr>
+          <p:cNvPr id="4" name="TextBox 3"/>
+          <p:cNvSpPr txBox="1"/>
+          <p:nvPr/>
+        </p:nvSpPr>
+        <p:spPr>
+          <a:xfrm>
+            <a:off x="841248" y="1042415"/>
+            <a:ext cx="7315200" cy="256032"/>
+          </a:xfrm>
+          <a:prstGeom prst="rect">
+            <a:avLst/>
+          </a:prstGeom>
+          <a:noFill/>
+        </p:spPr>
+        <p:txBody>
+          <a:bodyPr wrap="square" lIns="0" tIns="0" rIns="0" bIns="0">
+            <a:spAutoFit/>
+          </a:bodyPr>
+          <a:lstStyle/>
+          <a:p>
+            <a:r>
+              <a:rPr sz="1050" b="1">
+                <a:solidFill>
+                  <a:srgbClr val="E05D07"/>
+                </a:solidFill>
+                <a:latin typeface="Calibri"/>
+              </a:rPr>
+              <a:t>BUILDING IT IN  ·  STEP 2 OF 7</a:t>
+            </a:r>
+          </a:p>
+        </p:txBody>
+      </p:sp>
+      <p:sp>
+        <p:nvSpPr>
+          <p:cNvPr id="5" name="TextBox 4"/>
+          <p:cNvSpPr txBox="1"/>
+          <p:nvPr/>
+        </p:nvSpPr>
+        <p:spPr>
+          <a:xfrm>
+            <a:off x="8613648" y="6355080"/>
+            <a:ext cx="2743200" cy="365760"/>
+          </a:xfrm>
+          <a:prstGeom prst="rect">
+            <a:avLst/>
+          </a:prstGeom>
+          <a:noFill/>
+        </p:spPr>
+        <p:txBody>
+          <a:bodyPr wrap="square" lIns="0" tIns="0" rIns="0" bIns="0">
+            <a:spAutoFit/>
+          </a:bodyPr>
+          <a:lstStyle/>
+          <a:p>
+            <a:pPr algn="r"/>
+            <a:r>
+              <a:rPr sz="1000">
+                <a:solidFill>
+                  <a:srgbClr val="9CA3AF"/>
+                </a:solidFill>
+                <a:latin typeface="Calibri"/>
+              </a:rPr>
+              <a:t>13</a:t>
+            </a:r>
+          </a:p>
+        </p:txBody>
+      </p:sp>
+      <p:pic>
+        <p:nvPicPr>
+          <p:cNvPr id="6" name="Picture 5" descr="activation_engine_all.png"/>
+          <p:cNvPicPr>
+            <a:picLocks noChangeAspect="1"/>
+          </p:cNvPicPr>
+          <p:nvPr/>
+        </p:nvPicPr>
+        <p:blipFill>
+          <a:blip r:embed="rId4"/>
+          <a:stretch>
+            <a:fillRect/>
+          </a:stretch>
+        </p:blipFill>
+        <p:spPr>
+          <a:xfrm>
             <a:off x="841248" y="1510893"/>
             <a:ext cx="10515600" cy="4009948"/>
           </a:xfrm>
@@ -9101,7 +9398,7 @@
           <a:noFill/>
         </p:spPr>
         <p:txBody>
-          <a:bodyPr wrap="square" lIns="0" rIns="0" tIns="0" bIns="0" anchor="t">
+          <a:bodyPr wrap="square" lIns="0" tIns="0" rIns="0" bIns="0" anchor="t">
             <a:spAutoFit/>
           </a:bodyPr>
           <a:lstStyle/>
@@ -9135,7 +9432,7 @@
 </file>
 
 <file path=ppt/slides/slide14.xml><?xml version="1.0" encoding="utf-8"?>
-<p:sld xmlns:a="http://schemas.openxmlformats.org/drawingml/2006/main" xmlns:p="http://schemas.openxmlformats.org/presentationml/2006/main" xmlns:r="http://schemas.openxmlformats.org/officeDocument/2006/relationships">
+<p:sld xmlns:a="http://schemas.openxmlformats.org/drawingml/2006/main" xmlns:r="http://schemas.openxmlformats.org/officeDocument/2006/relationships" xmlns:p="http://schemas.openxmlformats.org/presentationml/2006/main">
   <p:cSld>
     <p:spTree>
       <p:nvGrpSpPr>
@@ -9143,137 +9440,17 @@
         <p:cNvGrpSpPr/>
         <p:nvPr/>
       </p:nvGrpSpPr>
-      <p:grpSpPr/>
+      <p:grpSpPr>
+        <a:xfrm>
+          <a:off x="0" y="0"/>
+          <a:ext cx="0" cy="0"/>
+          <a:chOff x="0" y="0"/>
+          <a:chExt cx="0" cy="0"/>
+        </a:xfrm>
+      </p:grpSpPr>
       <p:pic>
         <p:nvPicPr>
           <p:cNvPr id="2" name="Picture 1" descr="tau_logo.png"/>
-          <p:cNvPicPr>
-            <a:picLocks noChangeAspect="1"/>
-          </p:cNvPicPr>
-          <p:nvPr/>
-        </p:nvPicPr>
-        <p:blipFill>
-          <a:blip r:embed="rId2"/>
-          <a:stretch>
-            <a:fillRect/>
-          </a:stretch>
-        </p:blipFill>
-        <p:spPr>
-          <a:xfrm>
-            <a:off x="265176" y="274320"/>
-            <a:ext cx="2926080" cy="667512"/>
-          </a:xfrm>
-          <a:prstGeom prst="rect">
-            <a:avLst/>
-          </a:prstGeom>
-        </p:spPr>
-      </p:pic>
-      <p:sp>
-        <p:nvSpPr>
-          <p:cNvPr id="3" name="TextBox 2"/>
-          <p:cNvSpPr txBox="1"/>
-          <p:nvPr/>
-        </p:nvSpPr>
-        <p:spPr>
-          <a:xfrm>
-            <a:off x="3282696" y="356616"/>
-            <a:ext cx="6702552" cy="576072"/>
-          </a:xfrm>
-          <a:prstGeom prst="rect">
-            <a:avLst/>
-          </a:prstGeom>
-          <a:noFill/>
-        </p:spPr>
-        <p:txBody>
-          <a:bodyPr wrap="square" lIns="0" rIns="0" tIns="0" bIns="0" anchor="ctr">
-            <a:spAutoFit/>
-          </a:bodyPr>
-          <a:lstStyle/>
-          <a:p>
-            <a:r>
-              <a:rPr sz="2300" b="1">
-                <a:solidFill>
-                  <a:srgbClr val="111418"/>
-                </a:solidFill>
-                <a:latin typeface="Calibri"/>
-              </a:rPr>
-              <a:t>The data path barely changed</a:t>
-            </a:r>
-          </a:p>
-        </p:txBody>
-      </p:sp>
-      <p:sp>
-        <p:nvSpPr>
-          <p:cNvPr id="4" name="TextBox 3"/>
-          <p:cNvSpPr txBox="1"/>
-          <p:nvPr/>
-        </p:nvSpPr>
-        <p:spPr>
-          <a:xfrm>
-            <a:off x="841248" y="1042415"/>
-            <a:ext cx="7315200" cy="256032"/>
-          </a:xfrm>
-          <a:prstGeom prst="rect">
-            <a:avLst/>
-          </a:prstGeom>
-          <a:noFill/>
-        </p:spPr>
-        <p:txBody>
-          <a:bodyPr wrap="square" lIns="0" rIns="0" tIns="0" bIns="0">
-            <a:spAutoFit/>
-          </a:bodyPr>
-          <a:lstStyle/>
-          <a:p>
-            <a:r>
-              <a:rPr sz="1050" b="1">
-                <a:solidFill>
-                  <a:srgbClr val="E05D07"/>
-                </a:solidFill>
-                <a:latin typeface="Calibri"/>
-              </a:rPr>
-              <a:t>BUILDING IT IN  ·  STEP 3 OF 7</a:t>
-            </a:r>
-          </a:p>
-        </p:txBody>
-      </p:sp>
-      <p:sp>
-        <p:nvSpPr>
-          <p:cNvPr id="5" name="TextBox 4"/>
-          <p:cNvSpPr txBox="1"/>
-          <p:nvPr/>
-        </p:nvSpPr>
-        <p:spPr>
-          <a:xfrm>
-            <a:off x="8613648" y="6355080"/>
-            <a:ext cx="2743200" cy="365760"/>
-          </a:xfrm>
-          <a:prstGeom prst="rect">
-            <a:avLst/>
-          </a:prstGeom>
-          <a:noFill/>
-        </p:spPr>
-        <p:txBody>
-          <a:bodyPr wrap="square" lIns="0" rIns="0" tIns="0" bIns="0">
-            <a:spAutoFit/>
-          </a:bodyPr>
-          <a:lstStyle/>
-          <a:p>
-            <a:pPr algn="r"/>
-            <a:r>
-              <a:rPr sz="1000">
-                <a:solidFill>
-                  <a:srgbClr val="9CA3AF"/>
-                </a:solidFill>
-                <a:latin typeface="Calibri"/>
-              </a:rPr>
-              <a:t>14</a:t>
-            </a:r>
-          </a:p>
-        </p:txBody>
-      </p:sp>
-      <p:pic>
-        <p:nvPicPr>
-          <p:cNvPr id="6" name="Picture 5" descr="datapath_mux_all.png"/>
           <p:cNvPicPr>
             <a:picLocks noChangeAspect="1"/>
           </p:cNvPicPr>
@@ -9287,6 +9464,133 @@
         </p:blipFill>
         <p:spPr>
           <a:xfrm>
+            <a:off x="265176" y="274320"/>
+            <a:ext cx="2926080" cy="667512"/>
+          </a:xfrm>
+          <a:prstGeom prst="rect">
+            <a:avLst/>
+          </a:prstGeom>
+        </p:spPr>
+      </p:pic>
+      <p:sp>
+        <p:nvSpPr>
+          <p:cNvPr id="3" name="TextBox 2"/>
+          <p:cNvSpPr txBox="1"/>
+          <p:nvPr/>
+        </p:nvSpPr>
+        <p:spPr>
+          <a:xfrm>
+            <a:off x="3282696" y="356616"/>
+            <a:ext cx="6702552" cy="576072"/>
+          </a:xfrm>
+          <a:prstGeom prst="rect">
+            <a:avLst/>
+          </a:prstGeom>
+          <a:noFill/>
+        </p:spPr>
+        <p:txBody>
+          <a:bodyPr wrap="square" lIns="0" tIns="0" rIns="0" bIns="0" anchor="ctr">
+            <a:spAutoFit/>
+          </a:bodyPr>
+          <a:lstStyle/>
+          <a:p>
+            <a:r>
+              <a:rPr sz="2300" b="1">
+                <a:solidFill>
+                  <a:srgbClr val="111418"/>
+                </a:solidFill>
+                <a:latin typeface="Calibri"/>
+              </a:rPr>
+              <a:t>The data path barely changed</a:t>
+            </a:r>
+          </a:p>
+        </p:txBody>
+      </p:sp>
+      <p:sp>
+        <p:nvSpPr>
+          <p:cNvPr id="4" name="TextBox 3"/>
+          <p:cNvSpPr txBox="1"/>
+          <p:nvPr/>
+        </p:nvSpPr>
+        <p:spPr>
+          <a:xfrm>
+            <a:off x="841248" y="1042415"/>
+            <a:ext cx="7315200" cy="256032"/>
+          </a:xfrm>
+          <a:prstGeom prst="rect">
+            <a:avLst/>
+          </a:prstGeom>
+          <a:noFill/>
+        </p:spPr>
+        <p:txBody>
+          <a:bodyPr wrap="square" lIns="0" tIns="0" rIns="0" bIns="0">
+            <a:spAutoFit/>
+          </a:bodyPr>
+          <a:lstStyle/>
+          <a:p>
+            <a:r>
+              <a:rPr sz="1050" b="1">
+                <a:solidFill>
+                  <a:srgbClr val="E05D07"/>
+                </a:solidFill>
+                <a:latin typeface="Calibri"/>
+              </a:rPr>
+              <a:t>BUILDING IT IN  ·  STEP 3 OF 7</a:t>
+            </a:r>
+          </a:p>
+        </p:txBody>
+      </p:sp>
+      <p:sp>
+        <p:nvSpPr>
+          <p:cNvPr id="5" name="TextBox 4"/>
+          <p:cNvSpPr txBox="1"/>
+          <p:nvPr/>
+        </p:nvSpPr>
+        <p:spPr>
+          <a:xfrm>
+            <a:off x="8613648" y="6355080"/>
+            <a:ext cx="2743200" cy="365760"/>
+          </a:xfrm>
+          <a:prstGeom prst="rect">
+            <a:avLst/>
+          </a:prstGeom>
+          <a:noFill/>
+        </p:spPr>
+        <p:txBody>
+          <a:bodyPr wrap="square" lIns="0" tIns="0" rIns="0" bIns="0">
+            <a:spAutoFit/>
+          </a:bodyPr>
+          <a:lstStyle/>
+          <a:p>
+            <a:pPr algn="r"/>
+            <a:r>
+              <a:rPr sz="1000">
+                <a:solidFill>
+                  <a:srgbClr val="9CA3AF"/>
+                </a:solidFill>
+                <a:latin typeface="Calibri"/>
+              </a:rPr>
+              <a:t>14</a:t>
+            </a:r>
+          </a:p>
+        </p:txBody>
+      </p:sp>
+      <p:pic>
+        <p:nvPicPr>
+          <p:cNvPr id="6" name="Picture 5" descr="datapath_mux_all.png"/>
+          <p:cNvPicPr>
+            <a:picLocks noChangeAspect="1"/>
+          </p:cNvPicPr>
+          <p:nvPr/>
+        </p:nvPicPr>
+        <p:blipFill>
+          <a:blip r:embed="rId4"/>
+          <a:stretch>
+            <a:fillRect/>
+          </a:stretch>
+        </p:blipFill>
+        <p:spPr>
+          <a:xfrm>
             <a:off x="841248" y="2346960"/>
             <a:ext cx="10515600" cy="2804160"/>
           </a:xfrm>
@@ -9312,7 +9616,7 @@
           <a:noFill/>
         </p:spPr>
         <p:txBody>
-          <a:bodyPr wrap="square" lIns="0" rIns="0" tIns="0" bIns="0" anchor="t">
+          <a:bodyPr wrap="square" lIns="0" tIns="0" rIns="0" bIns="0" anchor="t">
             <a:spAutoFit/>
           </a:bodyPr>
           <a:lstStyle/>
@@ -9346,7 +9650,7 @@
 </file>
 
 <file path=ppt/slides/slide15.xml><?xml version="1.0" encoding="utf-8"?>
-<p:sld xmlns:a="http://schemas.openxmlformats.org/drawingml/2006/main" xmlns:p="http://schemas.openxmlformats.org/presentationml/2006/main" xmlns:r="http://schemas.openxmlformats.org/officeDocument/2006/relationships">
+<p:sld xmlns:a="http://schemas.openxmlformats.org/drawingml/2006/main" xmlns:r="http://schemas.openxmlformats.org/officeDocument/2006/relationships" xmlns:p="http://schemas.openxmlformats.org/presentationml/2006/main">
   <p:cSld>
     <p:spTree>
       <p:nvGrpSpPr>
@@ -9354,137 +9658,17 @@
         <p:cNvGrpSpPr/>
         <p:nvPr/>
       </p:nvGrpSpPr>
-      <p:grpSpPr/>
+      <p:grpSpPr>
+        <a:xfrm>
+          <a:off x="0" y="0"/>
+          <a:ext cx="0" cy="0"/>
+          <a:chOff x="0" y="0"/>
+          <a:chExt cx="0" cy="0"/>
+        </a:xfrm>
+      </p:grpSpPr>
       <p:pic>
         <p:nvPicPr>
           <p:cNvPr id="2" name="Picture 1" descr="tau_logo.png"/>
-          <p:cNvPicPr>
-            <a:picLocks noChangeAspect="1"/>
-          </p:cNvPicPr>
-          <p:nvPr/>
-        </p:nvPicPr>
-        <p:blipFill>
-          <a:blip r:embed="rId2"/>
-          <a:stretch>
-            <a:fillRect/>
-          </a:stretch>
-        </p:blipFill>
-        <p:spPr>
-          <a:xfrm>
-            <a:off x="265176" y="274320"/>
-            <a:ext cx="2926080" cy="667512"/>
-          </a:xfrm>
-          <a:prstGeom prst="rect">
-            <a:avLst/>
-          </a:prstGeom>
-        </p:spPr>
-      </p:pic>
-      <p:sp>
-        <p:nvSpPr>
-          <p:cNvPr id="3" name="TextBox 2"/>
-          <p:cNvSpPr txBox="1"/>
-          <p:nvPr/>
-        </p:nvSpPr>
-        <p:spPr>
-          <a:xfrm>
-            <a:off x="3282696" y="356616"/>
-            <a:ext cx="6702552" cy="576072"/>
-          </a:xfrm>
-          <a:prstGeom prst="rect">
-            <a:avLst/>
-          </a:prstGeom>
-          <a:noFill/>
-        </p:spPr>
-        <p:txBody>
-          <a:bodyPr wrap="square" lIns="0" rIns="0" tIns="0" bIns="0" anchor="ctr">
-            <a:spAutoFit/>
-          </a:bodyPr>
-          <a:lstStyle/>
-          <a:p>
-            <a:r>
-              <a:rPr sz="2300" b="1">
-                <a:solidFill>
-                  <a:srgbClr val="111418"/>
-                </a:solidFill>
-                <a:latin typeface="Calibri"/>
-              </a:rPr>
-              <a:t>Three new control signals</a:t>
-            </a:r>
-          </a:p>
-        </p:txBody>
-      </p:sp>
-      <p:sp>
-        <p:nvSpPr>
-          <p:cNvPr id="4" name="TextBox 3"/>
-          <p:cNvSpPr txBox="1"/>
-          <p:nvPr/>
-        </p:nvSpPr>
-        <p:spPr>
-          <a:xfrm>
-            <a:off x="841248" y="1042415"/>
-            <a:ext cx="7315200" cy="256032"/>
-          </a:xfrm>
-          <a:prstGeom prst="rect">
-            <a:avLst/>
-          </a:prstGeom>
-          <a:noFill/>
-        </p:spPr>
-        <p:txBody>
-          <a:bodyPr wrap="square" lIns="0" rIns="0" tIns="0" bIns="0">
-            <a:spAutoFit/>
-          </a:bodyPr>
-          <a:lstStyle/>
-          <a:p>
-            <a:r>
-              <a:rPr sz="1050" b="1">
-                <a:solidFill>
-                  <a:srgbClr val="E05D07"/>
-                </a:solidFill>
-                <a:latin typeface="Calibri"/>
-              </a:rPr>
-              <a:t>BUILDING IT IN  ·  STEP 4 OF 7</a:t>
-            </a:r>
-          </a:p>
-        </p:txBody>
-      </p:sp>
-      <p:sp>
-        <p:nvSpPr>
-          <p:cNvPr id="5" name="TextBox 4"/>
-          <p:cNvSpPr txBox="1"/>
-          <p:nvPr/>
-        </p:nvSpPr>
-        <p:spPr>
-          <a:xfrm>
-            <a:off x="8613648" y="6355080"/>
-            <a:ext cx="2743200" cy="365760"/>
-          </a:xfrm>
-          <a:prstGeom prst="rect">
-            <a:avLst/>
-          </a:prstGeom>
-          <a:noFill/>
-        </p:spPr>
-        <p:txBody>
-          <a:bodyPr wrap="square" lIns="0" rIns="0" tIns="0" bIns="0">
-            <a:spAutoFit/>
-          </a:bodyPr>
-          <a:lstStyle/>
-          <a:p>
-            <a:pPr algn="r"/>
-            <a:r>
-              <a:rPr sz="1000">
-                <a:solidFill>
-                  <a:srgbClr val="9CA3AF"/>
-                </a:solidFill>
-                <a:latin typeface="Calibri"/>
-              </a:rPr>
-              <a:t>15</a:t>
-            </a:r>
-          </a:p>
-        </p:txBody>
-      </p:sp>
-      <p:pic>
-        <p:nvPicPr>
-          <p:cNvPr id="6" name="Picture 5" descr="control_signals_all.png"/>
           <p:cNvPicPr>
             <a:picLocks noChangeAspect="1"/>
           </p:cNvPicPr>
@@ -9498,6 +9682,133 @@
         </p:blipFill>
         <p:spPr>
           <a:xfrm>
+            <a:off x="265176" y="274320"/>
+            <a:ext cx="2926080" cy="667512"/>
+          </a:xfrm>
+          <a:prstGeom prst="rect">
+            <a:avLst/>
+          </a:prstGeom>
+        </p:spPr>
+      </p:pic>
+      <p:sp>
+        <p:nvSpPr>
+          <p:cNvPr id="3" name="TextBox 2"/>
+          <p:cNvSpPr txBox="1"/>
+          <p:nvPr/>
+        </p:nvSpPr>
+        <p:spPr>
+          <a:xfrm>
+            <a:off x="3282696" y="356616"/>
+            <a:ext cx="6702552" cy="576072"/>
+          </a:xfrm>
+          <a:prstGeom prst="rect">
+            <a:avLst/>
+          </a:prstGeom>
+          <a:noFill/>
+        </p:spPr>
+        <p:txBody>
+          <a:bodyPr wrap="square" lIns="0" tIns="0" rIns="0" bIns="0" anchor="ctr">
+            <a:spAutoFit/>
+          </a:bodyPr>
+          <a:lstStyle/>
+          <a:p>
+            <a:r>
+              <a:rPr sz="2300" b="1">
+                <a:solidFill>
+                  <a:srgbClr val="111418"/>
+                </a:solidFill>
+                <a:latin typeface="Calibri"/>
+              </a:rPr>
+              <a:t>Three new control signals</a:t>
+            </a:r>
+          </a:p>
+        </p:txBody>
+      </p:sp>
+      <p:sp>
+        <p:nvSpPr>
+          <p:cNvPr id="4" name="TextBox 3"/>
+          <p:cNvSpPr txBox="1"/>
+          <p:nvPr/>
+        </p:nvSpPr>
+        <p:spPr>
+          <a:xfrm>
+            <a:off x="841248" y="1042415"/>
+            <a:ext cx="7315200" cy="256032"/>
+          </a:xfrm>
+          <a:prstGeom prst="rect">
+            <a:avLst/>
+          </a:prstGeom>
+          <a:noFill/>
+        </p:spPr>
+        <p:txBody>
+          <a:bodyPr wrap="square" lIns="0" tIns="0" rIns="0" bIns="0">
+            <a:spAutoFit/>
+          </a:bodyPr>
+          <a:lstStyle/>
+          <a:p>
+            <a:r>
+              <a:rPr sz="1050" b="1">
+                <a:solidFill>
+                  <a:srgbClr val="E05D07"/>
+                </a:solidFill>
+                <a:latin typeface="Calibri"/>
+              </a:rPr>
+              <a:t>BUILDING IT IN  ·  STEP 4 OF 7</a:t>
+            </a:r>
+          </a:p>
+        </p:txBody>
+      </p:sp>
+      <p:sp>
+        <p:nvSpPr>
+          <p:cNvPr id="5" name="TextBox 4"/>
+          <p:cNvSpPr txBox="1"/>
+          <p:nvPr/>
+        </p:nvSpPr>
+        <p:spPr>
+          <a:xfrm>
+            <a:off x="8613648" y="6355080"/>
+            <a:ext cx="2743200" cy="365760"/>
+          </a:xfrm>
+          <a:prstGeom prst="rect">
+            <a:avLst/>
+          </a:prstGeom>
+          <a:noFill/>
+        </p:spPr>
+        <p:txBody>
+          <a:bodyPr wrap="square" lIns="0" tIns="0" rIns="0" bIns="0">
+            <a:spAutoFit/>
+          </a:bodyPr>
+          <a:lstStyle/>
+          <a:p>
+            <a:pPr algn="r"/>
+            <a:r>
+              <a:rPr sz="1000">
+                <a:solidFill>
+                  <a:srgbClr val="9CA3AF"/>
+                </a:solidFill>
+                <a:latin typeface="Calibri"/>
+              </a:rPr>
+              <a:t>15</a:t>
+            </a:r>
+          </a:p>
+        </p:txBody>
+      </p:sp>
+      <p:pic>
+        <p:nvPicPr>
+          <p:cNvPr id="6" name="Picture 5" descr="control_signals_all.png"/>
+          <p:cNvPicPr>
+            <a:picLocks noChangeAspect="1"/>
+          </p:cNvPicPr>
+          <p:nvPr/>
+        </p:nvPicPr>
+        <p:blipFill>
+          <a:blip r:embed="rId4"/>
+          <a:stretch>
+            <a:fillRect/>
+          </a:stretch>
+        </p:blipFill>
+        <p:spPr>
+          <a:xfrm>
             <a:off x="841248" y="2301240"/>
             <a:ext cx="10515600" cy="2804160"/>
           </a:xfrm>
@@ -9523,7 +9834,7 @@
           <a:noFill/>
         </p:spPr>
         <p:txBody>
-          <a:bodyPr wrap="square" lIns="0" rIns="0" tIns="0" bIns="0" anchor="t">
+          <a:bodyPr wrap="square" lIns="0" tIns="0" rIns="0" bIns="0" anchor="t">
             <a:spAutoFit/>
           </a:bodyPr>
           <a:lstStyle/>
@@ -9557,7 +9868,7 @@
 </file>
 
 <file path=ppt/slides/slide16.xml><?xml version="1.0" encoding="utf-8"?>
-<p:sld xmlns:a="http://schemas.openxmlformats.org/drawingml/2006/main" xmlns:p="http://schemas.openxmlformats.org/presentationml/2006/main" xmlns:r="http://schemas.openxmlformats.org/officeDocument/2006/relationships">
+<p:sld xmlns:a="http://schemas.openxmlformats.org/drawingml/2006/main" xmlns:r="http://schemas.openxmlformats.org/officeDocument/2006/relationships" xmlns:p="http://schemas.openxmlformats.org/presentationml/2006/main">
   <p:cSld>
     <p:spTree>
       <p:nvGrpSpPr>
@@ -9565,137 +9876,17 @@
         <p:cNvGrpSpPr/>
         <p:nvPr/>
       </p:nvGrpSpPr>
-      <p:grpSpPr/>
+      <p:grpSpPr>
+        <a:xfrm>
+          <a:off x="0" y="0"/>
+          <a:ext cx="0" cy="0"/>
+          <a:chOff x="0" y="0"/>
+          <a:chExt cx="0" cy="0"/>
+        </a:xfrm>
+      </p:grpSpPr>
       <p:pic>
         <p:nvPicPr>
           <p:cNvPr id="2" name="Picture 1" descr="tau_logo.png"/>
-          <p:cNvPicPr>
-            <a:picLocks noChangeAspect="1"/>
-          </p:cNvPicPr>
-          <p:nvPr/>
-        </p:nvPicPr>
-        <p:blipFill>
-          <a:blip r:embed="rId2"/>
-          <a:stretch>
-            <a:fillRect/>
-          </a:stretch>
-        </p:blipFill>
-        <p:spPr>
-          <a:xfrm>
-            <a:off x="265176" y="274320"/>
-            <a:ext cx="2926080" cy="667512"/>
-          </a:xfrm>
-          <a:prstGeom prst="rect">
-            <a:avLst/>
-          </a:prstGeom>
-        </p:spPr>
-      </p:pic>
-      <p:sp>
-        <p:nvSpPr>
-          <p:cNvPr id="3" name="TextBox 2"/>
-          <p:cNvSpPr txBox="1"/>
-          <p:nvPr/>
-        </p:nvSpPr>
-        <p:spPr>
-          <a:xfrm>
-            <a:off x="3282696" y="356616"/>
-            <a:ext cx="6702552" cy="576072"/>
-          </a:xfrm>
-          <a:prstGeom prst="rect">
-            <a:avLst/>
-          </a:prstGeom>
-          <a:noFill/>
-        </p:spPr>
-        <p:txBody>
-          <a:bodyPr wrap="square" lIns="0" rIns="0" tIns="0" bIns="0" anchor="ctr">
-            <a:spAutoFit/>
-          </a:bodyPr>
-          <a:lstStyle/>
-          <a:p>
-            <a:r>
-              <a:rPr sz="2300" b="1">
-                <a:solidFill>
-                  <a:srgbClr val="111418"/>
-                </a:solidFill>
-                <a:latin typeface="Calibri"/>
-              </a:rPr>
-              <a:t>Four new states in the instruction FSM</a:t>
-            </a:r>
-          </a:p>
-        </p:txBody>
-      </p:sp>
-      <p:sp>
-        <p:nvSpPr>
-          <p:cNvPr id="4" name="TextBox 3"/>
-          <p:cNvSpPr txBox="1"/>
-          <p:nvPr/>
-        </p:nvSpPr>
-        <p:spPr>
-          <a:xfrm>
-            <a:off x="841248" y="1042415"/>
-            <a:ext cx="7315200" cy="256032"/>
-          </a:xfrm>
-          <a:prstGeom prst="rect">
-            <a:avLst/>
-          </a:prstGeom>
-          <a:noFill/>
-        </p:spPr>
-        <p:txBody>
-          <a:bodyPr wrap="square" lIns="0" rIns="0" tIns="0" bIns="0">
-            <a:spAutoFit/>
-          </a:bodyPr>
-          <a:lstStyle/>
-          <a:p>
-            <a:r>
-              <a:rPr sz="1050" b="1">
-                <a:solidFill>
-                  <a:srgbClr val="E05D07"/>
-                </a:solidFill>
-                <a:latin typeface="Calibri"/>
-              </a:rPr>
-              <a:t>BUILDING IT IN  ·  STEP 5 OF 7</a:t>
-            </a:r>
-          </a:p>
-        </p:txBody>
-      </p:sp>
-      <p:sp>
-        <p:nvSpPr>
-          <p:cNvPr id="5" name="TextBox 4"/>
-          <p:cNvSpPr txBox="1"/>
-          <p:nvPr/>
-        </p:nvSpPr>
-        <p:spPr>
-          <a:xfrm>
-            <a:off x="8613648" y="6355080"/>
-            <a:ext cx="2743200" cy="365760"/>
-          </a:xfrm>
-          <a:prstGeom prst="rect">
-            <a:avLst/>
-          </a:prstGeom>
-          <a:noFill/>
-        </p:spPr>
-        <p:txBody>
-          <a:bodyPr wrap="square" lIns="0" rIns="0" tIns="0" bIns="0">
-            <a:spAutoFit/>
-          </a:bodyPr>
-          <a:lstStyle/>
-          <a:p>
-            <a:pPr algn="r"/>
-            <a:r>
-              <a:rPr sz="1000">
-                <a:solidFill>
-                  <a:srgbClr val="9CA3AF"/>
-                </a:solidFill>
-                <a:latin typeface="Calibri"/>
-              </a:rPr>
-              <a:t>16</a:t>
-            </a:r>
-          </a:p>
-        </p:txBody>
-      </p:sp>
-      <p:pic>
-        <p:nvPicPr>
-          <p:cNvPr id="6" name="Picture 5" descr="fsm_states_all.png"/>
           <p:cNvPicPr>
             <a:picLocks noChangeAspect="1"/>
           </p:cNvPicPr>
@@ -9709,6 +9900,133 @@
         </p:blipFill>
         <p:spPr>
           <a:xfrm>
+            <a:off x="265176" y="274320"/>
+            <a:ext cx="2926080" cy="667512"/>
+          </a:xfrm>
+          <a:prstGeom prst="rect">
+            <a:avLst/>
+          </a:prstGeom>
+        </p:spPr>
+      </p:pic>
+      <p:sp>
+        <p:nvSpPr>
+          <p:cNvPr id="3" name="TextBox 2"/>
+          <p:cNvSpPr txBox="1"/>
+          <p:nvPr/>
+        </p:nvSpPr>
+        <p:spPr>
+          <a:xfrm>
+            <a:off x="3282696" y="356616"/>
+            <a:ext cx="6702552" cy="576072"/>
+          </a:xfrm>
+          <a:prstGeom prst="rect">
+            <a:avLst/>
+          </a:prstGeom>
+          <a:noFill/>
+        </p:spPr>
+        <p:txBody>
+          <a:bodyPr wrap="square" lIns="0" tIns="0" rIns="0" bIns="0" anchor="ctr">
+            <a:spAutoFit/>
+          </a:bodyPr>
+          <a:lstStyle/>
+          <a:p>
+            <a:r>
+              <a:rPr sz="2300" b="1">
+                <a:solidFill>
+                  <a:srgbClr val="111418"/>
+                </a:solidFill>
+                <a:latin typeface="Calibri"/>
+              </a:rPr>
+              <a:t>Four new states in the instruction FSM</a:t>
+            </a:r>
+          </a:p>
+        </p:txBody>
+      </p:sp>
+      <p:sp>
+        <p:nvSpPr>
+          <p:cNvPr id="4" name="TextBox 3"/>
+          <p:cNvSpPr txBox="1"/>
+          <p:nvPr/>
+        </p:nvSpPr>
+        <p:spPr>
+          <a:xfrm>
+            <a:off x="841248" y="1042415"/>
+            <a:ext cx="7315200" cy="256032"/>
+          </a:xfrm>
+          <a:prstGeom prst="rect">
+            <a:avLst/>
+          </a:prstGeom>
+          <a:noFill/>
+        </p:spPr>
+        <p:txBody>
+          <a:bodyPr wrap="square" lIns="0" tIns="0" rIns="0" bIns="0">
+            <a:spAutoFit/>
+          </a:bodyPr>
+          <a:lstStyle/>
+          <a:p>
+            <a:r>
+              <a:rPr sz="1050" b="1">
+                <a:solidFill>
+                  <a:srgbClr val="E05D07"/>
+                </a:solidFill>
+                <a:latin typeface="Calibri"/>
+              </a:rPr>
+              <a:t>BUILDING IT IN  ·  STEP 5 OF 7</a:t>
+            </a:r>
+          </a:p>
+        </p:txBody>
+      </p:sp>
+      <p:sp>
+        <p:nvSpPr>
+          <p:cNvPr id="5" name="TextBox 4"/>
+          <p:cNvSpPr txBox="1"/>
+          <p:nvPr/>
+        </p:nvSpPr>
+        <p:spPr>
+          <a:xfrm>
+            <a:off x="8613648" y="6355080"/>
+            <a:ext cx="2743200" cy="365760"/>
+          </a:xfrm>
+          <a:prstGeom prst="rect">
+            <a:avLst/>
+          </a:prstGeom>
+          <a:noFill/>
+        </p:spPr>
+        <p:txBody>
+          <a:bodyPr wrap="square" lIns="0" tIns="0" rIns="0" bIns="0">
+            <a:spAutoFit/>
+          </a:bodyPr>
+          <a:lstStyle/>
+          <a:p>
+            <a:pPr algn="r"/>
+            <a:r>
+              <a:rPr sz="1000">
+                <a:solidFill>
+                  <a:srgbClr val="9CA3AF"/>
+                </a:solidFill>
+                <a:latin typeface="Calibri"/>
+              </a:rPr>
+              <a:t>16</a:t>
+            </a:r>
+          </a:p>
+        </p:txBody>
+      </p:sp>
+      <p:pic>
+        <p:nvPicPr>
+          <p:cNvPr id="6" name="Picture 5" descr="fsm_states_all.png"/>
+          <p:cNvPicPr>
+            <a:picLocks noChangeAspect="1"/>
+          </p:cNvPicPr>
+          <p:nvPr/>
+        </p:nvPicPr>
+        <p:blipFill>
+          <a:blip r:embed="rId4"/>
+          <a:stretch>
+            <a:fillRect/>
+          </a:stretch>
+        </p:blipFill>
+        <p:spPr>
+          <a:xfrm>
             <a:off x="841248" y="1731264"/>
             <a:ext cx="10515600" cy="3715512"/>
           </a:xfrm>
@@ -9734,7 +10052,7 @@
           <a:noFill/>
         </p:spPr>
         <p:txBody>
-          <a:bodyPr wrap="square" lIns="0" rIns="0" tIns="0" bIns="0" anchor="t">
+          <a:bodyPr wrap="square" lIns="0" tIns="0" rIns="0" bIns="0" anchor="t">
             <a:spAutoFit/>
           </a:bodyPr>
           <a:lstStyle/>
@@ -9768,7 +10086,7 @@
 </file>
 
 <file path=ppt/slides/slide17.xml><?xml version="1.0" encoding="utf-8"?>
-<p:sld xmlns:a="http://schemas.openxmlformats.org/drawingml/2006/main" xmlns:p="http://schemas.openxmlformats.org/presentationml/2006/main" xmlns:r="http://schemas.openxmlformats.org/officeDocument/2006/relationships">
+<p:sld xmlns:a="http://schemas.openxmlformats.org/drawingml/2006/main" xmlns:r="http://schemas.openxmlformats.org/officeDocument/2006/relationships" xmlns:p="http://schemas.openxmlformats.org/presentationml/2006/main">
   <p:cSld>
     <p:spTree>
       <p:nvGrpSpPr>
@@ -9776,137 +10094,17 @@
         <p:cNvGrpSpPr/>
         <p:nvPr/>
       </p:nvGrpSpPr>
-      <p:grpSpPr/>
+      <p:grpSpPr>
+        <a:xfrm>
+          <a:off x="0" y="0"/>
+          <a:ext cx="0" cy="0"/>
+          <a:chOff x="0" y="0"/>
+          <a:chExt cx="0" cy="0"/>
+        </a:xfrm>
+      </p:grpSpPr>
       <p:pic>
         <p:nvPicPr>
           <p:cNvPr id="2" name="Picture 1" descr="tau_logo.png"/>
-          <p:cNvPicPr>
-            <a:picLocks noChangeAspect="1"/>
-          </p:cNvPicPr>
-          <p:nvPr/>
-        </p:nvPicPr>
-        <p:blipFill>
-          <a:blip r:embed="rId2"/>
-          <a:stretch>
-            <a:fillRect/>
-          </a:stretch>
-        </p:blipFill>
-        <p:spPr>
-          <a:xfrm>
-            <a:off x="265176" y="274320"/>
-            <a:ext cx="2926080" cy="667512"/>
-          </a:xfrm>
-          <a:prstGeom prst="rect">
-            <a:avLst/>
-          </a:prstGeom>
-        </p:spPr>
-      </p:pic>
-      <p:sp>
-        <p:nvSpPr>
-          <p:cNvPr id="3" name="TextBox 2"/>
-          <p:cNvSpPr txBox="1"/>
-          <p:nvPr/>
-        </p:nvSpPr>
-        <p:spPr>
-          <a:xfrm>
-            <a:off x="3282696" y="356616"/>
-            <a:ext cx="6702552" cy="576072"/>
-          </a:xfrm>
-          <a:prstGeom prst="rect">
-            <a:avLst/>
-          </a:prstGeom>
-          <a:noFill/>
-        </p:spPr>
-        <p:txBody>
-          <a:bodyPr wrap="square" lIns="0" rIns="0" tIns="0" bIns="0" anchor="ctr">
-            <a:spAutoFit/>
-          </a:bodyPr>
-          <a:lstStyle/>
-          <a:p>
-            <a:r>
-              <a:rPr sz="2300" b="1">
-                <a:solidFill>
-                  <a:srgbClr val="111418"/>
-                </a:solidFill>
-                <a:latin typeface="Calibri"/>
-              </a:rPr>
-              <a:t>Two masters, one memory bus</a:t>
-            </a:r>
-          </a:p>
-        </p:txBody>
-      </p:sp>
-      <p:sp>
-        <p:nvSpPr>
-          <p:cNvPr id="4" name="TextBox 3"/>
-          <p:cNvSpPr txBox="1"/>
-          <p:nvPr/>
-        </p:nvSpPr>
-        <p:spPr>
-          <a:xfrm>
-            <a:off x="841248" y="1042415"/>
-            <a:ext cx="7315200" cy="256032"/>
-          </a:xfrm>
-          <a:prstGeom prst="rect">
-            <a:avLst/>
-          </a:prstGeom>
-          <a:noFill/>
-        </p:spPr>
-        <p:txBody>
-          <a:bodyPr wrap="square" lIns="0" rIns="0" tIns="0" bIns="0">
-            <a:spAutoFit/>
-          </a:bodyPr>
-          <a:lstStyle/>
-          <a:p>
-            <a:r>
-              <a:rPr sz="1050" b="1">
-                <a:solidFill>
-                  <a:srgbClr val="E05D07"/>
-                </a:solidFill>
-                <a:latin typeface="Calibri"/>
-              </a:rPr>
-              <a:t>BUILDING IT IN  ·  STEP 6 OF 7</a:t>
-            </a:r>
-          </a:p>
-        </p:txBody>
-      </p:sp>
-      <p:sp>
-        <p:nvSpPr>
-          <p:cNvPr id="5" name="TextBox 4"/>
-          <p:cNvSpPr txBox="1"/>
-          <p:nvPr/>
-        </p:nvSpPr>
-        <p:spPr>
-          <a:xfrm>
-            <a:off x="8613648" y="6355080"/>
-            <a:ext cx="2743200" cy="365760"/>
-          </a:xfrm>
-          <a:prstGeom prst="rect">
-            <a:avLst/>
-          </a:prstGeom>
-          <a:noFill/>
-        </p:spPr>
-        <p:txBody>
-          <a:bodyPr wrap="square" lIns="0" rIns="0" tIns="0" bIns="0">
-            <a:spAutoFit/>
-          </a:bodyPr>
-          <a:lstStyle/>
-          <a:p>
-            <a:pPr algn="r"/>
-            <a:r>
-              <a:rPr sz="1000">
-                <a:solidFill>
-                  <a:srgbClr val="9CA3AF"/>
-                </a:solidFill>
-                <a:latin typeface="Calibri"/>
-              </a:rPr>
-              <a:t>17</a:t>
-            </a:r>
-          </a:p>
-        </p:txBody>
-      </p:sp>
-      <p:pic>
-        <p:nvPicPr>
-          <p:cNvPr id="6" name="Picture 5" descr="mem_arbiter_all.png"/>
           <p:cNvPicPr>
             <a:picLocks noChangeAspect="1"/>
           </p:cNvPicPr>
@@ -9920,6 +10118,133 @@
         </p:blipFill>
         <p:spPr>
           <a:xfrm>
+            <a:off x="265176" y="274320"/>
+            <a:ext cx="2926080" cy="667512"/>
+          </a:xfrm>
+          <a:prstGeom prst="rect">
+            <a:avLst/>
+          </a:prstGeom>
+        </p:spPr>
+      </p:pic>
+      <p:sp>
+        <p:nvSpPr>
+          <p:cNvPr id="3" name="TextBox 2"/>
+          <p:cNvSpPr txBox="1"/>
+          <p:nvPr/>
+        </p:nvSpPr>
+        <p:spPr>
+          <a:xfrm>
+            <a:off x="3282696" y="356616"/>
+            <a:ext cx="6702552" cy="576072"/>
+          </a:xfrm>
+          <a:prstGeom prst="rect">
+            <a:avLst/>
+          </a:prstGeom>
+          <a:noFill/>
+        </p:spPr>
+        <p:txBody>
+          <a:bodyPr wrap="square" lIns="0" tIns="0" rIns="0" bIns="0" anchor="ctr">
+            <a:spAutoFit/>
+          </a:bodyPr>
+          <a:lstStyle/>
+          <a:p>
+            <a:r>
+              <a:rPr sz="2300" b="1">
+                <a:solidFill>
+                  <a:srgbClr val="111418"/>
+                </a:solidFill>
+                <a:latin typeface="Calibri"/>
+              </a:rPr>
+              <a:t>Two masters, one memory bus</a:t>
+            </a:r>
+          </a:p>
+        </p:txBody>
+      </p:sp>
+      <p:sp>
+        <p:nvSpPr>
+          <p:cNvPr id="4" name="TextBox 3"/>
+          <p:cNvSpPr txBox="1"/>
+          <p:nvPr/>
+        </p:nvSpPr>
+        <p:spPr>
+          <a:xfrm>
+            <a:off x="841248" y="1042415"/>
+            <a:ext cx="7315200" cy="256032"/>
+          </a:xfrm>
+          <a:prstGeom prst="rect">
+            <a:avLst/>
+          </a:prstGeom>
+          <a:noFill/>
+        </p:spPr>
+        <p:txBody>
+          <a:bodyPr wrap="square" lIns="0" tIns="0" rIns="0" bIns="0">
+            <a:spAutoFit/>
+          </a:bodyPr>
+          <a:lstStyle/>
+          <a:p>
+            <a:r>
+              <a:rPr sz="1050" b="1">
+                <a:solidFill>
+                  <a:srgbClr val="E05D07"/>
+                </a:solidFill>
+                <a:latin typeface="Calibri"/>
+              </a:rPr>
+              <a:t>BUILDING IT IN  ·  STEP 6 OF 7</a:t>
+            </a:r>
+          </a:p>
+        </p:txBody>
+      </p:sp>
+      <p:sp>
+        <p:nvSpPr>
+          <p:cNvPr id="5" name="TextBox 4"/>
+          <p:cNvSpPr txBox="1"/>
+          <p:nvPr/>
+        </p:nvSpPr>
+        <p:spPr>
+          <a:xfrm>
+            <a:off x="8613648" y="6355080"/>
+            <a:ext cx="2743200" cy="365760"/>
+          </a:xfrm>
+          <a:prstGeom prst="rect">
+            <a:avLst/>
+          </a:prstGeom>
+          <a:noFill/>
+        </p:spPr>
+        <p:txBody>
+          <a:bodyPr wrap="square" lIns="0" tIns="0" rIns="0" bIns="0">
+            <a:spAutoFit/>
+          </a:bodyPr>
+          <a:lstStyle/>
+          <a:p>
+            <a:pPr algn="r"/>
+            <a:r>
+              <a:rPr sz="1000">
+                <a:solidFill>
+                  <a:srgbClr val="9CA3AF"/>
+                </a:solidFill>
+                <a:latin typeface="Calibri"/>
+              </a:rPr>
+              <a:t>17</a:t>
+            </a:r>
+          </a:p>
+        </p:txBody>
+      </p:sp>
+      <p:pic>
+        <p:nvPicPr>
+          <p:cNvPr id="6" name="Picture 5" descr="mem_arbiter_all.png"/>
+          <p:cNvPicPr>
+            <a:picLocks noChangeAspect="1"/>
+          </p:cNvPicPr>
+          <p:nvPr/>
+        </p:nvPicPr>
+        <p:blipFill>
+          <a:blip r:embed="rId4"/>
+          <a:stretch>
+            <a:fillRect/>
+          </a:stretch>
+        </p:blipFill>
+        <p:spPr>
+          <a:xfrm>
             <a:off x="841248" y="2262835"/>
             <a:ext cx="10515600" cy="2972409"/>
           </a:xfrm>
@@ -9945,7 +10270,7 @@
           <a:noFill/>
         </p:spPr>
         <p:txBody>
-          <a:bodyPr wrap="square" lIns="0" rIns="0" tIns="0" bIns="0" anchor="t">
+          <a:bodyPr wrap="square" lIns="0" tIns="0" rIns="0" bIns="0" anchor="t">
             <a:spAutoFit/>
           </a:bodyPr>
           <a:lstStyle/>
@@ -9979,7 +10304,7 @@
 </file>
 
 <file path=ppt/slides/slide18.xml><?xml version="1.0" encoding="utf-8"?>
-<p:sld xmlns:a="http://schemas.openxmlformats.org/drawingml/2006/main" xmlns:p="http://schemas.openxmlformats.org/presentationml/2006/main" xmlns:r="http://schemas.openxmlformats.org/officeDocument/2006/relationships">
+<p:sld xmlns:a="http://schemas.openxmlformats.org/drawingml/2006/main" xmlns:r="http://schemas.openxmlformats.org/officeDocument/2006/relationships" xmlns:p="http://schemas.openxmlformats.org/presentationml/2006/main">
   <p:cSld>
     <p:spTree>
       <p:nvGrpSpPr>
@@ -9987,137 +10312,17 @@
         <p:cNvGrpSpPr/>
         <p:nvPr/>
       </p:nvGrpSpPr>
-      <p:grpSpPr/>
+      <p:grpSpPr>
+        <a:xfrm>
+          <a:off x="0" y="0"/>
+          <a:ext cx="0" cy="0"/>
+          <a:chOff x="0" y="0"/>
+          <a:chExt cx="0" cy="0"/>
+        </a:xfrm>
+      </p:grpSpPr>
       <p:pic>
         <p:nvPicPr>
           <p:cNvPr id="2" name="Picture 1" descr="tau_logo.png"/>
-          <p:cNvPicPr>
-            <a:picLocks noChangeAspect="1"/>
-          </p:cNvPicPr>
-          <p:nvPr/>
-        </p:nvPicPr>
-        <p:blipFill>
-          <a:blip r:embed="rId2"/>
-          <a:stretch>
-            <a:fillRect/>
-          </a:stretch>
-        </p:blipFill>
-        <p:spPr>
-          <a:xfrm>
-            <a:off x="265176" y="274320"/>
-            <a:ext cx="2926080" cy="667512"/>
-          </a:xfrm>
-          <a:prstGeom prst="rect">
-            <a:avLst/>
-          </a:prstGeom>
-        </p:spPr>
-      </p:pic>
-      <p:sp>
-        <p:nvSpPr>
-          <p:cNvPr id="3" name="TextBox 2"/>
-          <p:cNvSpPr txBox="1"/>
-          <p:nvPr/>
-        </p:nvSpPr>
-        <p:spPr>
-          <a:xfrm>
-            <a:off x="3282696" y="356616"/>
-            <a:ext cx="6702552" cy="576072"/>
-          </a:xfrm>
-          <a:prstGeom prst="rect">
-            <a:avLst/>
-          </a:prstGeom>
-          <a:noFill/>
-        </p:spPr>
-        <p:txBody>
-          <a:bodyPr wrap="square" lIns="0" rIns="0" tIns="0" bIns="0" anchor="ctr">
-            <a:spAutoFit/>
-          </a:bodyPr>
-          <a:lstStyle/>
-          <a:p>
-            <a:r>
-              <a:rPr sz="2300" b="1">
-                <a:solidFill>
-                  <a:srgbClr val="111418"/>
-                </a:solidFill>
-                <a:latin typeface="Calibri"/>
-              </a:rPr>
-              <a:t>Why softmax could not live in registers</a:t>
-            </a:r>
-          </a:p>
-        </p:txBody>
-      </p:sp>
-      <p:sp>
-        <p:nvSpPr>
-          <p:cNvPr id="4" name="TextBox 3"/>
-          <p:cNvSpPr txBox="1"/>
-          <p:nvPr/>
-        </p:nvSpPr>
-        <p:spPr>
-          <a:xfrm>
-            <a:off x="841248" y="1042415"/>
-            <a:ext cx="7315200" cy="256032"/>
-          </a:xfrm>
-          <a:prstGeom prst="rect">
-            <a:avLst/>
-          </a:prstGeom>
-          <a:noFill/>
-        </p:spPr>
-        <p:txBody>
-          <a:bodyPr wrap="square" lIns="0" rIns="0" tIns="0" bIns="0">
-            <a:spAutoFit/>
-          </a:bodyPr>
-          <a:lstStyle/>
-          <a:p>
-            <a:r>
-              <a:rPr sz="1050" b="1">
-                <a:solidFill>
-                  <a:srgbClr val="E05D07"/>
-                </a:solidFill>
-                <a:latin typeface="Calibri"/>
-              </a:rPr>
-              <a:t>BUILDING IT IN  ·  STEP 7 OF 7</a:t>
-            </a:r>
-          </a:p>
-        </p:txBody>
-      </p:sp>
-      <p:sp>
-        <p:nvSpPr>
-          <p:cNvPr id="5" name="TextBox 4"/>
-          <p:cNvSpPr txBox="1"/>
-          <p:nvPr/>
-        </p:nvSpPr>
-        <p:spPr>
-          <a:xfrm>
-            <a:off x="8613648" y="6355080"/>
-            <a:ext cx="2743200" cy="365760"/>
-          </a:xfrm>
-          <a:prstGeom prst="rect">
-            <a:avLst/>
-          </a:prstGeom>
-          <a:noFill/>
-        </p:spPr>
-        <p:txBody>
-          <a:bodyPr wrap="square" lIns="0" rIns="0" tIns="0" bIns="0">
-            <a:spAutoFit/>
-          </a:bodyPr>
-          <a:lstStyle/>
-          <a:p>
-            <a:pPr algn="r"/>
-            <a:r>
-              <a:rPr sz="1000">
-                <a:solidFill>
-                  <a:srgbClr val="9CA3AF"/>
-                </a:solidFill>
-                <a:latin typeface="Calibri"/>
-              </a:rPr>
-              <a:t>18</a:t>
-            </a:r>
-          </a:p>
-        </p:txBody>
-      </p:sp>
-      <p:pic>
-        <p:nvPicPr>
-          <p:cNvPr id="6" name="Picture 5" descr="softmax_memflow_all.png"/>
           <p:cNvPicPr>
             <a:picLocks noChangeAspect="1"/>
           </p:cNvPicPr>
@@ -10131,6 +10336,133 @@
         </p:blipFill>
         <p:spPr>
           <a:xfrm>
+            <a:off x="265176" y="274320"/>
+            <a:ext cx="2926080" cy="667512"/>
+          </a:xfrm>
+          <a:prstGeom prst="rect">
+            <a:avLst/>
+          </a:prstGeom>
+        </p:spPr>
+      </p:pic>
+      <p:sp>
+        <p:nvSpPr>
+          <p:cNvPr id="3" name="TextBox 2"/>
+          <p:cNvSpPr txBox="1"/>
+          <p:nvPr/>
+        </p:nvSpPr>
+        <p:spPr>
+          <a:xfrm>
+            <a:off x="3282696" y="356616"/>
+            <a:ext cx="6702552" cy="576072"/>
+          </a:xfrm>
+          <a:prstGeom prst="rect">
+            <a:avLst/>
+          </a:prstGeom>
+          <a:noFill/>
+        </p:spPr>
+        <p:txBody>
+          <a:bodyPr wrap="square" lIns="0" tIns="0" rIns="0" bIns="0" anchor="ctr">
+            <a:spAutoFit/>
+          </a:bodyPr>
+          <a:lstStyle/>
+          <a:p>
+            <a:r>
+              <a:rPr sz="2300" b="1">
+                <a:solidFill>
+                  <a:srgbClr val="111418"/>
+                </a:solidFill>
+                <a:latin typeface="Calibri"/>
+              </a:rPr>
+              <a:t>Why softmax could not live in registers</a:t>
+            </a:r>
+          </a:p>
+        </p:txBody>
+      </p:sp>
+      <p:sp>
+        <p:nvSpPr>
+          <p:cNvPr id="4" name="TextBox 3"/>
+          <p:cNvSpPr txBox="1"/>
+          <p:nvPr/>
+        </p:nvSpPr>
+        <p:spPr>
+          <a:xfrm>
+            <a:off x="841248" y="1042415"/>
+            <a:ext cx="7315200" cy="256032"/>
+          </a:xfrm>
+          <a:prstGeom prst="rect">
+            <a:avLst/>
+          </a:prstGeom>
+          <a:noFill/>
+        </p:spPr>
+        <p:txBody>
+          <a:bodyPr wrap="square" lIns="0" tIns="0" rIns="0" bIns="0">
+            <a:spAutoFit/>
+          </a:bodyPr>
+          <a:lstStyle/>
+          <a:p>
+            <a:r>
+              <a:rPr sz="1050" b="1">
+                <a:solidFill>
+                  <a:srgbClr val="E05D07"/>
+                </a:solidFill>
+                <a:latin typeface="Calibri"/>
+              </a:rPr>
+              <a:t>BUILDING IT IN  ·  STEP 7 OF 7</a:t>
+            </a:r>
+          </a:p>
+        </p:txBody>
+      </p:sp>
+      <p:sp>
+        <p:nvSpPr>
+          <p:cNvPr id="5" name="TextBox 4"/>
+          <p:cNvSpPr txBox="1"/>
+          <p:nvPr/>
+        </p:nvSpPr>
+        <p:spPr>
+          <a:xfrm>
+            <a:off x="8613648" y="6355080"/>
+            <a:ext cx="2743200" cy="365760"/>
+          </a:xfrm>
+          <a:prstGeom prst="rect">
+            <a:avLst/>
+          </a:prstGeom>
+          <a:noFill/>
+        </p:spPr>
+        <p:txBody>
+          <a:bodyPr wrap="square" lIns="0" tIns="0" rIns="0" bIns="0">
+            <a:spAutoFit/>
+          </a:bodyPr>
+          <a:lstStyle/>
+          <a:p>
+            <a:pPr algn="r"/>
+            <a:r>
+              <a:rPr sz="1000">
+                <a:solidFill>
+                  <a:srgbClr val="9CA3AF"/>
+                </a:solidFill>
+                <a:latin typeface="Calibri"/>
+              </a:rPr>
+              <a:t>18</a:t>
+            </a:r>
+          </a:p>
+        </p:txBody>
+      </p:sp>
+      <p:pic>
+        <p:nvPicPr>
+          <p:cNvPr id="6" name="Picture 5" descr="softmax_memflow_all.png"/>
+          <p:cNvPicPr>
+            <a:picLocks noChangeAspect="1"/>
+          </p:cNvPicPr>
+          <p:nvPr/>
+        </p:nvPicPr>
+        <p:blipFill>
+          <a:blip r:embed="rId4"/>
+          <a:stretch>
+            <a:fillRect/>
+          </a:stretch>
+        </p:blipFill>
+        <p:spPr>
+          <a:xfrm>
             <a:off x="841248" y="1927860"/>
             <a:ext cx="10515600" cy="3505199"/>
           </a:xfrm>
@@ -10156,7 +10488,7 @@
           <a:noFill/>
         </p:spPr>
         <p:txBody>
-          <a:bodyPr wrap="square" lIns="0" rIns="0" tIns="0" bIns="0" anchor="t">
+          <a:bodyPr wrap="square" lIns="0" tIns="0" rIns="0" bIns="0" anchor="t">
             <a:spAutoFit/>
           </a:bodyPr>
           <a:lstStyle/>
@@ -10190,7 +10522,7 @@
 </file>
 
 <file path=ppt/slides/slide19.xml><?xml version="1.0" encoding="utf-8"?>
-<p:sld xmlns:a="http://schemas.openxmlformats.org/drawingml/2006/main" xmlns:p="http://schemas.openxmlformats.org/presentationml/2006/main" xmlns:r="http://schemas.openxmlformats.org/officeDocument/2006/relationships">
+<p:sld xmlns:a="http://schemas.openxmlformats.org/drawingml/2006/main" xmlns:r="http://schemas.openxmlformats.org/officeDocument/2006/relationships" xmlns:p="http://schemas.openxmlformats.org/presentationml/2006/main">
   <p:cSld>
     <p:spTree>
       <p:nvGrpSpPr>
@@ -10198,7 +10530,14 @@
         <p:cNvGrpSpPr/>
         <p:nvPr/>
       </p:nvGrpSpPr>
-      <p:grpSpPr/>
+      <p:grpSpPr>
+        <a:xfrm>
+          <a:off x="0" y="0"/>
+          <a:ext cx="0" cy="0"/>
+          <a:chOff x="0" y="0"/>
+          <a:chExt cx="0" cy="0"/>
+        </a:xfrm>
+      </p:grpSpPr>
       <p:pic>
         <p:nvPicPr>
           <p:cNvPr id="2" name="Picture 1" descr="tau_logo.png"/>
@@ -10208,7 +10547,7 @@
           <p:nvPr/>
         </p:nvPicPr>
         <p:blipFill>
-          <a:blip r:embed="rId2"/>
+          <a:blip r:embed="rId3"/>
           <a:stretch>
             <a:fillRect/>
           </a:stretch>
@@ -10240,7 +10579,7 @@
           <a:noFill/>
         </p:spPr>
         <p:txBody>
-          <a:bodyPr wrap="square" lIns="0" rIns="0" tIns="0" bIns="0" anchor="ctr">
+          <a:bodyPr wrap="square" lIns="0" tIns="0" rIns="0" bIns="0" anchor="ctr">
             <a:spAutoFit/>
           </a:bodyPr>
           <a:lstStyle/>
@@ -10274,7 +10613,7 @@
           <a:noFill/>
         </p:spPr>
         <p:txBody>
-          <a:bodyPr wrap="square" lIns="0" rIns="0" tIns="0" bIns="0">
+          <a:bodyPr wrap="square" lIns="0" tIns="0" rIns="0" bIns="0">
             <a:spAutoFit/>
           </a:bodyPr>
           <a:lstStyle/>
@@ -10308,7 +10647,7 @@
           <a:noFill/>
         </p:spPr>
         <p:txBody>
-          <a:bodyPr wrap="square" lIns="0" rIns="0" tIns="0" bIns="0">
+          <a:bodyPr wrap="square" lIns="0" tIns="0" rIns="0" bIns="0">
             <a:spAutoFit/>
           </a:bodyPr>
           <a:lstStyle/>
@@ -10335,7 +10674,7 @@
           <p:nvPr/>
         </p:nvPicPr>
         <p:blipFill>
-          <a:blip r:embed="rId3"/>
+          <a:blip r:embed="rId4"/>
           <a:stretch>
             <a:fillRect/>
           </a:stretch>
@@ -10391,6 +10730,7 @@
           <a:lstStyle/>
           <a:p>
             <a:pPr algn="ctr"/>
+            <a:endParaRPr/>
           </a:p>
         </p:txBody>
       </p:sp>
@@ -10411,7 +10751,7 @@
           <a:noFill/>
         </p:spPr>
         <p:txBody>
-          <a:bodyPr wrap="square" lIns="0" rIns="0" tIns="0" bIns="0" anchor="t">
+          <a:bodyPr wrap="square" lIns="0" tIns="0" rIns="0" bIns="0" anchor="t">
             <a:spAutoFit/>
           </a:bodyPr>
           <a:lstStyle/>
@@ -10453,7 +10793,7 @@
           <a:noFill/>
         </p:spPr>
         <p:txBody>
-          <a:bodyPr wrap="square" lIns="0" rIns="0" tIns="0" bIns="0" anchor="t">
+          <a:bodyPr wrap="square" lIns="0" tIns="0" rIns="0" bIns="0" anchor="t">
             <a:spAutoFit/>
           </a:bodyPr>
           <a:lstStyle/>
@@ -10496,7 +10836,7 @@
           <a:noFill/>
         </p:spPr>
         <p:txBody>
-          <a:bodyPr wrap="square" lIns="0" rIns="0" tIns="0" bIns="0" anchor="t">
+          <a:bodyPr wrap="square" lIns="0" tIns="0" rIns="0" bIns="0" anchor="t">
             <a:spAutoFit/>
           </a:bodyPr>
           <a:lstStyle/>
@@ -10538,7 +10878,7 @@
           <a:noFill/>
         </p:spPr>
         <p:txBody>
-          <a:bodyPr wrap="square" lIns="0" rIns="0" tIns="0" bIns="0" anchor="t">
+          <a:bodyPr wrap="square" lIns="0" tIns="0" rIns="0" bIns="0" anchor="t">
             <a:spAutoFit/>
           </a:bodyPr>
           <a:lstStyle/>
@@ -10581,7 +10921,7 @@
           <a:noFill/>
         </p:spPr>
         <p:txBody>
-          <a:bodyPr wrap="square" lIns="0" rIns="0" tIns="0" bIns="0" anchor="t">
+          <a:bodyPr wrap="square" lIns="0" tIns="0" rIns="0" bIns="0" anchor="t">
             <a:spAutoFit/>
           </a:bodyPr>
           <a:lstStyle/>
@@ -10623,7 +10963,7 @@
           <a:noFill/>
         </p:spPr>
         <p:txBody>
-          <a:bodyPr wrap="square" lIns="0" rIns="0" tIns="0" bIns="0" anchor="t">
+          <a:bodyPr wrap="square" lIns="0" tIns="0" rIns="0" bIns="0" anchor="t">
             <a:spAutoFit/>
           </a:bodyPr>
           <a:lstStyle/>
@@ -10658,7 +10998,7 @@
 </file>
 
 <file path=ppt/slides/slide2.xml><?xml version="1.0" encoding="utf-8"?>
-<p:sld xmlns:a="http://schemas.openxmlformats.org/drawingml/2006/main" xmlns:p="http://schemas.openxmlformats.org/presentationml/2006/main" xmlns:r="http://schemas.openxmlformats.org/officeDocument/2006/relationships">
+<p:sld xmlns:a="http://schemas.openxmlformats.org/drawingml/2006/main" xmlns:r="http://schemas.openxmlformats.org/officeDocument/2006/relationships" xmlns:p="http://schemas.openxmlformats.org/presentationml/2006/main">
   <p:cSld>
     <p:spTree>
       <p:nvGrpSpPr>
@@ -10666,7 +11006,14 @@
         <p:cNvGrpSpPr/>
         <p:nvPr/>
       </p:nvGrpSpPr>
-      <p:grpSpPr/>
+      <p:grpSpPr>
+        <a:xfrm>
+          <a:off x="0" y="0"/>
+          <a:ext cx="0" cy="0"/>
+          <a:chOff x="0" y="0"/>
+          <a:chExt cx="0" cy="0"/>
+        </a:xfrm>
+      </p:grpSpPr>
       <p:pic>
         <p:nvPicPr>
           <p:cNvPr id="2" name="Picture 1" descr="tau_logo.png"/>
@@ -10676,7 +11023,7 @@
           <p:nvPr/>
         </p:nvPicPr>
         <p:blipFill>
-          <a:blip r:embed="rId2"/>
+          <a:blip r:embed="rId3"/>
           <a:stretch>
             <a:fillRect/>
           </a:stretch>
@@ -10708,13 +11055,13 @@
           <a:noFill/>
         </p:spPr>
         <p:txBody>
-          <a:bodyPr wrap="square" lIns="0" rIns="0" tIns="0" bIns="0" anchor="ctr">
-            <a:spAutoFit/>
-          </a:bodyPr>
-          <a:lstStyle/>
-          <a:p>
-            <a:r>
-              <a:rPr sz="2300" b="1">
+          <a:bodyPr wrap="square" lIns="0" tIns="0" rIns="0" bIns="0" anchor="ctr">
+            <a:spAutoFit/>
+          </a:bodyPr>
+          <a:lstStyle/>
+          <a:p>
+            <a:r>
+              <a:rPr sz="2300" b="1" dirty="0">
                 <a:solidFill>
                   <a:srgbClr val="111418"/>
                 </a:solidFill>
@@ -10742,13 +11089,13 @@
           <a:noFill/>
         </p:spPr>
         <p:txBody>
-          <a:bodyPr wrap="square" lIns="0" rIns="0" tIns="0" bIns="0">
-            <a:spAutoFit/>
-          </a:bodyPr>
-          <a:lstStyle/>
-          <a:p>
-            <a:r>
-              <a:rPr sz="1050" b="1">
+          <a:bodyPr wrap="square" lIns="0" tIns="0" rIns="0" bIns="0">
+            <a:spAutoFit/>
+          </a:bodyPr>
+          <a:lstStyle/>
+          <a:p>
+            <a:r>
+              <a:rPr sz="1050" b="1" dirty="0">
                 <a:solidFill>
                   <a:srgbClr val="E05D07"/>
                 </a:solidFill>
@@ -10776,7 +11123,7 @@
           <a:noFill/>
         </p:spPr>
         <p:txBody>
-          <a:bodyPr wrap="square" lIns="0" rIns="0" tIns="0" bIns="0">
+          <a:bodyPr wrap="square" lIns="0" tIns="0" rIns="0" bIns="0">
             <a:spAutoFit/>
           </a:bodyPr>
           <a:lstStyle/>
@@ -10803,7 +11150,7 @@
           <p:nvPr/>
         </p:nvPicPr>
         <p:blipFill>
-          <a:blip r:embed="rId3"/>
+          <a:blip r:embed="rId4"/>
           <a:stretch>
             <a:fillRect/>
           </a:stretch>
@@ -10859,6 +11206,7 @@
           <a:lstStyle/>
           <a:p>
             <a:pPr algn="ctr"/>
+            <a:endParaRPr/>
           </a:p>
         </p:txBody>
       </p:sp>
@@ -10879,7 +11227,7 @@
           <a:noFill/>
         </p:spPr>
         <p:txBody>
-          <a:bodyPr wrap="square" lIns="0" rIns="0" tIns="0" bIns="0" anchor="t">
+          <a:bodyPr wrap="square" lIns="0" tIns="0" rIns="0" bIns="0" anchor="t">
             <a:spAutoFit/>
           </a:bodyPr>
           <a:lstStyle/>
@@ -10893,7 +11241,7 @@
               </a:spcAft>
             </a:pPr>
             <a:r>
-              <a:rPr sz="4400" b="0">
+              <a:rPr sz="4400" b="0" dirty="0">
                 <a:solidFill>
                   <a:srgbClr val="E05D07"/>
                 </a:solidFill>
@@ -10921,7 +11269,7 @@
           <a:noFill/>
         </p:spPr>
         <p:txBody>
-          <a:bodyPr wrap="square" lIns="0" rIns="0" tIns="0" bIns="0" anchor="t">
+          <a:bodyPr wrap="square" lIns="0" tIns="0" rIns="0" bIns="0" anchor="t">
             <a:spAutoFit/>
           </a:bodyPr>
           <a:lstStyle/>
@@ -10935,7 +11283,7 @@
               </a:spcAft>
             </a:pPr>
             <a:r>
-              <a:rPr sz="1150" b="0">
+              <a:rPr sz="1150" b="0" dirty="0">
                 <a:solidFill>
                   <a:srgbClr val="6B7280"/>
                 </a:solidFill>
@@ -10964,7 +11312,7 @@
           <a:noFill/>
         </p:spPr>
         <p:txBody>
-          <a:bodyPr wrap="square" lIns="0" rIns="0" tIns="0" bIns="0" anchor="t">
+          <a:bodyPr wrap="square" lIns="0" tIns="0" rIns="0" bIns="0" anchor="t">
             <a:spAutoFit/>
           </a:bodyPr>
           <a:lstStyle/>
@@ -10978,7 +11326,7 @@
               </a:spcAft>
             </a:pPr>
             <a:r>
-              <a:rPr sz="4400" b="0">
+              <a:rPr sz="4400" b="0" dirty="0">
                 <a:solidFill>
                   <a:srgbClr val="111418"/>
                 </a:solidFill>
@@ -11006,7 +11354,7 @@
           <a:noFill/>
         </p:spPr>
         <p:txBody>
-          <a:bodyPr wrap="square" lIns="0" rIns="0" tIns="0" bIns="0" anchor="t">
+          <a:bodyPr wrap="square" lIns="0" tIns="0" rIns="0" bIns="0" anchor="t">
             <a:spAutoFit/>
           </a:bodyPr>
           <a:lstStyle/>
@@ -11020,7 +11368,7 @@
               </a:spcAft>
             </a:pPr>
             <a:r>
-              <a:rPr sz="1150" b="0">
+              <a:rPr sz="1150" b="0" dirty="0">
                 <a:solidFill>
                   <a:srgbClr val="6B7280"/>
                 </a:solidFill>
@@ -11049,7 +11397,7 @@
           <a:noFill/>
         </p:spPr>
         <p:txBody>
-          <a:bodyPr wrap="square" lIns="0" rIns="0" tIns="0" bIns="0" anchor="t">
+          <a:bodyPr wrap="square" lIns="0" tIns="0" rIns="0" bIns="0" anchor="t">
             <a:spAutoFit/>
           </a:bodyPr>
           <a:lstStyle/>
@@ -11063,7 +11411,7 @@
               </a:spcAft>
             </a:pPr>
             <a:r>
-              <a:rPr sz="4400" b="0">
+              <a:rPr sz="4400" b="0" dirty="0">
                 <a:solidFill>
                   <a:srgbClr val="111418"/>
                 </a:solidFill>
@@ -11091,7 +11439,7 @@
           <a:noFill/>
         </p:spPr>
         <p:txBody>
-          <a:bodyPr wrap="square" lIns="0" rIns="0" tIns="0" bIns="0" anchor="t">
+          <a:bodyPr wrap="square" lIns="0" tIns="0" rIns="0" bIns="0" anchor="t">
             <a:spAutoFit/>
           </a:bodyPr>
           <a:lstStyle/>
@@ -11105,7 +11453,7 @@
               </a:spcAft>
             </a:pPr>
             <a:r>
-              <a:rPr sz="1150" b="0">
+              <a:rPr sz="1150" b="0" dirty="0">
                 <a:solidFill>
                   <a:srgbClr val="6B7280"/>
                 </a:solidFill>
@@ -11126,7 +11474,7 @@
 </file>
 
 <file path=ppt/slides/slide20.xml><?xml version="1.0" encoding="utf-8"?>
-<p:sld xmlns:a="http://schemas.openxmlformats.org/drawingml/2006/main" xmlns:p="http://schemas.openxmlformats.org/presentationml/2006/main" xmlns:r="http://schemas.openxmlformats.org/officeDocument/2006/relationships">
+<p:sld xmlns:a="http://schemas.openxmlformats.org/drawingml/2006/main" xmlns:r="http://schemas.openxmlformats.org/officeDocument/2006/relationships" xmlns:p="http://schemas.openxmlformats.org/presentationml/2006/main">
   <p:cSld>
     <p:spTree>
       <p:nvGrpSpPr>
@@ -11134,7 +11482,14 @@
         <p:cNvGrpSpPr/>
         <p:nvPr/>
       </p:nvGrpSpPr>
-      <p:grpSpPr/>
+      <p:grpSpPr>
+        <a:xfrm>
+          <a:off x="0" y="0"/>
+          <a:ext cx="0" cy="0"/>
+          <a:chOff x="0" y="0"/>
+          <a:chExt cx="0" cy="0"/>
+        </a:xfrm>
+      </p:grpSpPr>
       <p:pic>
         <p:nvPicPr>
           <p:cNvPr id="2" name="Picture 1" descr="tau_logo.png"/>
@@ -11144,7 +11499,7 @@
           <p:nvPr/>
         </p:nvPicPr>
         <p:blipFill>
-          <a:blip r:embed="rId2"/>
+          <a:blip r:embed="rId3"/>
           <a:stretch>
             <a:fillRect/>
           </a:stretch>
@@ -11176,7 +11531,7 @@
           <a:noFill/>
         </p:spPr>
         <p:txBody>
-          <a:bodyPr wrap="square" lIns="0" rIns="0" tIns="0" bIns="0" anchor="ctr">
+          <a:bodyPr wrap="square" lIns="0" tIns="0" rIns="0" bIns="0" anchor="ctr">
             <a:spAutoFit/>
           </a:bodyPr>
           <a:lstStyle/>
@@ -11210,7 +11565,7 @@
           <a:noFill/>
         </p:spPr>
         <p:txBody>
-          <a:bodyPr wrap="square" lIns="0" rIns="0" tIns="0" bIns="0">
+          <a:bodyPr wrap="square" lIns="0" tIns="0" rIns="0" bIns="0">
             <a:spAutoFit/>
           </a:bodyPr>
           <a:lstStyle/>
@@ -11244,7 +11599,7 @@
           <a:noFill/>
         </p:spPr>
         <p:txBody>
-          <a:bodyPr wrap="square" lIns="0" rIns="0" tIns="0" bIns="0">
+          <a:bodyPr wrap="square" lIns="0" tIns="0" rIns="0" bIns="0">
             <a:spAutoFit/>
           </a:bodyPr>
           <a:lstStyle/>
@@ -11271,7 +11626,7 @@
           <p:nvPr/>
         </p:nvPicPr>
         <p:blipFill>
-          <a:blip r:embed="rId3"/>
+          <a:blip r:embed="rId4"/>
           <a:stretch>
             <a:fillRect/>
           </a:stretch>
@@ -11327,6 +11682,7 @@
           <a:lstStyle/>
           <a:p>
             <a:pPr algn="ctr"/>
+            <a:endParaRPr/>
           </a:p>
         </p:txBody>
       </p:sp>
@@ -11347,7 +11703,7 @@
           <a:noFill/>
         </p:spPr>
         <p:txBody>
-          <a:bodyPr wrap="square" lIns="0" rIns="0" tIns="0" bIns="0" anchor="t">
+          <a:bodyPr wrap="square" lIns="0" tIns="0" rIns="0" bIns="0" anchor="t">
             <a:spAutoFit/>
           </a:bodyPr>
           <a:lstStyle/>
@@ -11389,7 +11745,7 @@
           <a:noFill/>
         </p:spPr>
         <p:txBody>
-          <a:bodyPr wrap="square" lIns="0" rIns="0" tIns="0" bIns="0" anchor="t">
+          <a:bodyPr wrap="square" lIns="0" tIns="0" rIns="0" bIns="0" anchor="t">
             <a:spAutoFit/>
           </a:bodyPr>
           <a:lstStyle/>
@@ -11432,7 +11788,7 @@
           <a:noFill/>
         </p:spPr>
         <p:txBody>
-          <a:bodyPr wrap="square" lIns="0" rIns="0" tIns="0" bIns="0" anchor="t">
+          <a:bodyPr wrap="square" lIns="0" tIns="0" rIns="0" bIns="0" anchor="t">
             <a:spAutoFit/>
           </a:bodyPr>
           <a:lstStyle/>
@@ -11474,7 +11830,7 @@
           <a:noFill/>
         </p:spPr>
         <p:txBody>
-          <a:bodyPr wrap="square" lIns="0" rIns="0" tIns="0" bIns="0" anchor="t">
+          <a:bodyPr wrap="square" lIns="0" tIns="0" rIns="0" bIns="0" anchor="t">
             <a:spAutoFit/>
           </a:bodyPr>
           <a:lstStyle/>
@@ -11517,7 +11873,7 @@
           <a:noFill/>
         </p:spPr>
         <p:txBody>
-          <a:bodyPr wrap="square" lIns="0" rIns="0" tIns="0" bIns="0" anchor="t">
+          <a:bodyPr wrap="square" lIns="0" tIns="0" rIns="0" bIns="0" anchor="t">
             <a:spAutoFit/>
           </a:bodyPr>
           <a:lstStyle/>
@@ -11559,7 +11915,7 @@
           <a:noFill/>
         </p:spPr>
         <p:txBody>
-          <a:bodyPr wrap="square" lIns="0" rIns="0" tIns="0" bIns="0" anchor="t">
+          <a:bodyPr wrap="square" lIns="0" tIns="0" rIns="0" bIns="0" anchor="t">
             <a:spAutoFit/>
           </a:bodyPr>
           <a:lstStyle/>
@@ -11594,7 +11950,7 @@
 </file>
 
 <file path=ppt/slides/slide21.xml><?xml version="1.0" encoding="utf-8"?>
-<p:sld xmlns:a="http://schemas.openxmlformats.org/drawingml/2006/main" xmlns:p="http://schemas.openxmlformats.org/presentationml/2006/main" xmlns:r="http://schemas.openxmlformats.org/officeDocument/2006/relationships">
+<p:sld xmlns:a="http://schemas.openxmlformats.org/drawingml/2006/main" xmlns:r="http://schemas.openxmlformats.org/officeDocument/2006/relationships" xmlns:p="http://schemas.openxmlformats.org/presentationml/2006/main">
   <p:cSld>
     <p:spTree>
       <p:nvGrpSpPr>
@@ -11602,7 +11958,14 @@
         <p:cNvGrpSpPr/>
         <p:nvPr/>
       </p:nvGrpSpPr>
-      <p:grpSpPr/>
+      <p:grpSpPr>
+        <a:xfrm>
+          <a:off x="0" y="0"/>
+          <a:ext cx="0" cy="0"/>
+          <a:chOff x="0" y="0"/>
+          <a:chExt cx="0" cy="0"/>
+        </a:xfrm>
+      </p:grpSpPr>
       <p:pic>
         <p:nvPicPr>
           <p:cNvPr id="2" name="Picture 1" descr="tau_logo.png"/>
@@ -11612,7 +11975,7 @@
           <p:nvPr/>
         </p:nvPicPr>
         <p:blipFill>
-          <a:blip r:embed="rId2"/>
+          <a:blip r:embed="rId3"/>
           <a:stretch>
             <a:fillRect/>
           </a:stretch>
@@ -11644,7 +12007,7 @@
           <a:noFill/>
         </p:spPr>
         <p:txBody>
-          <a:bodyPr wrap="square" lIns="0" rIns="0" tIns="0" bIns="0" anchor="ctr">
+          <a:bodyPr wrap="square" lIns="0" tIns="0" rIns="0" bIns="0" anchor="ctr">
             <a:spAutoFit/>
           </a:bodyPr>
           <a:lstStyle/>
@@ -11678,7 +12041,7 @@
           <a:noFill/>
         </p:spPr>
         <p:txBody>
-          <a:bodyPr wrap="square" lIns="0" rIns="0" tIns="0" bIns="0">
+          <a:bodyPr wrap="square" lIns="0" tIns="0" rIns="0" bIns="0">
             <a:spAutoFit/>
           </a:bodyPr>
           <a:lstStyle/>
@@ -11712,7 +12075,7 @@
           <a:noFill/>
         </p:spPr>
         <p:txBody>
-          <a:bodyPr wrap="square" lIns="0" rIns="0" tIns="0" bIns="0">
+          <a:bodyPr wrap="square" lIns="0" tIns="0" rIns="0" bIns="0">
             <a:spAutoFit/>
           </a:bodyPr>
           <a:lstStyle/>
@@ -11739,7 +12102,7 @@
           <p:nvPr/>
         </p:nvPicPr>
         <p:blipFill>
-          <a:blip r:embed="rId3"/>
+          <a:blip r:embed="rId4"/>
           <a:stretch>
             <a:fillRect/>
           </a:stretch>
@@ -11795,6 +12158,7 @@
           <a:lstStyle/>
           <a:p>
             <a:pPr algn="ctr"/>
+            <a:endParaRPr/>
           </a:p>
         </p:txBody>
       </p:sp>
@@ -11815,7 +12179,7 @@
           <a:noFill/>
         </p:spPr>
         <p:txBody>
-          <a:bodyPr wrap="square" lIns="0" rIns="0" tIns="0" bIns="0" anchor="t">
+          <a:bodyPr wrap="square" lIns="0" tIns="0" rIns="0" bIns="0" anchor="t">
             <a:spAutoFit/>
           </a:bodyPr>
           <a:lstStyle/>
@@ -11857,7 +12221,7 @@
           <a:noFill/>
         </p:spPr>
         <p:txBody>
-          <a:bodyPr wrap="square" lIns="0" rIns="0" tIns="0" bIns="0" anchor="t">
+          <a:bodyPr wrap="square" lIns="0" tIns="0" rIns="0" bIns="0" anchor="t">
             <a:spAutoFit/>
           </a:bodyPr>
           <a:lstStyle/>
@@ -11899,7 +12263,7 @@
           <a:noFill/>
         </p:spPr>
         <p:txBody>
-          <a:bodyPr wrap="square" lIns="0" rIns="0" tIns="0" bIns="0" anchor="t">
+          <a:bodyPr wrap="square" lIns="0" tIns="0" rIns="0" bIns="0" anchor="t">
             <a:spAutoFit/>
           </a:bodyPr>
           <a:lstStyle/>
@@ -11941,7 +12305,7 @@
           <a:noFill/>
         </p:spPr>
         <p:txBody>
-          <a:bodyPr wrap="square" lIns="0" rIns="0" tIns="0" bIns="0" anchor="t">
+          <a:bodyPr wrap="square" lIns="0" tIns="0" rIns="0" bIns="0" anchor="t">
             <a:spAutoFit/>
           </a:bodyPr>
           <a:lstStyle/>
@@ -11983,7 +12347,7 @@
           <a:noFill/>
         </p:spPr>
         <p:txBody>
-          <a:bodyPr wrap="square" lIns="0" rIns="0" tIns="0" bIns="0" anchor="t">
+          <a:bodyPr wrap="square" lIns="0" tIns="0" rIns="0" bIns="0" anchor="t">
             <a:spAutoFit/>
           </a:bodyPr>
           <a:lstStyle/>
@@ -12025,7 +12389,7 @@
           <a:noFill/>
         </p:spPr>
         <p:txBody>
-          <a:bodyPr wrap="square" lIns="0" rIns="0" tIns="0" bIns="0" anchor="t">
+          <a:bodyPr wrap="square" lIns="0" tIns="0" rIns="0" bIns="0" anchor="t">
             <a:spAutoFit/>
           </a:bodyPr>
           <a:lstStyle/>
@@ -12059,7 +12423,7 @@
 </file>
 
 <file path=ppt/slides/slide22.xml><?xml version="1.0" encoding="utf-8"?>
-<p:sld xmlns:a="http://schemas.openxmlformats.org/drawingml/2006/main" xmlns:p="http://schemas.openxmlformats.org/presentationml/2006/main" xmlns:r="http://schemas.openxmlformats.org/officeDocument/2006/relationships">
+<p:sld xmlns:a="http://schemas.openxmlformats.org/drawingml/2006/main" xmlns:r="http://schemas.openxmlformats.org/officeDocument/2006/relationships" xmlns:p="http://schemas.openxmlformats.org/presentationml/2006/main">
   <p:cSld>
     <p:spTree>
       <p:nvGrpSpPr>
@@ -12067,7 +12431,14 @@
         <p:cNvGrpSpPr/>
         <p:nvPr/>
       </p:nvGrpSpPr>
-      <p:grpSpPr/>
+      <p:grpSpPr>
+        <a:xfrm>
+          <a:off x="0" y="0"/>
+          <a:ext cx="0" cy="0"/>
+          <a:chOff x="0" y="0"/>
+          <a:chExt cx="0" cy="0"/>
+        </a:xfrm>
+      </p:grpSpPr>
       <p:pic>
         <p:nvPicPr>
           <p:cNvPr id="2" name="Picture 1" descr="tau_logo.png"/>
@@ -12077,7 +12448,7 @@
           <p:nvPr/>
         </p:nvPicPr>
         <p:blipFill>
-          <a:blip r:embed="rId2"/>
+          <a:blip r:embed="rId3"/>
           <a:stretch>
             <a:fillRect/>
           </a:stretch>
@@ -12109,7 +12480,7 @@
           <a:noFill/>
         </p:spPr>
         <p:txBody>
-          <a:bodyPr wrap="square" lIns="0" rIns="0" tIns="0" bIns="0" anchor="ctr">
+          <a:bodyPr wrap="square" lIns="0" tIns="0" rIns="0" bIns="0" anchor="ctr">
             <a:spAutoFit/>
           </a:bodyPr>
           <a:lstStyle/>
@@ -12143,7 +12514,7 @@
           <a:noFill/>
         </p:spPr>
         <p:txBody>
-          <a:bodyPr wrap="square" lIns="0" rIns="0" tIns="0" bIns="0">
+          <a:bodyPr wrap="square" lIns="0" tIns="0" rIns="0" bIns="0">
             <a:spAutoFit/>
           </a:bodyPr>
           <a:lstStyle/>
@@ -12177,7 +12548,7 @@
           <a:noFill/>
         </p:spPr>
         <p:txBody>
-          <a:bodyPr wrap="square" lIns="0" rIns="0" tIns="0" bIns="0">
+          <a:bodyPr wrap="square" lIns="0" tIns="0" rIns="0" bIns="0">
             <a:spAutoFit/>
           </a:bodyPr>
           <a:lstStyle/>
@@ -12204,7 +12575,7 @@
           <p:nvPr/>
         </p:nvPicPr>
         <p:blipFill>
-          <a:blip r:embed="rId3"/>
+          <a:blip r:embed="rId4"/>
           <a:stretch>
             <a:fillRect/>
           </a:stretch>
@@ -12260,6 +12631,7 @@
           <a:lstStyle/>
           <a:p>
             <a:pPr algn="ctr"/>
+            <a:endParaRPr/>
           </a:p>
         </p:txBody>
       </p:sp>
@@ -12280,7 +12652,7 @@
           <a:noFill/>
         </p:spPr>
         <p:txBody>
-          <a:bodyPr wrap="square" lIns="0" rIns="0" tIns="0" bIns="0" anchor="t">
+          <a:bodyPr wrap="square" lIns="0" tIns="0" rIns="0" bIns="0" anchor="t">
             <a:spAutoFit/>
           </a:bodyPr>
           <a:lstStyle/>
@@ -12332,7 +12704,7 @@
 </file>
 
 <file path=ppt/slides/slide23.xml><?xml version="1.0" encoding="utf-8"?>
-<p:sld xmlns:a="http://schemas.openxmlformats.org/drawingml/2006/main" xmlns:p="http://schemas.openxmlformats.org/presentationml/2006/main" xmlns:r="http://schemas.openxmlformats.org/officeDocument/2006/relationships">
+<p:sld xmlns:a="http://schemas.openxmlformats.org/drawingml/2006/main" xmlns:r="http://schemas.openxmlformats.org/officeDocument/2006/relationships" xmlns:p="http://schemas.openxmlformats.org/presentationml/2006/main">
   <p:cSld>
     <p:spTree>
       <p:nvGrpSpPr>
@@ -12340,7 +12712,14 @@
         <p:cNvGrpSpPr/>
         <p:nvPr/>
       </p:nvGrpSpPr>
-      <p:grpSpPr/>
+      <p:grpSpPr>
+        <a:xfrm>
+          <a:off x="0" y="0"/>
+          <a:ext cx="0" cy="0"/>
+          <a:chOff x="0" y="0"/>
+          <a:chExt cx="0" cy="0"/>
+        </a:xfrm>
+      </p:grpSpPr>
       <p:pic>
         <p:nvPicPr>
           <p:cNvPr id="2" name="Picture 1" descr="tau_logo.png"/>
@@ -12350,7 +12729,7 @@
           <p:nvPr/>
         </p:nvPicPr>
         <p:blipFill>
-          <a:blip r:embed="rId2"/>
+          <a:blip r:embed="rId3"/>
           <a:stretch>
             <a:fillRect/>
           </a:stretch>
@@ -12382,7 +12761,7 @@
           <a:noFill/>
         </p:spPr>
         <p:txBody>
-          <a:bodyPr wrap="square" lIns="0" rIns="0" tIns="0" bIns="0" anchor="ctr">
+          <a:bodyPr wrap="square" lIns="0" tIns="0" rIns="0" bIns="0" anchor="ctr">
             <a:spAutoFit/>
           </a:bodyPr>
           <a:lstStyle/>
@@ -12416,7 +12795,7 @@
           <a:noFill/>
         </p:spPr>
         <p:txBody>
-          <a:bodyPr wrap="square" lIns="0" rIns="0" tIns="0" bIns="0">
+          <a:bodyPr wrap="square" lIns="0" tIns="0" rIns="0" bIns="0">
             <a:spAutoFit/>
           </a:bodyPr>
           <a:lstStyle/>
@@ -12450,7 +12829,7 @@
           <a:noFill/>
         </p:spPr>
         <p:txBody>
-          <a:bodyPr wrap="square" lIns="0" rIns="0" tIns="0" bIns="0">
+          <a:bodyPr wrap="square" lIns="0" tIns="0" rIns="0" bIns="0">
             <a:spAutoFit/>
           </a:bodyPr>
           <a:lstStyle/>
@@ -12477,7 +12856,7 @@
           <p:nvPr/>
         </p:nvPicPr>
         <p:blipFill>
-          <a:blip r:embed="rId3"/>
+          <a:blip r:embed="rId4"/>
           <a:stretch>
             <a:fillRect/>
           </a:stretch>
@@ -12533,6 +12912,7 @@
           <a:lstStyle/>
           <a:p>
             <a:pPr algn="ctr"/>
+            <a:endParaRPr/>
           </a:p>
         </p:txBody>
       </p:sp>
@@ -12553,7 +12933,7 @@
           <a:noFill/>
         </p:spPr>
         <p:txBody>
-          <a:bodyPr wrap="square" lIns="0" rIns="0" tIns="0" bIns="0" anchor="t">
+          <a:bodyPr wrap="square" lIns="0" tIns="0" rIns="0" bIns="0" anchor="t">
             <a:spAutoFit/>
           </a:bodyPr>
           <a:lstStyle/>
@@ -12595,7 +12975,7 @@
           <a:noFill/>
         </p:spPr>
         <p:txBody>
-          <a:bodyPr wrap="square" lIns="0" rIns="0" tIns="0" bIns="0" anchor="t">
+          <a:bodyPr wrap="square" lIns="0" tIns="0" rIns="0" bIns="0" anchor="t">
             <a:spAutoFit/>
           </a:bodyPr>
           <a:lstStyle/>
@@ -12638,7 +13018,7 @@
           <a:noFill/>
         </p:spPr>
         <p:txBody>
-          <a:bodyPr wrap="square" lIns="0" rIns="0" tIns="0" bIns="0" anchor="t">
+          <a:bodyPr wrap="square" lIns="0" tIns="0" rIns="0" bIns="0" anchor="t">
             <a:spAutoFit/>
           </a:bodyPr>
           <a:lstStyle/>
@@ -12680,7 +13060,7 @@
           <a:noFill/>
         </p:spPr>
         <p:txBody>
-          <a:bodyPr wrap="square" lIns="0" rIns="0" tIns="0" bIns="0" anchor="t">
+          <a:bodyPr wrap="square" lIns="0" tIns="0" rIns="0" bIns="0" anchor="t">
             <a:spAutoFit/>
           </a:bodyPr>
           <a:lstStyle/>
@@ -12723,7 +13103,7 @@
           <a:noFill/>
         </p:spPr>
         <p:txBody>
-          <a:bodyPr wrap="square" lIns="0" rIns="0" tIns="0" bIns="0" anchor="t">
+          <a:bodyPr wrap="square" lIns="0" tIns="0" rIns="0" bIns="0" anchor="t">
             <a:spAutoFit/>
           </a:bodyPr>
           <a:lstStyle/>
@@ -12765,7 +13145,7 @@
           <a:noFill/>
         </p:spPr>
         <p:txBody>
-          <a:bodyPr wrap="square" lIns="0" rIns="0" tIns="0" bIns="0" anchor="t">
+          <a:bodyPr wrap="square" lIns="0" tIns="0" rIns="0" bIns="0" anchor="t">
             <a:spAutoFit/>
           </a:bodyPr>
           <a:lstStyle/>
@@ -12800,7 +13180,7 @@
 </file>
 
 <file path=ppt/slides/slide24.xml><?xml version="1.0" encoding="utf-8"?>
-<p:sld xmlns:a="http://schemas.openxmlformats.org/drawingml/2006/main" xmlns:p="http://schemas.openxmlformats.org/presentationml/2006/main" xmlns:r="http://schemas.openxmlformats.org/officeDocument/2006/relationships">
+<p:sld xmlns:a="http://schemas.openxmlformats.org/drawingml/2006/main" xmlns:r="http://schemas.openxmlformats.org/officeDocument/2006/relationships" xmlns:p="http://schemas.openxmlformats.org/presentationml/2006/main">
   <p:cSld>
     <p:spTree>
       <p:nvGrpSpPr>
@@ -12808,7 +13188,14 @@
         <p:cNvGrpSpPr/>
         <p:nvPr/>
       </p:nvGrpSpPr>
-      <p:grpSpPr/>
+      <p:grpSpPr>
+        <a:xfrm>
+          <a:off x="0" y="0"/>
+          <a:ext cx="0" cy="0"/>
+          <a:chOff x="0" y="0"/>
+          <a:chExt cx="0" cy="0"/>
+        </a:xfrm>
+      </p:grpSpPr>
       <p:pic>
         <p:nvPicPr>
           <p:cNvPr id="2" name="Picture 1" descr="tau_logo.png"/>
@@ -12818,7 +13205,7 @@
           <p:nvPr/>
         </p:nvPicPr>
         <p:blipFill>
-          <a:blip r:embed="rId2"/>
+          <a:blip r:embed="rId3"/>
           <a:stretch>
             <a:fillRect/>
           </a:stretch>
@@ -12850,7 +13237,7 @@
           <a:noFill/>
         </p:spPr>
         <p:txBody>
-          <a:bodyPr wrap="square" lIns="0" rIns="0" tIns="0" bIns="0" anchor="ctr">
+          <a:bodyPr wrap="square" lIns="0" tIns="0" rIns="0" bIns="0" anchor="ctr">
             <a:spAutoFit/>
           </a:bodyPr>
           <a:lstStyle/>
@@ -12884,7 +13271,7 @@
           <a:noFill/>
         </p:spPr>
         <p:txBody>
-          <a:bodyPr wrap="square" lIns="0" rIns="0" tIns="0" bIns="0">
+          <a:bodyPr wrap="square" lIns="0" tIns="0" rIns="0" bIns="0">
             <a:spAutoFit/>
           </a:bodyPr>
           <a:lstStyle/>
@@ -12918,7 +13305,7 @@
           <a:noFill/>
         </p:spPr>
         <p:txBody>
-          <a:bodyPr wrap="square" lIns="0" rIns="0" tIns="0" bIns="0">
+          <a:bodyPr wrap="square" lIns="0" tIns="0" rIns="0" bIns="0">
             <a:spAutoFit/>
           </a:bodyPr>
           <a:lstStyle/>
@@ -12945,7 +13332,7 @@
           <p:nvPr/>
         </p:nvPicPr>
         <p:blipFill>
-          <a:blip r:embed="rId3"/>
+          <a:blip r:embed="rId4"/>
           <a:stretch>
             <a:fillRect/>
           </a:stretch>
@@ -13003,6 +13390,7 @@
           <a:lstStyle/>
           <a:p>
             <a:pPr algn="ctr"/>
+            <a:endParaRPr/>
           </a:p>
         </p:txBody>
       </p:sp>
@@ -13023,7 +13411,7 @@
           <a:noFill/>
         </p:spPr>
         <p:txBody>
-          <a:bodyPr wrap="square" lIns="0" rIns="0" tIns="0" bIns="0" anchor="t">
+          <a:bodyPr wrap="square" lIns="0" tIns="0" rIns="0" bIns="0" anchor="t">
             <a:spAutoFit/>
           </a:bodyPr>
           <a:lstStyle/>
@@ -13065,7 +13453,7 @@
           <a:noFill/>
         </p:spPr>
         <p:txBody>
-          <a:bodyPr wrap="square" lIns="0" rIns="0" tIns="0" bIns="0" anchor="t">
+          <a:bodyPr wrap="square" lIns="0" tIns="0" rIns="0" bIns="0" anchor="t">
             <a:spAutoFit/>
           </a:bodyPr>
           <a:lstStyle/>
@@ -13107,7 +13495,7 @@
           <a:noFill/>
         </p:spPr>
         <p:txBody>
-          <a:bodyPr wrap="square" lIns="0" rIns="0" tIns="0" bIns="0" anchor="t">
+          <a:bodyPr wrap="square" lIns="0" tIns="0" rIns="0" bIns="0" anchor="t">
             <a:spAutoFit/>
           </a:bodyPr>
           <a:lstStyle/>
@@ -13175,6 +13563,7 @@
           <a:lstStyle/>
           <a:p>
             <a:pPr algn="ctr"/>
+            <a:endParaRPr/>
           </a:p>
         </p:txBody>
       </p:sp>
@@ -13195,7 +13584,7 @@
           <a:noFill/>
         </p:spPr>
         <p:txBody>
-          <a:bodyPr wrap="square" lIns="0" rIns="0" tIns="0" bIns="0" anchor="t">
+          <a:bodyPr wrap="square" lIns="0" tIns="0" rIns="0" bIns="0" anchor="t">
             <a:spAutoFit/>
           </a:bodyPr>
           <a:lstStyle/>
@@ -13237,7 +13626,7 @@
           <a:noFill/>
         </p:spPr>
         <p:txBody>
-          <a:bodyPr wrap="square" lIns="0" rIns="0" tIns="0" bIns="0" anchor="t">
+          <a:bodyPr wrap="square" lIns="0" tIns="0" rIns="0" bIns="0" anchor="t">
             <a:spAutoFit/>
           </a:bodyPr>
           <a:lstStyle/>
@@ -13279,7 +13668,7 @@
           <a:noFill/>
         </p:spPr>
         <p:txBody>
-          <a:bodyPr wrap="square" lIns="0" rIns="0" tIns="0" bIns="0" anchor="t">
+          <a:bodyPr wrap="square" lIns="0" tIns="0" rIns="0" bIns="0" anchor="t">
             <a:spAutoFit/>
           </a:bodyPr>
           <a:lstStyle/>
@@ -13321,7 +13710,7 @@
           <a:noFill/>
         </p:spPr>
         <p:txBody>
-          <a:bodyPr wrap="square" lIns="0" rIns="0" tIns="0" bIns="0" anchor="t">
+          <a:bodyPr wrap="square" lIns="0" tIns="0" rIns="0" bIns="0" anchor="t">
             <a:spAutoFit/>
           </a:bodyPr>
           <a:lstStyle/>
@@ -13355,7 +13744,7 @@
 </file>
 
 <file path=ppt/slides/slide25.xml><?xml version="1.0" encoding="utf-8"?>
-<p:sld xmlns:a="http://schemas.openxmlformats.org/drawingml/2006/main" xmlns:p="http://schemas.openxmlformats.org/presentationml/2006/main" xmlns:r="http://schemas.openxmlformats.org/officeDocument/2006/relationships">
+<p:sld xmlns:a="http://schemas.openxmlformats.org/drawingml/2006/main" xmlns:r="http://schemas.openxmlformats.org/officeDocument/2006/relationships" xmlns:p="http://schemas.openxmlformats.org/presentationml/2006/main">
   <p:cSld>
     <p:spTree>
       <p:nvGrpSpPr>
@@ -13363,7 +13752,14 @@
         <p:cNvGrpSpPr/>
         <p:nvPr/>
       </p:nvGrpSpPr>
-      <p:grpSpPr/>
+      <p:grpSpPr>
+        <a:xfrm>
+          <a:off x="0" y="0"/>
+          <a:ext cx="0" cy="0"/>
+          <a:chOff x="0" y="0"/>
+          <a:chExt cx="0" cy="0"/>
+        </a:xfrm>
+      </p:grpSpPr>
       <p:pic>
         <p:nvPicPr>
           <p:cNvPr id="2" name="Picture 1" descr="tau_logo.png"/>
@@ -13373,7 +13769,7 @@
           <p:nvPr/>
         </p:nvPicPr>
         <p:blipFill>
-          <a:blip r:embed="rId2"/>
+          <a:blip r:embed="rId3"/>
           <a:stretch>
             <a:fillRect/>
           </a:stretch>
@@ -13405,7 +13801,7 @@
           <a:noFill/>
         </p:spPr>
         <p:txBody>
-          <a:bodyPr wrap="square" lIns="0" rIns="0" tIns="0" bIns="0" anchor="ctr">
+          <a:bodyPr wrap="square" lIns="0" tIns="0" rIns="0" bIns="0" anchor="ctr">
             <a:spAutoFit/>
           </a:bodyPr>
           <a:lstStyle/>
@@ -13439,7 +13835,7 @@
           <a:noFill/>
         </p:spPr>
         <p:txBody>
-          <a:bodyPr wrap="square" lIns="0" rIns="0" tIns="0" bIns="0">
+          <a:bodyPr wrap="square" lIns="0" tIns="0" rIns="0" bIns="0">
             <a:spAutoFit/>
           </a:bodyPr>
           <a:lstStyle/>
@@ -13473,7 +13869,7 @@
           <a:noFill/>
         </p:spPr>
         <p:txBody>
-          <a:bodyPr wrap="square" lIns="0" rIns="0" tIns="0" bIns="0">
+          <a:bodyPr wrap="square" lIns="0" tIns="0" rIns="0" bIns="0">
             <a:spAutoFit/>
           </a:bodyPr>
           <a:lstStyle/>
@@ -13500,7 +13896,7 @@
           <p:nvPr/>
         </p:nvPicPr>
         <p:blipFill>
-          <a:blip r:embed="rId3"/>
+          <a:blip r:embed="rId4"/>
           <a:stretch>
             <a:fillRect/>
           </a:stretch>
@@ -13556,6 +13952,7 @@
           <a:lstStyle/>
           <a:p>
             <a:pPr algn="ctr"/>
+            <a:endParaRPr/>
           </a:p>
         </p:txBody>
       </p:sp>
@@ -13576,7 +13973,7 @@
           <a:noFill/>
         </p:spPr>
         <p:txBody>
-          <a:bodyPr wrap="square" lIns="0" rIns="0" tIns="0" bIns="0" anchor="t">
+          <a:bodyPr wrap="square" lIns="0" tIns="0" rIns="0" bIns="0" anchor="t">
             <a:spAutoFit/>
           </a:bodyPr>
           <a:lstStyle/>
@@ -13618,7 +14015,7 @@
           <a:noFill/>
         </p:spPr>
         <p:txBody>
-          <a:bodyPr wrap="square" lIns="0" rIns="0" tIns="0" bIns="0" anchor="t">
+          <a:bodyPr wrap="square" lIns="0" tIns="0" rIns="0" bIns="0" anchor="t">
             <a:spAutoFit/>
           </a:bodyPr>
           <a:lstStyle/>
@@ -13632,13 +14029,31 @@
               </a:spcAft>
             </a:pPr>
             <a:r>
-              <a:rPr sz="1400" b="0">
+              <a:rPr sz="1400" b="0" dirty="0">
                 <a:solidFill>
                   <a:srgbClr val="111418"/>
                 </a:solidFill>
                 <a:latin typeface="Calibri"/>
               </a:rPr>
-              <a:t>256 pixels → 16 hidden neurons → 10 scores → softmax → the digit.</a:t>
+              <a:t>256 pixels → 16 hidden neurons → 10 scores → </a:t>
+            </a:r>
+            <a:r>
+              <a:rPr sz="1400" b="0" dirty="0" err="1">
+                <a:solidFill>
+                  <a:srgbClr val="111418"/>
+                </a:solidFill>
+                <a:latin typeface="Calibri"/>
+              </a:rPr>
+              <a:t>softmax</a:t>
+            </a:r>
+            <a:r>
+              <a:rPr sz="1400" b="0" dirty="0">
+                <a:solidFill>
+                  <a:srgbClr val="111418"/>
+                </a:solidFill>
+                <a:latin typeface="Calibri"/>
+              </a:rPr>
+              <a:t> → the digit.</a:t>
             </a:r>
           </a:p>
         </p:txBody>
@@ -13652,7 +14067,7 @@
           <p:nvPr/>
         </p:nvPicPr>
         <p:blipFill>
-          <a:blip r:embed="rId4"/>
+          <a:blip r:embed="rId5"/>
           <a:stretch>
             <a:fillRect/>
           </a:stretch>
@@ -13684,7 +14099,7 @@
           <a:noFill/>
         </p:spPr>
         <p:txBody>
-          <a:bodyPr wrap="square" lIns="0" rIns="0" tIns="0" bIns="0" anchor="t">
+          <a:bodyPr wrap="square" lIns="0" tIns="0" rIns="0" bIns="0" anchor="t">
             <a:spAutoFit/>
           </a:bodyPr>
           <a:lstStyle/>
@@ -13698,7 +14113,7 @@
               </a:spcAft>
             </a:pPr>
             <a:r>
-              <a:rPr sz="1400" b="1">
+              <a:rPr sz="1400" b="1" dirty="0">
                 <a:solidFill>
                   <a:srgbClr val="E05D07"/>
                 </a:solidFill>
@@ -13707,7 +14122,7 @@
               <a:t>15× fewer clock cycles</a:t>
             </a:r>
             <a:r>
-              <a:rPr sz="1400" b="0">
+              <a:rPr sz="1400" b="0" dirty="0">
                 <a:solidFill>
                   <a:srgbClr val="111418"/>
                 </a:solidFill>
@@ -13727,7 +14142,7 @@
 </file>
 
 <file path=ppt/slides/slide26.xml><?xml version="1.0" encoding="utf-8"?>
-<p:sld xmlns:a="http://schemas.openxmlformats.org/drawingml/2006/main" xmlns:p="http://schemas.openxmlformats.org/presentationml/2006/main" xmlns:r="http://schemas.openxmlformats.org/officeDocument/2006/relationships">
+<p:sld xmlns:a="http://schemas.openxmlformats.org/drawingml/2006/main" xmlns:r="http://schemas.openxmlformats.org/officeDocument/2006/relationships" xmlns:p="http://schemas.openxmlformats.org/presentationml/2006/main">
   <p:cSld>
     <p:spTree>
       <p:nvGrpSpPr>
@@ -13735,7 +14150,14 @@
         <p:cNvGrpSpPr/>
         <p:nvPr/>
       </p:nvGrpSpPr>
-      <p:grpSpPr/>
+      <p:grpSpPr>
+        <a:xfrm>
+          <a:off x="0" y="0"/>
+          <a:ext cx="0" cy="0"/>
+          <a:chOff x="0" y="0"/>
+          <a:chExt cx="0" cy="0"/>
+        </a:xfrm>
+      </p:grpSpPr>
       <p:pic>
         <p:nvPicPr>
           <p:cNvPr id="2" name="Picture 1" descr="tau_logo.png"/>
@@ -13745,7 +14167,7 @@
           <p:nvPr/>
         </p:nvPicPr>
         <p:blipFill>
-          <a:blip r:embed="rId2"/>
+          <a:blip r:embed="rId3"/>
           <a:stretch>
             <a:fillRect/>
           </a:stretch>
@@ -13777,7 +14199,7 @@
           <a:noFill/>
         </p:spPr>
         <p:txBody>
-          <a:bodyPr wrap="square" lIns="0" rIns="0" tIns="0" bIns="0" anchor="ctr">
+          <a:bodyPr wrap="square" lIns="0" tIns="0" rIns="0" bIns="0" anchor="ctr">
             <a:spAutoFit/>
           </a:bodyPr>
           <a:lstStyle/>
@@ -13811,7 +14233,7 @@
           <a:noFill/>
         </p:spPr>
         <p:txBody>
-          <a:bodyPr wrap="square" lIns="0" rIns="0" tIns="0" bIns="0">
+          <a:bodyPr wrap="square" lIns="0" tIns="0" rIns="0" bIns="0">
             <a:spAutoFit/>
           </a:bodyPr>
           <a:lstStyle/>
@@ -13845,7 +14267,7 @@
           <a:noFill/>
         </p:spPr>
         <p:txBody>
-          <a:bodyPr wrap="square" lIns="0" rIns="0" tIns="0" bIns="0">
+          <a:bodyPr wrap="square" lIns="0" tIns="0" rIns="0" bIns="0">
             <a:spAutoFit/>
           </a:bodyPr>
           <a:lstStyle/>
@@ -13904,6 +14326,7 @@
           <a:lstStyle/>
           <a:p>
             <a:pPr algn="ctr"/>
+            <a:endParaRPr/>
           </a:p>
         </p:txBody>
       </p:sp>
@@ -13924,7 +14347,7 @@
           <a:noFill/>
         </p:spPr>
         <p:txBody>
-          <a:bodyPr wrap="square" lIns="0" rIns="0" tIns="0" bIns="0" anchor="t">
+          <a:bodyPr wrap="square" lIns="0" tIns="0" rIns="0" bIns="0" anchor="t">
             <a:spAutoFit/>
           </a:bodyPr>
           <a:lstStyle/>
@@ -13966,7 +14389,7 @@
           <a:noFill/>
         </p:spPr>
         <p:txBody>
-          <a:bodyPr wrap="square" lIns="0" rIns="0" tIns="0" bIns="0" anchor="t">
+          <a:bodyPr wrap="square" lIns="0" tIns="0" rIns="0" bIns="0" anchor="t">
             <a:spAutoFit/>
           </a:bodyPr>
           <a:lstStyle/>
@@ -14008,7 +14431,7 @@
           <a:noFill/>
         </p:spPr>
         <p:txBody>
-          <a:bodyPr wrap="square" lIns="0" rIns="0" tIns="0" bIns="0" anchor="t">
+          <a:bodyPr wrap="square" lIns="0" tIns="0" rIns="0" bIns="0" anchor="t">
             <a:spAutoFit/>
           </a:bodyPr>
           <a:lstStyle/>
@@ -14050,7 +14473,7 @@
           <a:noFill/>
         </p:spPr>
         <p:txBody>
-          <a:bodyPr wrap="square" lIns="0" rIns="0" tIns="0" bIns="0" anchor="t">
+          <a:bodyPr wrap="square" lIns="0" tIns="0" rIns="0" bIns="0" anchor="t">
             <a:spAutoFit/>
           </a:bodyPr>
           <a:lstStyle/>
@@ -14116,6 +14539,7 @@
           <a:lstStyle/>
           <a:p>
             <a:pPr algn="ctr"/>
+            <a:endParaRPr/>
           </a:p>
         </p:txBody>
       </p:sp>
@@ -14136,7 +14560,7 @@
           <a:noFill/>
         </p:spPr>
         <p:txBody>
-          <a:bodyPr wrap="square" lIns="0" rIns="0" tIns="0" bIns="0" anchor="t">
+          <a:bodyPr wrap="square" lIns="0" tIns="0" rIns="0" bIns="0" anchor="t">
             <a:spAutoFit/>
           </a:bodyPr>
           <a:lstStyle/>
@@ -14150,7 +14574,7 @@
               </a:spcAft>
             </a:pPr>
             <a:r>
-              <a:rPr sz="1600" b="1">
+              <a:rPr sz="1600" b="1" dirty="0">
                 <a:solidFill>
                   <a:srgbClr val="111418"/>
                 </a:solidFill>
@@ -14178,7 +14602,7 @@
           <a:noFill/>
         </p:spPr>
         <p:txBody>
-          <a:bodyPr wrap="square" lIns="0" rIns="0" tIns="0" bIns="0" anchor="t">
+          <a:bodyPr wrap="square" lIns="0" tIns="0" rIns="0" bIns="0" anchor="t">
             <a:spAutoFit/>
           </a:bodyPr>
           <a:lstStyle/>
@@ -14192,7 +14616,7 @@
               </a:spcAft>
             </a:pPr>
             <a:r>
-              <a:rPr sz="1150" b="0">
+              <a:rPr sz="1150" b="0" dirty="0">
                 <a:solidFill>
                   <a:srgbClr val="6B7280"/>
                 </a:solidFill>
@@ -14220,7 +14644,7 @@
           <a:noFill/>
         </p:spPr>
         <p:txBody>
-          <a:bodyPr wrap="square" lIns="0" rIns="0" tIns="0" bIns="0" anchor="t">
+          <a:bodyPr wrap="square" lIns="0" tIns="0" rIns="0" bIns="0" anchor="t">
             <a:spAutoFit/>
           </a:bodyPr>
           <a:lstStyle/>
@@ -14263,7 +14687,7 @@
           <a:noFill/>
         </p:spPr>
         <p:txBody>
-          <a:bodyPr wrap="square" lIns="0" rIns="0" tIns="0" bIns="0" anchor="t">
+          <a:bodyPr wrap="square" lIns="0" tIns="0" rIns="0" bIns="0" anchor="t">
             <a:spAutoFit/>
           </a:bodyPr>
           <a:lstStyle/>
@@ -14329,6 +14753,7 @@
           <a:lstStyle/>
           <a:p>
             <a:pPr algn="ctr"/>
+            <a:endParaRPr/>
           </a:p>
         </p:txBody>
       </p:sp>
@@ -14349,7 +14774,7 @@
           <a:noFill/>
         </p:spPr>
         <p:txBody>
-          <a:bodyPr wrap="square" lIns="0" rIns="0" tIns="0" bIns="0" anchor="t">
+          <a:bodyPr wrap="square" lIns="0" tIns="0" rIns="0" bIns="0" anchor="t">
             <a:spAutoFit/>
           </a:bodyPr>
           <a:lstStyle/>
@@ -14391,7 +14816,7 @@
           <a:noFill/>
         </p:spPr>
         <p:txBody>
-          <a:bodyPr wrap="square" lIns="0" rIns="0" tIns="0" bIns="0" anchor="t">
+          <a:bodyPr wrap="square" lIns="0" tIns="0" rIns="0" bIns="0" anchor="t">
             <a:spAutoFit/>
           </a:bodyPr>
           <a:lstStyle/>
@@ -14433,7 +14858,7 @@
           <a:noFill/>
         </p:spPr>
         <p:txBody>
-          <a:bodyPr wrap="square" lIns="0" rIns="0" tIns="0" bIns="0" anchor="t">
+          <a:bodyPr wrap="square" lIns="0" tIns="0" rIns="0" bIns="0" anchor="t">
             <a:spAutoFit/>
           </a:bodyPr>
           <a:lstStyle/>
@@ -14476,7 +14901,7 @@
           <a:noFill/>
         </p:spPr>
         <p:txBody>
-          <a:bodyPr wrap="square" lIns="0" rIns="0" tIns="0" bIns="0" anchor="t">
+          <a:bodyPr wrap="square" lIns="0" tIns="0" rIns="0" bIns="0" anchor="t">
             <a:spAutoFit/>
           </a:bodyPr>
           <a:lstStyle/>
@@ -14542,6 +14967,7 @@
           <a:lstStyle/>
           <a:p>
             <a:pPr algn="ctr"/>
+            <a:endParaRPr/>
           </a:p>
         </p:txBody>
       </p:sp>
@@ -14562,7 +14988,7 @@
           <a:noFill/>
         </p:spPr>
         <p:txBody>
-          <a:bodyPr wrap="square" lIns="0" rIns="0" tIns="0" bIns="0" anchor="t">
+          <a:bodyPr wrap="square" lIns="0" tIns="0" rIns="0" bIns="0" anchor="t">
             <a:spAutoFit/>
           </a:bodyPr>
           <a:lstStyle/>
@@ -14596,7 +15022,7 @@
 </file>
 
 <file path=ppt/slides/slide27.xml><?xml version="1.0" encoding="utf-8"?>
-<p:sld xmlns:a="http://schemas.openxmlformats.org/drawingml/2006/main" xmlns:p="http://schemas.openxmlformats.org/presentationml/2006/main" xmlns:r="http://schemas.openxmlformats.org/officeDocument/2006/relationships">
+<p:sld xmlns:a="http://schemas.openxmlformats.org/drawingml/2006/main" xmlns:r="http://schemas.openxmlformats.org/officeDocument/2006/relationships" xmlns:p="http://schemas.openxmlformats.org/presentationml/2006/main">
   <p:cSld>
     <p:spTree>
       <p:nvGrpSpPr>
@@ -14604,7 +15030,14 @@
         <p:cNvGrpSpPr/>
         <p:nvPr/>
       </p:nvGrpSpPr>
-      <p:grpSpPr/>
+      <p:grpSpPr>
+        <a:xfrm>
+          <a:off x="0" y="0"/>
+          <a:ext cx="0" cy="0"/>
+          <a:chOff x="0" y="0"/>
+          <a:chExt cx="0" cy="0"/>
+        </a:xfrm>
+      </p:grpSpPr>
       <p:pic>
         <p:nvPicPr>
           <p:cNvPr id="2" name="Picture 1" descr="tau_logo.png"/>
@@ -14614,7 +15047,7 @@
           <p:nvPr/>
         </p:nvPicPr>
         <p:blipFill>
-          <a:blip r:embed="rId2"/>
+          <a:blip r:embed="rId3"/>
           <a:stretch>
             <a:fillRect/>
           </a:stretch>
@@ -14646,7 +15079,7 @@
           <a:noFill/>
         </p:spPr>
         <p:txBody>
-          <a:bodyPr wrap="square" lIns="0" rIns="0" tIns="0" bIns="0" anchor="t">
+          <a:bodyPr wrap="square" lIns="0" tIns="0" rIns="0" bIns="0" anchor="t">
             <a:spAutoFit/>
           </a:bodyPr>
           <a:lstStyle/>
@@ -14712,6 +15145,7 @@
           <a:lstStyle/>
           <a:p>
             <a:pPr algn="ctr"/>
+            <a:endParaRPr/>
           </a:p>
         </p:txBody>
       </p:sp>
@@ -14732,7 +15166,7 @@
           <a:noFill/>
         </p:spPr>
         <p:txBody>
-          <a:bodyPr wrap="square" lIns="0" rIns="0" tIns="0" bIns="0" anchor="t">
+          <a:bodyPr wrap="square" lIns="0" tIns="0" rIns="0" bIns="0" anchor="t">
             <a:spAutoFit/>
           </a:bodyPr>
           <a:lstStyle/>
@@ -14785,7 +15219,7 @@
 </file>
 
 <file path=ppt/slides/slide3.xml><?xml version="1.0" encoding="utf-8"?>
-<p:sld xmlns:a="http://schemas.openxmlformats.org/drawingml/2006/main" xmlns:p="http://schemas.openxmlformats.org/presentationml/2006/main" xmlns:r="http://schemas.openxmlformats.org/officeDocument/2006/relationships">
+<p:sld xmlns:a="http://schemas.openxmlformats.org/drawingml/2006/main" xmlns:r="http://schemas.openxmlformats.org/officeDocument/2006/relationships" xmlns:p="http://schemas.openxmlformats.org/presentationml/2006/main">
   <p:cSld>
     <p:spTree>
       <p:nvGrpSpPr>
@@ -14793,137 +15227,17 @@
         <p:cNvGrpSpPr/>
         <p:nvPr/>
       </p:nvGrpSpPr>
-      <p:grpSpPr/>
+      <p:grpSpPr>
+        <a:xfrm>
+          <a:off x="0" y="0"/>
+          <a:ext cx="0" cy="0"/>
+          <a:chOff x="0" y="0"/>
+          <a:chExt cx="0" cy="0"/>
+        </a:xfrm>
+      </p:grpSpPr>
       <p:pic>
         <p:nvPicPr>
           <p:cNvPr id="2" name="Picture 1" descr="tau_logo.png"/>
-          <p:cNvPicPr>
-            <a:picLocks noChangeAspect="1"/>
-          </p:cNvPicPr>
-          <p:nvPr/>
-        </p:nvPicPr>
-        <p:blipFill>
-          <a:blip r:embed="rId2"/>
-          <a:stretch>
-            <a:fillRect/>
-          </a:stretch>
-        </p:blipFill>
-        <p:spPr>
-          <a:xfrm>
-            <a:off x="265176" y="274320"/>
-            <a:ext cx="2926080" cy="667512"/>
-          </a:xfrm>
-          <a:prstGeom prst="rect">
-            <a:avLst/>
-          </a:prstGeom>
-        </p:spPr>
-      </p:pic>
-      <p:sp>
-        <p:nvSpPr>
-          <p:cNvPr id="3" name="TextBox 2"/>
-          <p:cNvSpPr txBox="1"/>
-          <p:nvPr/>
-        </p:nvSpPr>
-        <p:spPr>
-          <a:xfrm>
-            <a:off x="3282696" y="356616"/>
-            <a:ext cx="6702552" cy="576072"/>
-          </a:xfrm>
-          <a:prstGeom prst="rect">
-            <a:avLst/>
-          </a:prstGeom>
-          <a:noFill/>
-        </p:spPr>
-        <p:txBody>
-          <a:bodyPr wrap="square" lIns="0" rIns="0" tIns="0" bIns="0" anchor="ctr">
-            <a:spAutoFit/>
-          </a:bodyPr>
-          <a:lstStyle/>
-          <a:p>
-            <a:r>
-              <a:rPr sz="2300" b="1">
-                <a:solidFill>
-                  <a:srgbClr val="111418"/>
-                </a:solidFill>
-                <a:latin typeface="Calibri"/>
-              </a:rPr>
-              <a:t>Where we started: the DLX processor</a:t>
-            </a:r>
-          </a:p>
-        </p:txBody>
-      </p:sp>
-      <p:sp>
-        <p:nvSpPr>
-          <p:cNvPr id="4" name="TextBox 3"/>
-          <p:cNvSpPr txBox="1"/>
-          <p:nvPr/>
-        </p:nvSpPr>
-        <p:spPr>
-          <a:xfrm>
-            <a:off x="841248" y="1042415"/>
-            <a:ext cx="7315200" cy="256032"/>
-          </a:xfrm>
-          <a:prstGeom prst="rect">
-            <a:avLst/>
-          </a:prstGeom>
-          <a:noFill/>
-        </p:spPr>
-        <p:txBody>
-          <a:bodyPr wrap="square" lIns="0" rIns="0" tIns="0" bIns="0">
-            <a:spAutoFit/>
-          </a:bodyPr>
-          <a:lstStyle/>
-          <a:p>
-            <a:r>
-              <a:rPr sz="1050" b="1">
-                <a:solidFill>
-                  <a:srgbClr val="E05D07"/>
-                </a:solidFill>
-                <a:latin typeface="Calibri"/>
-              </a:rPr>
-              <a:t>BASELINE</a:t>
-            </a:r>
-          </a:p>
-        </p:txBody>
-      </p:sp>
-      <p:sp>
-        <p:nvSpPr>
-          <p:cNvPr id="5" name="TextBox 4"/>
-          <p:cNvSpPr txBox="1"/>
-          <p:nvPr/>
-        </p:nvSpPr>
-        <p:spPr>
-          <a:xfrm>
-            <a:off x="8613648" y="6355080"/>
-            <a:ext cx="2743200" cy="365760"/>
-          </a:xfrm>
-          <a:prstGeom prst="rect">
-            <a:avLst/>
-          </a:prstGeom>
-          <a:noFill/>
-        </p:spPr>
-        <p:txBody>
-          <a:bodyPr wrap="square" lIns="0" rIns="0" tIns="0" bIns="0">
-            <a:spAutoFit/>
-          </a:bodyPr>
-          <a:lstStyle/>
-          <a:p>
-            <a:pPr algn="r"/>
-            <a:r>
-              <a:rPr sz="1000">
-                <a:solidFill>
-                  <a:srgbClr val="9CA3AF"/>
-                </a:solidFill>
-                <a:latin typeface="Calibri"/>
-              </a:rPr>
-              <a:t>3</a:t>
-            </a:r>
-          </a:p>
-        </p:txBody>
-      </p:sp>
-      <p:pic>
-        <p:nvPicPr>
-          <p:cNvPr id="6" name="Picture 5" descr="baseline_dlx_all.png"/>
           <p:cNvPicPr>
             <a:picLocks noChangeAspect="1"/>
           </p:cNvPicPr>
@@ -14937,6 +15251,133 @@
         </p:blipFill>
         <p:spPr>
           <a:xfrm>
+            <a:off x="265176" y="274320"/>
+            <a:ext cx="2926080" cy="667512"/>
+          </a:xfrm>
+          <a:prstGeom prst="rect">
+            <a:avLst/>
+          </a:prstGeom>
+        </p:spPr>
+      </p:pic>
+      <p:sp>
+        <p:nvSpPr>
+          <p:cNvPr id="3" name="TextBox 2"/>
+          <p:cNvSpPr txBox="1"/>
+          <p:nvPr/>
+        </p:nvSpPr>
+        <p:spPr>
+          <a:xfrm>
+            <a:off x="3282696" y="356616"/>
+            <a:ext cx="6702552" cy="576072"/>
+          </a:xfrm>
+          <a:prstGeom prst="rect">
+            <a:avLst/>
+          </a:prstGeom>
+          <a:noFill/>
+        </p:spPr>
+        <p:txBody>
+          <a:bodyPr wrap="square" lIns="0" tIns="0" rIns="0" bIns="0" anchor="ctr">
+            <a:spAutoFit/>
+          </a:bodyPr>
+          <a:lstStyle/>
+          <a:p>
+            <a:r>
+              <a:rPr sz="2300" b="1" dirty="0">
+                <a:solidFill>
+                  <a:srgbClr val="111418"/>
+                </a:solidFill>
+                <a:latin typeface="Calibri"/>
+              </a:rPr>
+              <a:t>Where we started: the DLX processor</a:t>
+            </a:r>
+          </a:p>
+        </p:txBody>
+      </p:sp>
+      <p:sp>
+        <p:nvSpPr>
+          <p:cNvPr id="4" name="TextBox 3"/>
+          <p:cNvSpPr txBox="1"/>
+          <p:nvPr/>
+        </p:nvSpPr>
+        <p:spPr>
+          <a:xfrm>
+            <a:off x="841248" y="1042415"/>
+            <a:ext cx="7315200" cy="256032"/>
+          </a:xfrm>
+          <a:prstGeom prst="rect">
+            <a:avLst/>
+          </a:prstGeom>
+          <a:noFill/>
+        </p:spPr>
+        <p:txBody>
+          <a:bodyPr wrap="square" lIns="0" tIns="0" rIns="0" bIns="0">
+            <a:spAutoFit/>
+          </a:bodyPr>
+          <a:lstStyle/>
+          <a:p>
+            <a:r>
+              <a:rPr sz="1050" b="1">
+                <a:solidFill>
+                  <a:srgbClr val="E05D07"/>
+                </a:solidFill>
+                <a:latin typeface="Calibri"/>
+              </a:rPr>
+              <a:t>BASELINE</a:t>
+            </a:r>
+          </a:p>
+        </p:txBody>
+      </p:sp>
+      <p:sp>
+        <p:nvSpPr>
+          <p:cNvPr id="5" name="TextBox 4"/>
+          <p:cNvSpPr txBox="1"/>
+          <p:nvPr/>
+        </p:nvSpPr>
+        <p:spPr>
+          <a:xfrm>
+            <a:off x="8613648" y="6355080"/>
+            <a:ext cx="2743200" cy="365760"/>
+          </a:xfrm>
+          <a:prstGeom prst="rect">
+            <a:avLst/>
+          </a:prstGeom>
+          <a:noFill/>
+        </p:spPr>
+        <p:txBody>
+          <a:bodyPr wrap="square" lIns="0" tIns="0" rIns="0" bIns="0">
+            <a:spAutoFit/>
+          </a:bodyPr>
+          <a:lstStyle/>
+          <a:p>
+            <a:pPr algn="r"/>
+            <a:r>
+              <a:rPr sz="1000">
+                <a:solidFill>
+                  <a:srgbClr val="9CA3AF"/>
+                </a:solidFill>
+                <a:latin typeface="Calibri"/>
+              </a:rPr>
+              <a:t>3</a:t>
+            </a:r>
+          </a:p>
+        </p:txBody>
+      </p:sp>
+      <p:pic>
+        <p:nvPicPr>
+          <p:cNvPr id="6" name="Picture 5" descr="baseline_dlx_all.png"/>
+          <p:cNvPicPr>
+            <a:picLocks noChangeAspect="1"/>
+          </p:cNvPicPr>
+          <p:nvPr/>
+        </p:nvPicPr>
+        <p:blipFill>
+          <a:blip r:embed="rId4"/>
+          <a:stretch>
+            <a:fillRect/>
+          </a:stretch>
+        </p:blipFill>
+        <p:spPr>
+          <a:xfrm>
             <a:off x="841248" y="1654454"/>
             <a:ext cx="10515600" cy="3631387"/>
           </a:xfrm>
@@ -14962,7 +15403,7 @@
           <a:noFill/>
         </p:spPr>
         <p:txBody>
-          <a:bodyPr wrap="square" lIns="0" rIns="0" tIns="0" bIns="0" anchor="t">
+          <a:bodyPr wrap="square" lIns="0" tIns="0" rIns="0" bIns="0" anchor="t">
             <a:spAutoFit/>
           </a:bodyPr>
           <a:lstStyle/>
@@ -15033,7 +15474,7 @@
 </file>
 
 <file path=ppt/slides/slide4.xml><?xml version="1.0" encoding="utf-8"?>
-<p:sld xmlns:a="http://schemas.openxmlformats.org/drawingml/2006/main" xmlns:p="http://schemas.openxmlformats.org/presentationml/2006/main" xmlns:r="http://schemas.openxmlformats.org/officeDocument/2006/relationships">
+<p:sld xmlns:a="http://schemas.openxmlformats.org/drawingml/2006/main" xmlns:r="http://schemas.openxmlformats.org/officeDocument/2006/relationships" xmlns:p="http://schemas.openxmlformats.org/presentationml/2006/main">
   <p:cSld>
     <p:spTree>
       <p:nvGrpSpPr>
@@ -15041,7 +15482,14 @@
         <p:cNvGrpSpPr/>
         <p:nvPr/>
       </p:nvGrpSpPr>
-      <p:grpSpPr/>
+      <p:grpSpPr>
+        <a:xfrm>
+          <a:off x="0" y="0"/>
+          <a:ext cx="0" cy="0"/>
+          <a:chOff x="0" y="0"/>
+          <a:chExt cx="0" cy="0"/>
+        </a:xfrm>
+      </p:grpSpPr>
       <p:pic>
         <p:nvPicPr>
           <p:cNvPr id="2" name="Picture 1" descr="tau_logo.png"/>
@@ -15051,7 +15499,7 @@
           <p:nvPr/>
         </p:nvPicPr>
         <p:blipFill>
-          <a:blip r:embed="rId2"/>
+          <a:blip r:embed="rId3"/>
           <a:stretch>
             <a:fillRect/>
           </a:stretch>
@@ -15083,13 +15531,13 @@
           <a:noFill/>
         </p:spPr>
         <p:txBody>
-          <a:bodyPr wrap="square" lIns="0" rIns="0" tIns="0" bIns="0" anchor="ctr">
-            <a:spAutoFit/>
-          </a:bodyPr>
-          <a:lstStyle/>
-          <a:p>
-            <a:r>
-              <a:rPr sz="2300" b="1">
+          <a:bodyPr wrap="square" lIns="0" tIns="0" rIns="0" bIns="0" anchor="ctr">
+            <a:spAutoFit/>
+          </a:bodyPr>
+          <a:lstStyle/>
+          <a:p>
+            <a:r>
+              <a:rPr sz="2300" b="1" dirty="0">
                 <a:solidFill>
                   <a:srgbClr val="111418"/>
                 </a:solidFill>
@@ -15117,7 +15565,7 @@
           <a:noFill/>
         </p:spPr>
         <p:txBody>
-          <a:bodyPr wrap="square" lIns="0" rIns="0" tIns="0" bIns="0">
+          <a:bodyPr wrap="square" lIns="0" tIns="0" rIns="0" bIns="0">
             <a:spAutoFit/>
           </a:bodyPr>
           <a:lstStyle/>
@@ -15151,7 +15599,7 @@
           <a:noFill/>
         </p:spPr>
         <p:txBody>
-          <a:bodyPr wrap="square" lIns="0" rIns="0" tIns="0" bIns="0">
+          <a:bodyPr wrap="square" lIns="0" tIns="0" rIns="0" bIns="0">
             <a:spAutoFit/>
           </a:bodyPr>
           <a:lstStyle/>
@@ -15178,7 +15626,7 @@
           <p:nvPr/>
         </p:nvPicPr>
         <p:blipFill>
-          <a:blip r:embed="rId3"/>
+          <a:blip r:embed="rId4"/>
           <a:stretch>
             <a:fillRect/>
           </a:stretch>
@@ -15234,6 +15682,7 @@
           <a:lstStyle/>
           <a:p>
             <a:pPr algn="ctr"/>
+            <a:endParaRPr/>
           </a:p>
         </p:txBody>
       </p:sp>
@@ -15254,7 +15703,7 @@
           <a:noFill/>
         </p:spPr>
         <p:txBody>
-          <a:bodyPr wrap="square" lIns="0" rIns="0" tIns="0" bIns="0" anchor="t">
+          <a:bodyPr wrap="square" lIns="0" tIns="0" rIns="0" bIns="0" anchor="t">
             <a:spAutoFit/>
           </a:bodyPr>
           <a:lstStyle/>
@@ -15296,7 +15745,7 @@
           <a:noFill/>
         </p:spPr>
         <p:txBody>
-          <a:bodyPr wrap="square" lIns="0" rIns="0" tIns="0" bIns="0" anchor="t">
+          <a:bodyPr wrap="square" lIns="0" tIns="0" rIns="0" bIns="0" anchor="t">
             <a:spAutoFit/>
           </a:bodyPr>
           <a:lstStyle/>
@@ -15338,7 +15787,7 @@
           <a:noFill/>
         </p:spPr>
         <p:txBody>
-          <a:bodyPr wrap="square" lIns="0" rIns="0" tIns="0" bIns="0" anchor="t">
+          <a:bodyPr wrap="square" lIns="0" tIns="0" rIns="0" bIns="0" anchor="t">
             <a:spAutoFit/>
           </a:bodyPr>
           <a:lstStyle/>
@@ -15381,7 +15830,7 @@
           <a:noFill/>
         </p:spPr>
         <p:txBody>
-          <a:bodyPr wrap="square" lIns="0" rIns="0" tIns="0" bIns="0" anchor="t">
+          <a:bodyPr wrap="square" lIns="0" tIns="0" rIns="0" bIns="0" anchor="t">
             <a:spAutoFit/>
           </a:bodyPr>
           <a:lstStyle/>
@@ -15423,7 +15872,7 @@
           <a:noFill/>
         </p:spPr>
         <p:txBody>
-          <a:bodyPr wrap="square" lIns="0" rIns="0" tIns="0" bIns="0" anchor="t">
+          <a:bodyPr wrap="square" lIns="0" tIns="0" rIns="0" bIns="0" anchor="t">
             <a:spAutoFit/>
           </a:bodyPr>
           <a:lstStyle/>
@@ -15466,7 +15915,7 @@
           <a:noFill/>
         </p:spPr>
         <p:txBody>
-          <a:bodyPr wrap="square" lIns="0" rIns="0" tIns="0" bIns="0" anchor="t">
+          <a:bodyPr wrap="square" lIns="0" tIns="0" rIns="0" bIns="0" anchor="t">
             <a:spAutoFit/>
           </a:bodyPr>
           <a:lstStyle/>
@@ -15508,7 +15957,7 @@
           <a:noFill/>
         </p:spPr>
         <p:txBody>
-          <a:bodyPr wrap="square" lIns="0" rIns="0" tIns="0" bIns="0" anchor="t">
+          <a:bodyPr wrap="square" lIns="0" tIns="0" rIns="0" bIns="0" anchor="t">
             <a:spAutoFit/>
           </a:bodyPr>
           <a:lstStyle/>
@@ -15543,7 +15992,7 @@
 </file>
 
 <file path=ppt/slides/slide5.xml><?xml version="1.0" encoding="utf-8"?>
-<p:sld xmlns:a="http://schemas.openxmlformats.org/drawingml/2006/main" xmlns:p="http://schemas.openxmlformats.org/presentationml/2006/main" xmlns:r="http://schemas.openxmlformats.org/officeDocument/2006/relationships">
+<p:sld xmlns:a="http://schemas.openxmlformats.org/drawingml/2006/main" xmlns:r="http://schemas.openxmlformats.org/officeDocument/2006/relationships" xmlns:p="http://schemas.openxmlformats.org/presentationml/2006/main">
   <p:cSld>
     <p:spTree>
       <p:nvGrpSpPr>
@@ -15551,7 +16000,14 @@
         <p:cNvGrpSpPr/>
         <p:nvPr/>
       </p:nvGrpSpPr>
-      <p:grpSpPr/>
+      <p:grpSpPr>
+        <a:xfrm>
+          <a:off x="0" y="0"/>
+          <a:ext cx="0" cy="0"/>
+          <a:chOff x="0" y="0"/>
+          <a:chExt cx="0" cy="0"/>
+        </a:xfrm>
+      </p:grpSpPr>
       <p:pic>
         <p:nvPicPr>
           <p:cNvPr id="2" name="Picture 1" descr="tau_logo.png"/>
@@ -15561,7 +16017,7 @@
           <p:nvPr/>
         </p:nvPicPr>
         <p:blipFill>
-          <a:blip r:embed="rId2"/>
+          <a:blip r:embed="rId3"/>
           <a:stretch>
             <a:fillRect/>
           </a:stretch>
@@ -15593,13 +16049,13 @@
           <a:noFill/>
         </p:spPr>
         <p:txBody>
-          <a:bodyPr wrap="square" lIns="0" rIns="0" tIns="0" bIns="0" anchor="ctr">
-            <a:spAutoFit/>
-          </a:bodyPr>
-          <a:lstStyle/>
-          <a:p>
-            <a:r>
-              <a:rPr sz="2300" b="1">
+          <a:bodyPr wrap="square" lIns="0" tIns="0" rIns="0" bIns="0" anchor="ctr">
+            <a:spAutoFit/>
+          </a:bodyPr>
+          <a:lstStyle/>
+          <a:p>
+            <a:r>
+              <a:rPr sz="2300" b="1" dirty="0">
                 <a:solidFill>
                   <a:srgbClr val="111418"/>
                 </a:solidFill>
@@ -15627,13 +16083,13 @@
           <a:noFill/>
         </p:spPr>
         <p:txBody>
-          <a:bodyPr wrap="square" lIns="0" rIns="0" tIns="0" bIns="0">
-            <a:spAutoFit/>
-          </a:bodyPr>
-          <a:lstStyle/>
-          <a:p>
-            <a:r>
-              <a:rPr sz="1050" b="1">
+          <a:bodyPr wrap="square" lIns="0" tIns="0" rIns="0" bIns="0">
+            <a:spAutoFit/>
+          </a:bodyPr>
+          <a:lstStyle/>
+          <a:p>
+            <a:r>
+              <a:rPr sz="1050" b="1" dirty="0">
                 <a:solidFill>
                   <a:srgbClr val="E05D07"/>
                 </a:solidFill>
@@ -15661,7 +16117,7 @@
           <a:noFill/>
         </p:spPr>
         <p:txBody>
-          <a:bodyPr wrap="square" lIns="0" rIns="0" tIns="0" bIns="0">
+          <a:bodyPr wrap="square" lIns="0" tIns="0" rIns="0" bIns="0">
             <a:spAutoFit/>
           </a:bodyPr>
           <a:lstStyle/>
@@ -15688,7 +16144,7 @@
           <p:nvPr/>
         </p:nvPicPr>
         <p:blipFill>
-          <a:blip r:embed="rId3"/>
+          <a:blip r:embed="rId4"/>
           <a:stretch>
             <a:fillRect/>
           </a:stretch>
@@ -15744,6 +16200,7 @@
           <a:lstStyle/>
           <a:p>
             <a:pPr algn="ctr"/>
+            <a:endParaRPr/>
           </a:p>
         </p:txBody>
       </p:sp>
@@ -15764,7 +16221,7 @@
           <a:noFill/>
         </p:spPr>
         <p:txBody>
-          <a:bodyPr wrap="square" lIns="0" rIns="0" tIns="0" bIns="0" anchor="t">
+          <a:bodyPr wrap="square" lIns="0" tIns="0" rIns="0" bIns="0" anchor="t">
             <a:spAutoFit/>
           </a:bodyPr>
           <a:lstStyle/>
@@ -15806,7 +16263,7 @@
           <a:noFill/>
         </p:spPr>
         <p:txBody>
-          <a:bodyPr wrap="square" lIns="0" rIns="0" tIns="0" bIns="0" anchor="t">
+          <a:bodyPr wrap="square" lIns="0" tIns="0" rIns="0" bIns="0" anchor="t">
             <a:spAutoFit/>
           </a:bodyPr>
           <a:lstStyle/>
@@ -15849,7 +16306,7 @@
           <a:noFill/>
         </p:spPr>
         <p:txBody>
-          <a:bodyPr wrap="square" lIns="0" rIns="0" tIns="0" bIns="0" anchor="t">
+          <a:bodyPr wrap="square" lIns="0" tIns="0" rIns="0" bIns="0" anchor="t">
             <a:spAutoFit/>
           </a:bodyPr>
           <a:lstStyle/>
@@ -15891,7 +16348,7 @@
           <a:noFill/>
         </p:spPr>
         <p:txBody>
-          <a:bodyPr wrap="square" lIns="0" rIns="0" tIns="0" bIns="0" anchor="t">
+          <a:bodyPr wrap="square" lIns="0" tIns="0" rIns="0" bIns="0" anchor="t">
             <a:spAutoFit/>
           </a:bodyPr>
           <a:lstStyle/>
@@ -15934,7 +16391,7 @@
           <a:noFill/>
         </p:spPr>
         <p:txBody>
-          <a:bodyPr wrap="square" lIns="0" rIns="0" tIns="0" bIns="0" anchor="t">
+          <a:bodyPr wrap="square" lIns="0" tIns="0" rIns="0" bIns="0" anchor="t">
             <a:spAutoFit/>
           </a:bodyPr>
           <a:lstStyle/>
@@ -15976,7 +16433,7 @@
           <a:noFill/>
         </p:spPr>
         <p:txBody>
-          <a:bodyPr wrap="square" lIns="0" rIns="0" tIns="0" bIns="0" anchor="t">
+          <a:bodyPr wrap="square" lIns="0" tIns="0" rIns="0" bIns="0" anchor="t">
             <a:spAutoFit/>
           </a:bodyPr>
           <a:lstStyle/>
@@ -16011,7 +16468,7 @@
 </file>
 
 <file path=ppt/slides/slide6.xml><?xml version="1.0" encoding="utf-8"?>
-<p:sld xmlns:a="http://schemas.openxmlformats.org/drawingml/2006/main" xmlns:p="http://schemas.openxmlformats.org/presentationml/2006/main" xmlns:r="http://schemas.openxmlformats.org/officeDocument/2006/relationships">
+<p:sld xmlns:a="http://schemas.openxmlformats.org/drawingml/2006/main" xmlns:r="http://schemas.openxmlformats.org/officeDocument/2006/relationships" xmlns:p="http://schemas.openxmlformats.org/presentationml/2006/main">
   <p:cSld>
     <p:spTree>
       <p:nvGrpSpPr>
@@ -16019,7 +16476,14 @@
         <p:cNvGrpSpPr/>
         <p:nvPr/>
       </p:nvGrpSpPr>
-      <p:grpSpPr/>
+      <p:grpSpPr>
+        <a:xfrm>
+          <a:off x="0" y="0"/>
+          <a:ext cx="0" cy="0"/>
+          <a:chOff x="0" y="0"/>
+          <a:chExt cx="0" cy="0"/>
+        </a:xfrm>
+      </p:grpSpPr>
       <p:pic>
         <p:nvPicPr>
           <p:cNvPr id="2" name="Picture 1" descr="tau_logo.png"/>
@@ -16029,7 +16493,7 @@
           <p:nvPr/>
         </p:nvPicPr>
         <p:blipFill>
-          <a:blip r:embed="rId2"/>
+          <a:blip r:embed="rId3"/>
           <a:stretch>
             <a:fillRect/>
           </a:stretch>
@@ -16061,7 +16525,7 @@
           <a:noFill/>
         </p:spPr>
         <p:txBody>
-          <a:bodyPr wrap="square" lIns="0" rIns="0" tIns="0" bIns="0" anchor="ctr">
+          <a:bodyPr wrap="square" lIns="0" tIns="0" rIns="0" bIns="0" anchor="ctr">
             <a:spAutoFit/>
           </a:bodyPr>
           <a:lstStyle/>
@@ -16095,7 +16559,7 @@
           <a:noFill/>
         </p:spPr>
         <p:txBody>
-          <a:bodyPr wrap="square" lIns="0" rIns="0" tIns="0" bIns="0">
+          <a:bodyPr wrap="square" lIns="0" tIns="0" rIns="0" bIns="0">
             <a:spAutoFit/>
           </a:bodyPr>
           <a:lstStyle/>
@@ -16129,7 +16593,7 @@
           <a:noFill/>
         </p:spPr>
         <p:txBody>
-          <a:bodyPr wrap="square" lIns="0" rIns="0" tIns="0" bIns="0">
+          <a:bodyPr wrap="square" lIns="0" tIns="0" rIns="0" bIns="0">
             <a:spAutoFit/>
           </a:bodyPr>
           <a:lstStyle/>
@@ -16156,7 +16620,7 @@
           <p:nvPr/>
         </p:nvPicPr>
         <p:blipFill>
-          <a:blip r:embed="rId3"/>
+          <a:blip r:embed="rId4"/>
           <a:stretch>
             <a:fillRect/>
           </a:stretch>
@@ -16212,6 +16676,7 @@
           <a:lstStyle/>
           <a:p>
             <a:pPr algn="ctr"/>
+            <a:endParaRPr/>
           </a:p>
         </p:txBody>
       </p:sp>
@@ -16232,7 +16697,7 @@
           <a:noFill/>
         </p:spPr>
         <p:txBody>
-          <a:bodyPr wrap="square" lIns="0" rIns="0" tIns="0" bIns="0" anchor="t">
+          <a:bodyPr wrap="square" lIns="0" tIns="0" rIns="0" bIns="0" anchor="t">
             <a:spAutoFit/>
           </a:bodyPr>
           <a:lstStyle/>
@@ -16292,7 +16757,7 @@
           <a:noFill/>
         </p:spPr>
         <p:txBody>
-          <a:bodyPr wrap="square" lIns="0" rIns="0" tIns="0" bIns="0" anchor="t">
+          <a:bodyPr wrap="square" lIns="0" tIns="0" rIns="0" bIns="0" anchor="t">
             <a:spAutoFit/>
           </a:bodyPr>
           <a:lstStyle/>
@@ -16326,7 +16791,7 @@
           <p:nvPr/>
         </p:nvPicPr>
         <p:blipFill>
-          <a:blip r:embed="rId4"/>
+          <a:blip r:embed="rId5"/>
           <a:stretch>
             <a:fillRect/>
           </a:stretch>
@@ -16358,7 +16823,7 @@
           <a:noFill/>
         </p:spPr>
         <p:txBody>
-          <a:bodyPr wrap="square" lIns="0" rIns="0" tIns="0" bIns="0" anchor="t">
+          <a:bodyPr wrap="square" lIns="0" tIns="0" rIns="0" bIns="0" anchor="t">
             <a:spAutoFit/>
           </a:bodyPr>
           <a:lstStyle/>
@@ -16424,6 +16889,7 @@
           <a:lstStyle/>
           <a:p>
             <a:pPr algn="ctr"/>
+            <a:endParaRPr/>
           </a:p>
         </p:txBody>
       </p:sp>
@@ -16444,7 +16910,7 @@
           <a:noFill/>
         </p:spPr>
         <p:txBody>
-          <a:bodyPr wrap="square" lIns="0" rIns="0" tIns="0" bIns="0" anchor="t">
+          <a:bodyPr wrap="square" lIns="0" tIns="0" rIns="0" bIns="0" anchor="t">
             <a:spAutoFit/>
           </a:bodyPr>
           <a:lstStyle/>
@@ -16486,7 +16952,7 @@
           <a:noFill/>
         </p:spPr>
         <p:txBody>
-          <a:bodyPr wrap="square" lIns="0" rIns="0" tIns="0" bIns="0" anchor="t">
+          <a:bodyPr wrap="square" lIns="0" tIns="0" rIns="0" bIns="0" anchor="t">
             <a:spAutoFit/>
           </a:bodyPr>
           <a:lstStyle/>
@@ -16528,7 +16994,7 @@
           <a:noFill/>
         </p:spPr>
         <p:txBody>
-          <a:bodyPr wrap="square" lIns="0" rIns="0" tIns="0" bIns="0" anchor="t">
+          <a:bodyPr wrap="square" lIns="0" tIns="0" rIns="0" bIns="0" anchor="t">
             <a:spAutoFit/>
           </a:bodyPr>
           <a:lstStyle/>
@@ -16563,7 +17029,7 @@
 </file>
 
 <file path=ppt/slides/slide7.xml><?xml version="1.0" encoding="utf-8"?>
-<p:sld xmlns:a="http://schemas.openxmlformats.org/drawingml/2006/main" xmlns:p="http://schemas.openxmlformats.org/presentationml/2006/main" xmlns:r="http://schemas.openxmlformats.org/officeDocument/2006/relationships">
+<p:sld xmlns:a="http://schemas.openxmlformats.org/drawingml/2006/main" xmlns:r="http://schemas.openxmlformats.org/officeDocument/2006/relationships" xmlns:p="http://schemas.openxmlformats.org/presentationml/2006/main">
   <p:cSld>
     <p:spTree>
       <p:nvGrpSpPr>
@@ -16571,7 +17037,14 @@
         <p:cNvGrpSpPr/>
         <p:nvPr/>
       </p:nvGrpSpPr>
-      <p:grpSpPr/>
+      <p:grpSpPr>
+        <a:xfrm>
+          <a:off x="0" y="0"/>
+          <a:ext cx="0" cy="0"/>
+          <a:chOff x="0" y="0"/>
+          <a:chExt cx="0" cy="0"/>
+        </a:xfrm>
+      </p:grpSpPr>
       <p:pic>
         <p:nvPicPr>
           <p:cNvPr id="2" name="Picture 1" descr="tau_logo.png"/>
@@ -16581,7 +17054,7 @@
           <p:nvPr/>
         </p:nvPicPr>
         <p:blipFill>
-          <a:blip r:embed="rId2"/>
+          <a:blip r:embed="rId3"/>
           <a:stretch>
             <a:fillRect/>
           </a:stretch>
@@ -16613,7 +17086,7 @@
           <a:noFill/>
         </p:spPr>
         <p:txBody>
-          <a:bodyPr wrap="square" lIns="0" rIns="0" tIns="0" bIns="0" anchor="ctr">
+          <a:bodyPr wrap="square" lIns="0" tIns="0" rIns="0" bIns="0" anchor="ctr">
             <a:spAutoFit/>
           </a:bodyPr>
           <a:lstStyle/>
@@ -16647,7 +17120,7 @@
           <a:noFill/>
         </p:spPr>
         <p:txBody>
-          <a:bodyPr wrap="square" lIns="0" rIns="0" tIns="0" bIns="0">
+          <a:bodyPr wrap="square" lIns="0" tIns="0" rIns="0" bIns="0">
             <a:spAutoFit/>
           </a:bodyPr>
           <a:lstStyle/>
@@ -16681,7 +17154,7 @@
           <a:noFill/>
         </p:spPr>
         <p:txBody>
-          <a:bodyPr wrap="square" lIns="0" rIns="0" tIns="0" bIns="0">
+          <a:bodyPr wrap="square" lIns="0" tIns="0" rIns="0" bIns="0">
             <a:spAutoFit/>
           </a:bodyPr>
           <a:lstStyle/>
@@ -16708,7 +17181,7 @@
           <p:nvPr/>
         </p:nvPicPr>
         <p:blipFill>
-          <a:blip r:embed="rId3"/>
+          <a:blip r:embed="rId4"/>
           <a:stretch>
             <a:fillRect/>
           </a:stretch>
@@ -16764,6 +17237,7 @@
           <a:lstStyle/>
           <a:p>
             <a:pPr algn="ctr"/>
+            <a:endParaRPr/>
           </a:p>
         </p:txBody>
       </p:sp>
@@ -16784,7 +17258,7 @@
           <a:noFill/>
         </p:spPr>
         <p:txBody>
-          <a:bodyPr wrap="square" lIns="0" rIns="0" tIns="0" bIns="0" anchor="t">
+          <a:bodyPr wrap="square" lIns="0" tIns="0" rIns="0" bIns="0" anchor="t">
             <a:spAutoFit/>
           </a:bodyPr>
           <a:lstStyle/>
@@ -16844,7 +17318,7 @@
           <a:noFill/>
         </p:spPr>
         <p:txBody>
-          <a:bodyPr wrap="square" lIns="0" rIns="0" tIns="0" bIns="0" anchor="t">
+          <a:bodyPr wrap="square" lIns="0" tIns="0" rIns="0" bIns="0" anchor="t">
             <a:spAutoFit/>
           </a:bodyPr>
           <a:lstStyle/>
@@ -16878,7 +17352,7 @@
           <p:nvPr/>
         </p:nvPicPr>
         <p:blipFill>
-          <a:blip r:embed="rId4"/>
+          <a:blip r:embed="rId5"/>
           <a:stretch>
             <a:fillRect/>
           </a:stretch>
@@ -16910,7 +17384,7 @@
           <a:noFill/>
         </p:spPr>
         <p:txBody>
-          <a:bodyPr wrap="square" lIns="0" rIns="0" tIns="0" bIns="0" anchor="t">
+          <a:bodyPr wrap="square" lIns="0" tIns="0" rIns="0" bIns="0" anchor="t">
             <a:spAutoFit/>
           </a:bodyPr>
           <a:lstStyle/>
@@ -16976,6 +17450,7 @@
           <a:lstStyle/>
           <a:p>
             <a:pPr algn="ctr"/>
+            <a:endParaRPr/>
           </a:p>
         </p:txBody>
       </p:sp>
@@ -16996,7 +17471,7 @@
           <a:noFill/>
         </p:spPr>
         <p:txBody>
-          <a:bodyPr wrap="square" lIns="0" rIns="0" tIns="0" bIns="0" anchor="t">
+          <a:bodyPr wrap="square" lIns="0" tIns="0" rIns="0" bIns="0" anchor="t">
             <a:spAutoFit/>
           </a:bodyPr>
           <a:lstStyle/>
@@ -17038,7 +17513,7 @@
           <a:noFill/>
         </p:spPr>
         <p:txBody>
-          <a:bodyPr wrap="square" lIns="0" rIns="0" tIns="0" bIns="0" anchor="t">
+          <a:bodyPr wrap="square" lIns="0" tIns="0" rIns="0" bIns="0" anchor="t">
             <a:spAutoFit/>
           </a:bodyPr>
           <a:lstStyle/>
@@ -17080,7 +17555,7 @@
           <a:noFill/>
         </p:spPr>
         <p:txBody>
-          <a:bodyPr wrap="square" lIns="0" rIns="0" tIns="0" bIns="0" anchor="t">
+          <a:bodyPr wrap="square" lIns="0" tIns="0" rIns="0" bIns="0" anchor="t">
             <a:spAutoFit/>
           </a:bodyPr>
           <a:lstStyle/>
@@ -17115,7 +17590,7 @@
 </file>
 
 <file path=ppt/slides/slide8.xml><?xml version="1.0" encoding="utf-8"?>
-<p:sld xmlns:a="http://schemas.openxmlformats.org/drawingml/2006/main" xmlns:p="http://schemas.openxmlformats.org/presentationml/2006/main" xmlns:r="http://schemas.openxmlformats.org/officeDocument/2006/relationships">
+<p:sld xmlns:a="http://schemas.openxmlformats.org/drawingml/2006/main" xmlns:r="http://schemas.openxmlformats.org/officeDocument/2006/relationships" xmlns:p="http://schemas.openxmlformats.org/presentationml/2006/main">
   <p:cSld>
     <p:spTree>
       <p:nvGrpSpPr>
@@ -17123,7 +17598,14 @@
         <p:cNvGrpSpPr/>
         <p:nvPr/>
       </p:nvGrpSpPr>
-      <p:grpSpPr/>
+      <p:grpSpPr>
+        <a:xfrm>
+          <a:off x="0" y="0"/>
+          <a:ext cx="0" cy="0"/>
+          <a:chOff x="0" y="0"/>
+          <a:chExt cx="0" cy="0"/>
+        </a:xfrm>
+      </p:grpSpPr>
       <p:pic>
         <p:nvPicPr>
           <p:cNvPr id="2" name="Picture 1" descr="tau_logo.png"/>
@@ -17133,7 +17615,7 @@
           <p:nvPr/>
         </p:nvPicPr>
         <p:blipFill>
-          <a:blip r:embed="rId2"/>
+          <a:blip r:embed="rId3"/>
           <a:stretch>
             <a:fillRect/>
           </a:stretch>
@@ -17165,7 +17647,7 @@
           <a:noFill/>
         </p:spPr>
         <p:txBody>
-          <a:bodyPr wrap="square" lIns="0" rIns="0" tIns="0" bIns="0" anchor="ctr">
+          <a:bodyPr wrap="square" lIns="0" tIns="0" rIns="0" bIns="0" anchor="ctr">
             <a:spAutoFit/>
           </a:bodyPr>
           <a:lstStyle/>
@@ -17199,7 +17681,7 @@
           <a:noFill/>
         </p:spPr>
         <p:txBody>
-          <a:bodyPr wrap="square" lIns="0" rIns="0" tIns="0" bIns="0">
+          <a:bodyPr wrap="square" lIns="0" tIns="0" rIns="0" bIns="0">
             <a:spAutoFit/>
           </a:bodyPr>
           <a:lstStyle/>
@@ -17233,7 +17715,7 @@
           <a:noFill/>
         </p:spPr>
         <p:txBody>
-          <a:bodyPr wrap="square" lIns="0" rIns="0" tIns="0" bIns="0">
+          <a:bodyPr wrap="square" lIns="0" tIns="0" rIns="0" bIns="0">
             <a:spAutoFit/>
           </a:bodyPr>
           <a:lstStyle/>
@@ -17260,7 +17742,7 @@
           <p:nvPr/>
         </p:nvPicPr>
         <p:blipFill>
-          <a:blip r:embed="rId3"/>
+          <a:blip r:embed="rId4"/>
           <a:stretch>
             <a:fillRect/>
           </a:stretch>
@@ -17316,6 +17798,7 @@
           <a:lstStyle/>
           <a:p>
             <a:pPr algn="ctr"/>
+            <a:endParaRPr/>
           </a:p>
         </p:txBody>
       </p:sp>
@@ -17336,7 +17819,7 @@
           <a:noFill/>
         </p:spPr>
         <p:txBody>
-          <a:bodyPr wrap="square" lIns="0" rIns="0" tIns="0" bIns="0" anchor="t">
+          <a:bodyPr wrap="square" lIns="0" tIns="0" rIns="0" bIns="0" anchor="t">
             <a:spAutoFit/>
           </a:bodyPr>
           <a:lstStyle/>
@@ -17396,7 +17879,7 @@
           <a:noFill/>
         </p:spPr>
         <p:txBody>
-          <a:bodyPr wrap="square" lIns="0" rIns="0" tIns="0" bIns="0" anchor="t">
+          <a:bodyPr wrap="square" lIns="0" tIns="0" rIns="0" bIns="0" anchor="t">
             <a:spAutoFit/>
           </a:bodyPr>
           <a:lstStyle/>
@@ -17430,7 +17913,7 @@
           <p:nvPr/>
         </p:nvPicPr>
         <p:blipFill>
-          <a:blip r:embed="rId4"/>
+          <a:blip r:embed="rId5"/>
           <a:stretch>
             <a:fillRect/>
           </a:stretch>
@@ -17462,7 +17945,7 @@
           <a:noFill/>
         </p:spPr>
         <p:txBody>
-          <a:bodyPr wrap="square" lIns="0" rIns="0" tIns="0" bIns="0" anchor="t">
+          <a:bodyPr wrap="square" lIns="0" tIns="0" rIns="0" bIns="0" anchor="t">
             <a:spAutoFit/>
           </a:bodyPr>
           <a:lstStyle/>
@@ -17528,6 +18011,7 @@
           <a:lstStyle/>
           <a:p>
             <a:pPr algn="ctr"/>
+            <a:endParaRPr/>
           </a:p>
         </p:txBody>
       </p:sp>
@@ -17548,7 +18032,7 @@
           <a:noFill/>
         </p:spPr>
         <p:txBody>
-          <a:bodyPr wrap="square" lIns="0" rIns="0" tIns="0" bIns="0" anchor="t">
+          <a:bodyPr wrap="square" lIns="0" tIns="0" rIns="0" bIns="0" anchor="t">
             <a:spAutoFit/>
           </a:bodyPr>
           <a:lstStyle/>
@@ -17590,7 +18074,7 @@
           <a:noFill/>
         </p:spPr>
         <p:txBody>
-          <a:bodyPr wrap="square" lIns="0" rIns="0" tIns="0" bIns="0" anchor="t">
+          <a:bodyPr wrap="square" lIns="0" tIns="0" rIns="0" bIns="0" anchor="t">
             <a:spAutoFit/>
           </a:bodyPr>
           <a:lstStyle/>
@@ -17632,7 +18116,7 @@
           <a:noFill/>
         </p:spPr>
         <p:txBody>
-          <a:bodyPr wrap="square" lIns="0" rIns="0" tIns="0" bIns="0" anchor="t">
+          <a:bodyPr wrap="square" lIns="0" tIns="0" rIns="0" bIns="0" anchor="t">
             <a:spAutoFit/>
           </a:bodyPr>
           <a:lstStyle/>
@@ -17667,7 +18151,7 @@
 </file>
 
 <file path=ppt/slides/slide9.xml><?xml version="1.0" encoding="utf-8"?>
-<p:sld xmlns:a="http://schemas.openxmlformats.org/drawingml/2006/main" xmlns:p="http://schemas.openxmlformats.org/presentationml/2006/main" xmlns:r="http://schemas.openxmlformats.org/officeDocument/2006/relationships">
+<p:sld xmlns:a="http://schemas.openxmlformats.org/drawingml/2006/main" xmlns:r="http://schemas.openxmlformats.org/officeDocument/2006/relationships" xmlns:p="http://schemas.openxmlformats.org/presentationml/2006/main">
   <p:cSld>
     <p:spTree>
       <p:nvGrpSpPr>
@@ -17675,7 +18159,14 @@
         <p:cNvGrpSpPr/>
         <p:nvPr/>
       </p:nvGrpSpPr>
-      <p:grpSpPr/>
+      <p:grpSpPr>
+        <a:xfrm>
+          <a:off x="0" y="0"/>
+          <a:ext cx="0" cy="0"/>
+          <a:chOff x="0" y="0"/>
+          <a:chExt cx="0" cy="0"/>
+        </a:xfrm>
+      </p:grpSpPr>
       <p:pic>
         <p:nvPicPr>
           <p:cNvPr id="2" name="Picture 1" descr="tau_logo.png"/>
@@ -17685,7 +18176,7 @@
           <p:nvPr/>
         </p:nvPicPr>
         <p:blipFill>
-          <a:blip r:embed="rId2"/>
+          <a:blip r:embed="rId3"/>
           <a:stretch>
             <a:fillRect/>
           </a:stretch>
@@ -17717,7 +18208,7 @@
           <a:noFill/>
         </p:spPr>
         <p:txBody>
-          <a:bodyPr wrap="square" lIns="0" rIns="0" tIns="0" bIns="0" anchor="ctr">
+          <a:bodyPr wrap="square" lIns="0" tIns="0" rIns="0" bIns="0" anchor="ctr">
             <a:spAutoFit/>
           </a:bodyPr>
           <a:lstStyle/>
@@ -17751,7 +18242,7 @@
           <a:noFill/>
         </p:spPr>
         <p:txBody>
-          <a:bodyPr wrap="square" lIns="0" rIns="0" tIns="0" bIns="0">
+          <a:bodyPr wrap="square" lIns="0" tIns="0" rIns="0" bIns="0">
             <a:spAutoFit/>
           </a:bodyPr>
           <a:lstStyle/>
@@ -17785,7 +18276,7 @@
           <a:noFill/>
         </p:spPr>
         <p:txBody>
-          <a:bodyPr wrap="square" lIns="0" rIns="0" tIns="0" bIns="0">
+          <a:bodyPr wrap="square" lIns="0" tIns="0" rIns="0" bIns="0">
             <a:spAutoFit/>
           </a:bodyPr>
           <a:lstStyle/>
@@ -17812,7 +18303,7 @@
           <p:nvPr/>
         </p:nvPicPr>
         <p:blipFill>
-          <a:blip r:embed="rId3"/>
+          <a:blip r:embed="rId4"/>
           <a:stretch>
             <a:fillRect/>
           </a:stretch>
@@ -17868,6 +18359,7 @@
           <a:lstStyle/>
           <a:p>
             <a:pPr algn="ctr"/>
+            <a:endParaRPr/>
           </a:p>
         </p:txBody>
       </p:sp>
@@ -17888,7 +18380,7 @@
           <a:noFill/>
         </p:spPr>
         <p:txBody>
-          <a:bodyPr wrap="square" lIns="0" rIns="0" tIns="0" bIns="0" anchor="t">
+          <a:bodyPr wrap="square" lIns="0" tIns="0" rIns="0" bIns="0" anchor="t">
             <a:spAutoFit/>
           </a:bodyPr>
           <a:lstStyle/>
@@ -17948,7 +18440,7 @@
           <a:noFill/>
         </p:spPr>
         <p:txBody>
-          <a:bodyPr wrap="square" lIns="0" rIns="0" tIns="0" bIns="0" anchor="t">
+          <a:bodyPr wrap="square" lIns="0" tIns="0" rIns="0" bIns="0" anchor="t">
             <a:spAutoFit/>
           </a:bodyPr>
           <a:lstStyle/>
@@ -17982,7 +18474,7 @@
           <p:nvPr/>
         </p:nvPicPr>
         <p:blipFill>
-          <a:blip r:embed="rId4"/>
+          <a:blip r:embed="rId5"/>
           <a:stretch>
             <a:fillRect/>
           </a:stretch>
@@ -18014,7 +18506,7 @@
           <a:noFill/>
         </p:spPr>
         <p:txBody>
-          <a:bodyPr wrap="square" lIns="0" rIns="0" tIns="0" bIns="0" anchor="t">
+          <a:bodyPr wrap="square" lIns="0" tIns="0" rIns="0" bIns="0" anchor="t">
             <a:spAutoFit/>
           </a:bodyPr>
           <a:lstStyle/>
@@ -18080,6 +18572,7 @@
           <a:lstStyle/>
           <a:p>
             <a:pPr algn="ctr"/>
+            <a:endParaRPr/>
           </a:p>
         </p:txBody>
       </p:sp>
@@ -18100,7 +18593,7 @@
           <a:noFill/>
         </p:spPr>
         <p:txBody>
-          <a:bodyPr wrap="square" lIns="0" rIns="0" tIns="0" bIns="0" anchor="t">
+          <a:bodyPr wrap="square" lIns="0" tIns="0" rIns="0" bIns="0" anchor="t">
             <a:spAutoFit/>
           </a:bodyPr>
           <a:lstStyle/>
@@ -18142,7 +18635,7 @@
           <a:noFill/>
         </p:spPr>
         <p:txBody>
-          <a:bodyPr wrap="square" lIns="0" rIns="0" tIns="0" bIns="0" anchor="t">
+          <a:bodyPr wrap="square" lIns="0" tIns="0" rIns="0" bIns="0" anchor="t">
             <a:spAutoFit/>
           </a:bodyPr>
           <a:lstStyle/>
@@ -18184,7 +18677,7 @@
           <a:noFill/>
         </p:spPr>
         <p:txBody>
-          <a:bodyPr wrap="square" lIns="0" rIns="0" tIns="0" bIns="0" anchor="t">
+          <a:bodyPr wrap="square" lIns="0" tIns="0" rIns="0" bIns="0" anchor="t">
             <a:spAutoFit/>
           </a:bodyPr>
           <a:lstStyle/>
